--- a/docs/aaa-platform-presentation-github.pptx
+++ b/docs/aaa-platform-presentation-github.pptx
@@ -5,27 +5,28 @@
     <p:sldMasterId id="2147483648" r:id="rId1"/>
   </p:sldMasterIdLst>
   <p:notesMasterIdLst>
-    <p:notesMasterId r:id="rId20"/>
+    <p:notesMasterId r:id="rId21"/>
   </p:notesMasterIdLst>
   <p:sldIdLst>
-    <p:sldId id="256" r:id="rId2"/>
-    <p:sldId id="272" r:id="rId3"/>
-    <p:sldId id="271" r:id="rId4"/>
-    <p:sldId id="273" r:id="rId5"/>
-    <p:sldId id="257" r:id="rId6"/>
-    <p:sldId id="258" r:id="rId7"/>
-    <p:sldId id="259" r:id="rId8"/>
-    <p:sldId id="260" r:id="rId9"/>
-    <p:sldId id="261" r:id="rId10"/>
-    <p:sldId id="262" r:id="rId11"/>
-    <p:sldId id="263" r:id="rId12"/>
-    <p:sldId id="264" r:id="rId13"/>
-    <p:sldId id="265" r:id="rId14"/>
-    <p:sldId id="266" r:id="rId15"/>
-    <p:sldId id="267" r:id="rId16"/>
-    <p:sldId id="268" r:id="rId17"/>
-    <p:sldId id="269" r:id="rId18"/>
-    <p:sldId id="270" r:id="rId19"/>
+    <p:sldId id="274" r:id="rId2"/>
+    <p:sldId id="256" r:id="rId3"/>
+    <p:sldId id="272" r:id="rId4"/>
+    <p:sldId id="271" r:id="rId5"/>
+    <p:sldId id="273" r:id="rId6"/>
+    <p:sldId id="257" r:id="rId7"/>
+    <p:sldId id="258" r:id="rId8"/>
+    <p:sldId id="259" r:id="rId9"/>
+    <p:sldId id="260" r:id="rId10"/>
+    <p:sldId id="261" r:id="rId11"/>
+    <p:sldId id="262" r:id="rId12"/>
+    <p:sldId id="263" r:id="rId13"/>
+    <p:sldId id="264" r:id="rId14"/>
+    <p:sldId id="265" r:id="rId15"/>
+    <p:sldId id="266" r:id="rId16"/>
+    <p:sldId id="267" r:id="rId17"/>
+    <p:sldId id="268" r:id="rId18"/>
+    <p:sldId id="269" r:id="rId19"/>
+    <p:sldId id="270" r:id="rId20"/>
   </p:sldIdLst>
   <p:sldSz cx="9144000" cy="5143500" type="screen16x9"/>
   <p:notesSz cx="5143500" cy="9144000"/>
@@ -319,7 +320,7 @@
           <a:p>
             <a:fld id="{F7021451-1387-4CA6-816F-3879F97B5CBC}" type="slidenum">
               <a:rPr lang="en-US"/>
-              <a:t>1</a:t>
+              <a:t>2</a:t>
             </a:fld>
             <a:endParaRPr lang="en-US"/>
           </a:p>
@@ -842,6 +843,90 @@
 </p:notes>
 </file>
 
+<file path=ppt/notesSlides/notesSlide16.xml><?xml version="1.0" encoding="utf-8"?>
+<p:notes xmlns:a="http://schemas.openxmlformats.org/drawingml/2006/main" xmlns:r="http://schemas.openxmlformats.org/officeDocument/2006/relationships" xmlns:p="http://schemas.openxmlformats.org/presentationml/2006/main">
+  <p:cSld>
+    <p:spTree>
+      <p:nvGrpSpPr>
+        <p:cNvPr id="1" name=""/>
+        <p:cNvGrpSpPr/>
+        <p:nvPr/>
+      </p:nvGrpSpPr>
+      <p:grpSpPr>
+        <a:xfrm>
+          <a:off x="0" y="0"/>
+          <a:ext cx="0" cy="0"/>
+          <a:chOff x="0" y="0"/>
+          <a:chExt cx="0" cy="0"/>
+        </a:xfrm>
+      </p:grpSpPr>
+      <p:sp>
+        <p:nvSpPr>
+          <p:cNvPr id="2" name="Slide Image Placeholder 1"/>
+          <p:cNvSpPr>
+            <a:spLocks noGrp="1" noRot="1" noChangeAspect="1"/>
+          </p:cNvSpPr>
+          <p:nvPr>
+            <p:ph type="sldImg"/>
+          </p:nvPr>
+        </p:nvSpPr>
+        <p:spPr/>
+      </p:sp>
+      <p:sp>
+        <p:nvSpPr>
+          <p:cNvPr id="3" name="Notes Placeholder 2"/>
+          <p:cNvSpPr>
+            <a:spLocks noGrp="1"/>
+          </p:cNvSpPr>
+          <p:nvPr>
+            <p:ph type="body" idx="1"/>
+          </p:nvPr>
+        </p:nvSpPr>
+        <p:spPr/>
+        <p:txBody>
+          <a:bodyPr/>
+          <a:lstStyle/>
+          <a:p>
+            <a:endParaRPr lang="en-US" dirty="0"/>
+          </a:p>
+        </p:txBody>
+      </p:sp>
+      <p:sp>
+        <p:nvSpPr>
+          <p:cNvPr id="4" name="Slide Number Placeholder 3"/>
+          <p:cNvSpPr>
+            <a:spLocks noGrp="1"/>
+          </p:cNvSpPr>
+          <p:nvPr>
+            <p:ph type="sldNum" sz="quarter" idx="10"/>
+          </p:nvPr>
+        </p:nvSpPr>
+        <p:spPr/>
+        <p:txBody>
+          <a:bodyPr/>
+          <a:lstStyle/>
+          <a:p>
+            <a:fld id="{F7021451-1387-4CA6-816F-3879F97B5CBC}" type="slidenum">
+              <a:rPr lang="en-US"/>
+              <a:t>19</a:t>
+            </a:fld>
+            <a:endParaRPr lang="en-US"/>
+          </a:p>
+        </p:txBody>
+      </p:sp>
+    </p:spTree>
+    <p:extLst>
+      <p:ext uri="{BB962C8B-B14F-4D97-AF65-F5344CB8AC3E}">
+        <p14:creationId xmlns:p14="http://schemas.microsoft.com/office/powerpoint/2010/main" val="1024086991"/>
+      </p:ext>
+    </p:extLst>
+  </p:cSld>
+  <p:clrMapOvr>
+    <a:masterClrMapping/>
+  </p:clrMapOvr>
+</p:notes>
+</file>
+
 <file path=ppt/notesSlides/notesSlide2.xml><?xml version="1.0" encoding="utf-8"?>
 <p:notes xmlns:a="http://schemas.openxmlformats.org/drawingml/2006/main" xmlns:r="http://schemas.openxmlformats.org/officeDocument/2006/relationships" xmlns:p="http://schemas.openxmlformats.org/presentationml/2006/main">
   <p:cSld>
@@ -869,7 +954,21 @@
             <p:ph type="sldImg"/>
           </p:nvPr>
         </p:nvSpPr>
-        <p:spPr/>
+        <p:spPr>
+          <a:xfrm>
+            <a:off x="-171450" y="1143000"/>
+            <a:ext cx="5486400" cy="3086100"/>
+          </a:xfrm>
+          <a:prstGeom prst="rect">
+            <a:avLst/>
+          </a:prstGeom>
+          <a:noFill/>
+          <a:ln w="12700">
+            <a:solidFill>
+              <a:prstClr val="black"/>
+            </a:solidFill>
+          </a:ln>
+        </p:spPr>
       </p:sp>
       <p:sp>
         <p:nvSpPr>
@@ -881,42 +980,78 @@
             <p:ph type="body" idx="1"/>
           </p:nvPr>
         </p:nvSpPr>
-        <p:spPr/>
+        <p:spPr>
+          <a:xfrm>
+            <a:off x="514350" y="4400550"/>
+            <a:ext cx="4114800" cy="3600450"/>
+          </a:xfrm>
+          <a:prstGeom prst="rect">
+            <a:avLst/>
+          </a:prstGeom>
+        </p:spPr>
         <p:txBody>
           <a:bodyPr/>
           <a:lstStyle/>
           <a:p>
-            <a:endParaRPr lang="en-US" dirty="0"/>
-          </a:p>
-        </p:txBody>
-      </p:sp>
-      <p:sp>
-        <p:nvSpPr>
-          <p:cNvPr id="4" name="Slide Number Placeholder 3"/>
-          <p:cNvSpPr>
-            <a:spLocks noGrp="1"/>
-          </p:cNvSpPr>
-          <p:nvPr>
-            <p:ph type="sldNum" sz="quarter" idx="10"/>
-          </p:nvPr>
-        </p:nvSpPr>
-        <p:spPr/>
-        <p:txBody>
-          <a:bodyPr/>
-          <a:lstStyle/>
-          <a:p>
-            <a:fld id="{F7021451-1387-4CA6-816F-3879F97B5CBC}" type="slidenum">
-              <a:rPr lang="en-US"/>
-              <a:t>5</a:t>
-            </a:fld>
-            <a:endParaRPr lang="en-US"/>
+            <a:r>
+              <a:rPr lang="en-US" dirty="0"/>
+              <a:t>2 PGW</a:t>
+            </a:r>
+          </a:p>
+          <a:p>
+            <a:r>
+              <a:rPr lang="en-US" dirty="0"/>
+              <a:t>Multiple routing domain</a:t>
+            </a:r>
+          </a:p>
+          <a:p>
+            <a:r>
+              <a:rPr lang="en-US" dirty="0"/>
+              <a:t>Static ip on multi IMSI</a:t>
+            </a:r>
+          </a:p>
+          <a:p>
+            <a:r>
+              <a:rPr lang="en-US" dirty="0"/>
+              <a:t>One AAA for all</a:t>
+            </a:r>
+          </a:p>
+          <a:p>
+            <a:r>
+              <a:rPr lang="en-US" dirty="0"/>
+              <a:t>Load test</a:t>
+            </a:r>
+          </a:p>
+          <a:p>
+            <a:r>
+              <a:rPr lang="en-US" dirty="0"/>
+              <a:t>Regression</a:t>
+            </a:r>
+          </a:p>
+          <a:p>
+            <a:r>
+              <a:rPr lang="en-US" dirty="0"/>
+              <a:t>Multi AZ</a:t>
+            </a:r>
+          </a:p>
+          <a:p>
+            <a:r>
+              <a:rPr lang="en-US" dirty="0"/>
+              <a:t>Scale out</a:t>
+            </a:r>
+          </a:p>
+          <a:p>
+            <a:r>
+              <a:rPr lang="en-US" dirty="0"/>
+              <a:t>Single API  for CMP</a:t>
+            </a:r>
           </a:p>
         </p:txBody>
       </p:sp>
     </p:spTree>
     <p:extLst>
       <p:ext uri="{BB962C8B-B14F-4D97-AF65-F5344CB8AC3E}">
-        <p14:creationId xmlns:p14="http://schemas.microsoft.com/office/powerpoint/2010/main" val="1024086991"/>
+        <p14:creationId xmlns:p14="http://schemas.microsoft.com/office/powerpoint/2010/main" val="4188197482"/>
       </p:ext>
     </p:extLst>
   </p:cSld>
@@ -1828,11 +1963,41 @@
 
 <file path=ppt/slides/slide1.xml><?xml version="1.0" encoding="utf-8"?>
 <p:sld xmlns:a="http://schemas.openxmlformats.org/drawingml/2006/main" xmlns:r="http://schemas.openxmlformats.org/officeDocument/2006/relationships" xmlns:p="http://schemas.openxmlformats.org/presentationml/2006/main">
-  <p:cSld name="Slide 1">
+  <p:cSld>
+    <p:spTree>
+      <p:nvGrpSpPr>
+        <p:cNvPr id="1" name=""/>
+        <p:cNvGrpSpPr/>
+        <p:nvPr/>
+      </p:nvGrpSpPr>
+      <p:grpSpPr>
+        <a:xfrm>
+          <a:off x="0" y="0"/>
+          <a:ext cx="0" cy="0"/>
+          <a:chOff x="0" y="0"/>
+          <a:chExt cx="0" cy="0"/>
+        </a:xfrm>
+      </p:grpSpPr>
+    </p:spTree>
+    <p:extLst>
+      <p:ext uri="{BB962C8B-B14F-4D97-AF65-F5344CB8AC3E}">
+        <p14:creationId xmlns:p14="http://schemas.microsoft.com/office/powerpoint/2010/main" val="710932374"/>
+      </p:ext>
+    </p:extLst>
+  </p:cSld>
+  <p:clrMapOvr>
+    <a:masterClrMapping/>
+  </p:clrMapOvr>
+</p:sld>
+</file>
+
+<file path=ppt/slides/slide10.xml><?xml version="1.0" encoding="utf-8"?>
+<p:sld xmlns:a="http://schemas.openxmlformats.org/drawingml/2006/main" xmlns:r="http://schemas.openxmlformats.org/officeDocument/2006/relationships" xmlns:p="http://schemas.openxmlformats.org/presentationml/2006/main">
+  <p:cSld name="Slide 6">
     <p:bg>
       <p:bgPr>
         <a:solidFill>
-          <a:srgbClr val="1E2761"/>
+          <a:srgbClr val="EEF3FB"/>
         </a:solidFill>
         <a:effectLst/>
       </p:bgPr>
@@ -1859,20 +2024,18 @@
         </p:nvSpPr>
         <p:spPr>
           <a:xfrm>
-            <a:off x="5943600" y="-274320"/>
-            <a:ext cx="4114800" cy="5692140"/>
-          </a:xfrm>
-          <a:prstGeom prst="rect">
-            <a:avLst/>
-          </a:prstGeom>
-          <a:solidFill>
-            <a:srgbClr val="172055">
-              <a:alpha val="60000"/>
-            </a:srgbClr>
+            <a:off x="0" y="0"/>
+            <a:ext cx="9144000" cy="777240"/>
+          </a:xfrm>
+          <a:prstGeom prst="rect">
+            <a:avLst/>
+          </a:prstGeom>
+          <a:solidFill>
+            <a:srgbClr val="1E2761"/>
           </a:solidFill>
           <a:ln w="12700">
             <a:solidFill>
-              <a:srgbClr val="172055"/>
+              <a:srgbClr val="1E2761"/>
             </a:solidFill>
             <a:prstDash val="solid"/>
           </a:ln>
@@ -1887,29 +2050,106 @@
       </p:sp>
       <p:sp>
         <p:nvSpPr>
-          <p:cNvPr id="3" name="Shape 1"/>
-          <p:cNvSpPr/>
-          <p:nvPr/>
-        </p:nvSpPr>
-        <p:spPr>
-          <a:xfrm>
-            <a:off x="6583680" y="-274320"/>
-            <a:ext cx="3200400" cy="5692140"/>
-          </a:xfrm>
-          <a:prstGeom prst="rect">
-            <a:avLst/>
-          </a:prstGeom>
-          <a:solidFill>
-            <a:srgbClr val="0D1844">
-              <a:alpha val="60000"/>
-            </a:srgbClr>
+          <p:cNvPr id="3" name="Text 1"/>
+          <p:cNvSpPr/>
+          <p:nvPr/>
+        </p:nvSpPr>
+        <p:spPr>
+          <a:xfrm>
+            <a:off x="365760" y="0"/>
+            <a:ext cx="8412480" cy="777240"/>
+          </a:xfrm>
+          <a:prstGeom prst="rect">
+            <a:avLst/>
+          </a:prstGeom>
+          <a:noFill/>
+          <a:ln/>
+        </p:spPr>
+        <p:txBody>
+          <a:bodyPr wrap="square" lIns="0" tIns="0" rIns="0" bIns="0" rtlCol="0" anchor="ctr"/>
+          <a:lstStyle/>
+          <a:p>
+            <a:pPr marL="0" indent="0">
+              <a:buNone/>
+            </a:pPr>
+            <a:r>
+              <a:rPr lang="en-US" sz="2200" b="1" dirty="0">
+                <a:solidFill>
+                  <a:srgbClr val="FFFFFF"/>
+                </a:solidFill>
+              </a:rPr>
+              <a:t>Two-Stage First-Connection Allocation</a:t>
+            </a:r>
+            <a:endParaRPr lang="en-US" sz="2200" dirty="0"/>
+          </a:p>
+        </p:txBody>
+      </p:sp>
+      <p:sp>
+        <p:nvSpPr>
+          <p:cNvPr id="4" name="Text 2"/>
+          <p:cNvSpPr/>
+          <p:nvPr/>
+        </p:nvSpPr>
+        <p:spPr>
+          <a:xfrm>
+            <a:off x="365760" y="777240"/>
+            <a:ext cx="8412480" cy="347472"/>
+          </a:xfrm>
+          <a:prstGeom prst="rect">
+            <a:avLst/>
+          </a:prstGeom>
+          <a:noFill/>
+          <a:ln/>
+        </p:spPr>
+        <p:txBody>
+          <a:bodyPr wrap="square" rtlCol="0" anchor="ctr"/>
+          <a:lstStyle/>
+          <a:p>
+            <a:pPr marL="0" indent="0">
+              <a:buNone/>
+            </a:pPr>
+            <a:r>
+              <a:rPr lang="en-US" sz="1300" i="1" dirty="0">
+                <a:solidFill>
+                  <a:srgbClr val="2E75B6"/>
+                </a:solidFill>
+              </a:rPr>
+              <a:t>Unknown IMSI → auto-provisioned in a single atomic transaction</a:t>
+            </a:r>
+            <a:endParaRPr lang="en-US" sz="1300" dirty="0"/>
+          </a:p>
+        </p:txBody>
+      </p:sp>
+      <p:sp>
+        <p:nvSpPr>
+          <p:cNvPr id="5" name="Shape 3"/>
+          <p:cNvSpPr/>
+          <p:nvPr/>
+        </p:nvSpPr>
+        <p:spPr>
+          <a:xfrm>
+            <a:off x="274320" y="960120"/>
+            <a:ext cx="4023360" cy="1600200"/>
+          </a:xfrm>
+          <a:prstGeom prst="rect">
+            <a:avLst/>
+          </a:prstGeom>
+          <a:solidFill>
+            <a:srgbClr val="1E2761"/>
           </a:solidFill>
           <a:ln w="12700">
             <a:solidFill>
-              <a:srgbClr val="0D1844"/>
+              <a:srgbClr val="1E2761"/>
             </a:solidFill>
             <a:prstDash val="solid"/>
           </a:ln>
+          <a:effectLst>
+            <a:outerShdw blurRad="63500" dist="25400" dir="8100000" algn="bl" rotWithShape="0">
+              <a:srgbClr val="000000">
+                <a:alpha val="10000"/>
+              </a:srgbClr>
+            </a:outerShdw>
+          </a:effectLst>
         </p:spPr>
         <p:txBody>
           <a:bodyPr/>
@@ -1921,46 +2161,14 @@
       </p:sp>
       <p:sp>
         <p:nvSpPr>
-          <p:cNvPr id="4" name="Shape 2"/>
-          <p:cNvSpPr/>
-          <p:nvPr/>
-        </p:nvSpPr>
-        <p:spPr>
-          <a:xfrm>
-            <a:off x="0" y="0"/>
-            <a:ext cx="109728" cy="5143500"/>
-          </a:xfrm>
-          <a:prstGeom prst="rect">
-            <a:avLst/>
-          </a:prstGeom>
-          <a:solidFill>
-            <a:srgbClr val="4FC3F7"/>
-          </a:solidFill>
-          <a:ln w="12700">
-            <a:solidFill>
-              <a:srgbClr val="4FC3F7"/>
-            </a:solidFill>
-            <a:prstDash val="solid"/>
-          </a:ln>
-        </p:spPr>
-        <p:txBody>
-          <a:bodyPr/>
-          <a:lstStyle/>
-          <a:p>
-            <a:endParaRPr lang="LID4096"/>
-          </a:p>
-        </p:txBody>
-      </p:sp>
-      <p:sp>
-        <p:nvSpPr>
-          <p:cNvPr id="5" name="Shape 3"/>
-          <p:cNvSpPr/>
-          <p:nvPr/>
-        </p:nvSpPr>
-        <p:spPr>
-          <a:xfrm>
-            <a:off x="274320" y="365760"/>
-            <a:ext cx="3200400" cy="237744"/>
+          <p:cNvPr id="6" name="Shape 4"/>
+          <p:cNvSpPr/>
+          <p:nvPr/>
+        </p:nvSpPr>
+        <p:spPr>
+          <a:xfrm>
+            <a:off x="365760" y="1005840"/>
+            <a:ext cx="1097280" cy="237744"/>
           </a:xfrm>
           <a:prstGeom prst="roundRect">
             <a:avLst>
@@ -1968,11 +2176,11 @@
             </a:avLst>
           </a:prstGeom>
           <a:solidFill>
-            <a:srgbClr val="3C4D6B"/>
+            <a:srgbClr val="2E75B6"/>
           </a:solidFill>
           <a:ln w="12700">
             <a:solidFill>
-              <a:srgbClr val="3C4D6B"/>
+              <a:srgbClr val="2E75B6"/>
             </a:solidFill>
             <a:prstDash val="solid"/>
           </a:ln>
@@ -1987,14 +2195,14 @@
       </p:sp>
       <p:sp>
         <p:nvSpPr>
-          <p:cNvPr id="6" name="Text 4"/>
-          <p:cNvSpPr/>
-          <p:nvPr/>
-        </p:nvSpPr>
-        <p:spPr>
-          <a:xfrm>
-            <a:off x="274320" y="365760"/>
-            <a:ext cx="3200400" cy="237744"/>
+          <p:cNvPr id="7" name="Text 5"/>
+          <p:cNvSpPr/>
+          <p:nvPr/>
+        </p:nvSpPr>
+        <p:spPr>
+          <a:xfrm>
+            <a:off x="365760" y="1005840"/>
+            <a:ext cx="1097280" cy="237744"/>
           </a:xfrm>
           <a:prstGeom prst="rect">
             <a:avLst/>
@@ -2012,10 +2220,281 @@
             <a:r>
               <a:rPr lang="en-US" sz="900" b="1" dirty="0">
                 <a:solidFill>
+                  <a:srgbClr val="FFFFFF"/>
+                </a:solidFill>
+              </a:rPr>
+              <a:t>STAGE 1</a:t>
+            </a:r>
+            <a:endParaRPr lang="en-US" sz="900" dirty="0"/>
+          </a:p>
+        </p:txBody>
+      </p:sp>
+      <p:sp>
+        <p:nvSpPr>
+          <p:cNvPr id="8" name="Text 6"/>
+          <p:cNvSpPr/>
+          <p:nvPr/>
+        </p:nvSpPr>
+        <p:spPr>
+          <a:xfrm>
+            <a:off x="365760" y="1298448"/>
+            <a:ext cx="3749040" cy="292608"/>
+          </a:xfrm>
+          <a:prstGeom prst="rect">
+            <a:avLst/>
+          </a:prstGeom>
+          <a:noFill/>
+          <a:ln/>
+        </p:spPr>
+        <p:txBody>
+          <a:bodyPr wrap="square" lIns="0" tIns="0" rIns="0" bIns="0" rtlCol="0" anchor="ctr"/>
+          <a:lstStyle/>
+          <a:p>
+            <a:pPr marL="0" indent="0">
+              <a:buNone/>
+            </a:pPr>
+            <a:r>
+              <a:rPr lang="en-US" sz="1300" b="1" dirty="0">
+                <a:solidFill>
+                  <a:srgbClr val="FFFFFF"/>
+                </a:solidFill>
+              </a:rPr>
+              <a:t>aaa-lookup-service</a:t>
+            </a:r>
+            <a:endParaRPr lang="en-US" sz="1300" dirty="0"/>
+          </a:p>
+        </p:txBody>
+      </p:sp>
+      <p:sp>
+        <p:nvSpPr>
+          <p:cNvPr id="9" name="Text 7"/>
+          <p:cNvSpPr/>
+          <p:nvPr/>
+        </p:nvSpPr>
+        <p:spPr>
+          <a:xfrm>
+            <a:off x="365760" y="1627632"/>
+            <a:ext cx="3749040" cy="822960"/>
+          </a:xfrm>
+          <a:prstGeom prst="rect">
+            <a:avLst/>
+          </a:prstGeom>
+          <a:noFill/>
+          <a:ln/>
+        </p:spPr>
+        <p:txBody>
+          <a:bodyPr wrap="square" lIns="0" tIns="0" rIns="0" bIns="0" rtlCol="0" anchor="ctr"/>
+          <a:lstStyle/>
+          <a:p>
+            <a:pPr marL="0" indent="0">
+              <a:buNone/>
+            </a:pPr>
+            <a:r>
+              <a:rPr lang="en-US" sz="1050" dirty="0">
+                <a:solidFill>
                   <a:srgbClr val="CADCFC"/>
                 </a:solidFill>
-              </a:rPr>
-              <a:t>TELECOM  |  AAA  |  CLOUD-NATIVE</a:t>
+                <a:latin typeface="Courier New" pitchFamily="34" charset="0"/>
+                <a:ea typeface="Courier New" pitchFamily="34" charset="-122"/>
+                <a:cs typeface="Courier New" pitchFamily="34" charset="-120"/>
+              </a:rPr>
+              <a:t>GET /lookup?imsi={imsi}&amp;apn={apn}</a:t>
+            </a:r>
+            <a:endParaRPr lang="en-US" sz="1050" dirty="0"/>
+          </a:p>
+          <a:p>
+            <a:pPr marL="0" indent="0">
+              <a:buNone/>
+            </a:pPr>
+            <a:r>
+              <a:rPr lang="en-US" sz="1050" dirty="0">
+                <a:solidFill>
+                  <a:srgbClr val="CADCFC"/>
+                </a:solidFill>
+                <a:latin typeface="Courier New" pitchFamily="34" charset="0"/>
+                <a:ea typeface="Courier New" pitchFamily="34" charset="-122"/>
+                <a:cs typeface="Courier New" pitchFamily="34" charset="-120"/>
+              </a:rPr>
+              <a:t>→ Queries READ REPLICA</a:t>
+            </a:r>
+            <a:endParaRPr lang="en-US" sz="1050" dirty="0"/>
+          </a:p>
+          <a:p>
+            <a:pPr marL="0" indent="0">
+              <a:buNone/>
+            </a:pPr>
+            <a:r>
+              <a:rPr lang="en-US" sz="1050" dirty="0">
+                <a:solidFill>
+                  <a:srgbClr val="CADCFC"/>
+                </a:solidFill>
+                <a:latin typeface="Courier New" pitchFamily="34" charset="0"/>
+                <a:ea typeface="Courier New" pitchFamily="34" charset="-122"/>
+                <a:cs typeface="Courier New" pitchFamily="34" charset="-120"/>
+              </a:rPr>
+              <a:t>→ IMSI not found in imsi2sim</a:t>
+            </a:r>
+            <a:endParaRPr lang="en-US" sz="1050" dirty="0"/>
+          </a:p>
+          <a:p>
+            <a:pPr marL="0" indent="0">
+              <a:buNone/>
+            </a:pPr>
+            <a:r>
+              <a:rPr lang="en-US" sz="1050" dirty="0">
+                <a:solidFill>
+                  <a:srgbClr val="CADCFC"/>
+                </a:solidFill>
+                <a:latin typeface="Courier New" pitchFamily="34" charset="0"/>
+                <a:ea typeface="Courier New" pitchFamily="34" charset="-122"/>
+                <a:cs typeface="Courier New" pitchFamily="34" charset="-120"/>
+              </a:rPr>
+              <a:t>→ Returns 404 {"error": "not_found"}</a:t>
+            </a:r>
+            <a:endParaRPr lang="en-US" sz="1050" dirty="0"/>
+          </a:p>
+        </p:txBody>
+      </p:sp>
+      <p:sp>
+        <p:nvSpPr>
+          <p:cNvPr id="10" name="Text 8"/>
+          <p:cNvSpPr/>
+          <p:nvPr/>
+        </p:nvSpPr>
+        <p:spPr>
+          <a:xfrm>
+            <a:off x="365760" y="2633472"/>
+            <a:ext cx="4023360" cy="274320"/>
+          </a:xfrm>
+          <a:prstGeom prst="rect">
+            <a:avLst/>
+          </a:prstGeom>
+          <a:noFill/>
+          <a:ln/>
+        </p:spPr>
+        <p:txBody>
+          <a:bodyPr wrap="square" lIns="0" tIns="0" rIns="0" bIns="0" rtlCol="0" anchor="ctr"/>
+          <a:lstStyle/>
+          <a:p>
+            <a:pPr marL="0" indent="0" algn="ctr">
+              <a:buNone/>
+            </a:pPr>
+            <a:r>
+              <a:rPr lang="en-US" sz="1050" b="1" dirty="0">
+                <a:solidFill>
+                  <a:srgbClr val="F5A623"/>
+                </a:solidFill>
+              </a:rPr>
+              <a:t>▼  aaa-lookup-service calls POST /first-connection</a:t>
+            </a:r>
+            <a:endParaRPr lang="en-US" sz="1050" dirty="0"/>
+          </a:p>
+        </p:txBody>
+      </p:sp>
+      <p:sp>
+        <p:nvSpPr>
+          <p:cNvPr id="11" name="Shape 9"/>
+          <p:cNvSpPr/>
+          <p:nvPr/>
+        </p:nvSpPr>
+        <p:spPr>
+          <a:xfrm>
+            <a:off x="274320" y="2944368"/>
+            <a:ext cx="4023360" cy="1920240"/>
+          </a:xfrm>
+          <a:prstGeom prst="rect">
+            <a:avLst/>
+          </a:prstGeom>
+          <a:solidFill>
+            <a:srgbClr val="1E2761"/>
+          </a:solidFill>
+          <a:ln w="12700">
+            <a:solidFill>
+              <a:srgbClr val="1E2761"/>
+            </a:solidFill>
+            <a:prstDash val="solid"/>
+          </a:ln>
+          <a:effectLst>
+            <a:outerShdw blurRad="63500" dist="25400" dir="8100000" algn="bl" rotWithShape="0">
+              <a:srgbClr val="000000">
+                <a:alpha val="10000"/>
+              </a:srgbClr>
+            </a:outerShdw>
+          </a:effectLst>
+        </p:spPr>
+        <p:txBody>
+          <a:bodyPr/>
+          <a:lstStyle/>
+          <a:p>
+            <a:endParaRPr lang="LID4096"/>
+          </a:p>
+        </p:txBody>
+      </p:sp>
+      <p:sp>
+        <p:nvSpPr>
+          <p:cNvPr id="12" name="Shape 10"/>
+          <p:cNvSpPr/>
+          <p:nvPr/>
+        </p:nvSpPr>
+        <p:spPr>
+          <a:xfrm>
+            <a:off x="365760" y="2990088"/>
+            <a:ext cx="1097280" cy="237744"/>
+          </a:xfrm>
+          <a:prstGeom prst="roundRect">
+            <a:avLst>
+              <a:gd name="adj" fmla="val 50000"/>
+            </a:avLst>
+          </a:prstGeom>
+          <a:solidFill>
+            <a:srgbClr val="2ECC8C"/>
+          </a:solidFill>
+          <a:ln w="12700">
+            <a:solidFill>
+              <a:srgbClr val="2ECC8C"/>
+            </a:solidFill>
+            <a:prstDash val="solid"/>
+          </a:ln>
+        </p:spPr>
+        <p:txBody>
+          <a:bodyPr/>
+          <a:lstStyle/>
+          <a:p>
+            <a:endParaRPr lang="LID4096"/>
+          </a:p>
+        </p:txBody>
+      </p:sp>
+      <p:sp>
+        <p:nvSpPr>
+          <p:cNvPr id="13" name="Text 11"/>
+          <p:cNvSpPr/>
+          <p:nvPr/>
+        </p:nvSpPr>
+        <p:spPr>
+          <a:xfrm>
+            <a:off x="365760" y="2990088"/>
+            <a:ext cx="1097280" cy="237744"/>
+          </a:xfrm>
+          <a:prstGeom prst="rect">
+            <a:avLst/>
+          </a:prstGeom>
+          <a:noFill/>
+          <a:ln/>
+        </p:spPr>
+        <p:txBody>
+          <a:bodyPr wrap="square" lIns="0" tIns="0" rIns="0" bIns="0" rtlCol="0" anchor="ctr"/>
+          <a:lstStyle/>
+          <a:p>
+            <a:pPr marL="0" indent="0" algn="ctr">
+              <a:buNone/>
+            </a:pPr>
+            <a:r>
+              <a:rPr lang="en-US" sz="900" b="1" dirty="0">
+                <a:solidFill>
+                  <a:srgbClr val="FFFFFF"/>
+                </a:solidFill>
+              </a:rPr>
+              <a:t>STAGE 2</a:t>
             </a:r>
             <a:endParaRPr lang="en-US" sz="900" dirty="0"/>
           </a:p>
@@ -2023,157 +2502,383 @@
       </p:sp>
       <p:sp>
         <p:nvSpPr>
-          <p:cNvPr id="7" name="Text 5"/>
-          <p:cNvSpPr/>
-          <p:nvPr/>
-        </p:nvSpPr>
-        <p:spPr>
-          <a:xfrm>
-            <a:off x="274320" y="1005840"/>
-            <a:ext cx="5943600" cy="914400"/>
-          </a:xfrm>
-          <a:prstGeom prst="rect">
-            <a:avLst/>
-          </a:prstGeom>
-          <a:noFill/>
-          <a:ln/>
-        </p:spPr>
-        <p:txBody>
-          <a:bodyPr wrap="square" rtlCol="0" anchor="ctr"/>
+          <p:cNvPr id="14" name="Text 12"/>
+          <p:cNvSpPr/>
+          <p:nvPr/>
+        </p:nvSpPr>
+        <p:spPr>
+          <a:xfrm>
+            <a:off x="365760" y="3282696"/>
+            <a:ext cx="3749040" cy="292608"/>
+          </a:xfrm>
+          <a:prstGeom prst="rect">
+            <a:avLst/>
+          </a:prstGeom>
+          <a:noFill/>
+          <a:ln/>
+        </p:spPr>
+        <p:txBody>
+          <a:bodyPr wrap="square" lIns="0" tIns="0" rIns="0" bIns="0" rtlCol="0" anchor="ctr"/>
           <a:lstStyle/>
           <a:p>
             <a:pPr marL="0" indent="0">
               <a:buNone/>
             </a:pPr>
             <a:r>
-              <a:rPr lang="en-US" sz="4200" b="1" dirty="0">
+              <a:rPr lang="en-US" sz="1300" b="1" dirty="0">
                 <a:solidFill>
                   <a:srgbClr val="FFFFFF"/>
                 </a:solidFill>
-                <a:latin typeface="Calibri" pitchFamily="34" charset="0"/>
-                <a:ea typeface="Calibri" pitchFamily="34" charset="-122"/>
-                <a:cs typeface="Calibri" pitchFamily="34" charset="-120"/>
-              </a:rPr>
-              <a:t>AAA Cloud-Native</a:t>
-            </a:r>
-            <a:endParaRPr lang="en-US" sz="4200" dirty="0"/>
-          </a:p>
-        </p:txBody>
-      </p:sp>
-      <p:sp>
-        <p:nvSpPr>
-          <p:cNvPr id="8" name="Text 6"/>
-          <p:cNvSpPr/>
-          <p:nvPr/>
-        </p:nvSpPr>
-        <p:spPr>
-          <a:xfrm>
-            <a:off x="274320" y="1783080"/>
-            <a:ext cx="5943600" cy="822960"/>
-          </a:xfrm>
-          <a:prstGeom prst="rect">
-            <a:avLst/>
-          </a:prstGeom>
-          <a:noFill/>
-          <a:ln/>
-        </p:spPr>
-        <p:txBody>
-          <a:bodyPr wrap="square" rtlCol="0" anchor="ctr"/>
+              </a:rPr>
+              <a:t>subscriber-profile-api</a:t>
+            </a:r>
+            <a:endParaRPr lang="en-US" sz="1300" dirty="0"/>
+          </a:p>
+        </p:txBody>
+      </p:sp>
+      <p:sp>
+        <p:nvSpPr>
+          <p:cNvPr id="15" name="Text 13"/>
+          <p:cNvSpPr/>
+          <p:nvPr/>
+        </p:nvSpPr>
+        <p:spPr>
+          <a:xfrm>
+            <a:off x="365760" y="3611880"/>
+            <a:ext cx="3749040" cy="1188720"/>
+          </a:xfrm>
+          <a:prstGeom prst="rect">
+            <a:avLst/>
+          </a:prstGeom>
+          <a:noFill/>
+          <a:ln/>
+        </p:spPr>
+        <p:txBody>
+          <a:bodyPr wrap="square" lIns="0" tIns="0" rIns="0" bIns="0" rtlCol="0" anchor="ctr"/>
           <a:lstStyle/>
           <a:p>
             <a:pPr marL="0" indent="0">
               <a:buNone/>
             </a:pPr>
             <a:r>
-              <a:rPr lang="en-US" sz="4200" b="1" dirty="0">
-                <a:solidFill>
-                  <a:srgbClr val="4FC3F7"/>
-                </a:solidFill>
-                <a:latin typeface="Calibri" pitchFamily="34" charset="0"/>
-                <a:ea typeface="Calibri" pitchFamily="34" charset="-122"/>
-                <a:cs typeface="Calibri" pitchFamily="34" charset="-120"/>
-              </a:rPr>
-              <a:t>Platform</a:t>
-            </a:r>
-            <a:endParaRPr lang="en-US" sz="4200" dirty="0"/>
-          </a:p>
-        </p:txBody>
-      </p:sp>
-      <p:sp>
-        <p:nvSpPr>
-          <p:cNvPr id="9" name="Text 7"/>
-          <p:cNvSpPr/>
-          <p:nvPr/>
-        </p:nvSpPr>
-        <p:spPr>
-          <a:xfrm>
-            <a:off x="274320" y="2651760"/>
-            <a:ext cx="5669280" cy="731520"/>
-          </a:xfrm>
-          <a:prstGeom prst="rect">
-            <a:avLst/>
-          </a:prstGeom>
-          <a:noFill/>
-          <a:ln/>
-        </p:spPr>
-        <p:txBody>
-          <a:bodyPr wrap="square" rtlCol="0" anchor="ctr"/>
-          <a:lstStyle/>
+              <a:rPr lang="en-US" sz="950" dirty="0">
+                <a:solidFill>
+                  <a:srgbClr val="CADCFC"/>
+                </a:solidFill>
+                <a:latin typeface="Courier New" pitchFamily="34" charset="0"/>
+                <a:ea typeface="Courier New" pitchFamily="34" charset="-122"/>
+                <a:cs typeface="Courier New" pitchFamily="34" charset="-120"/>
+              </a:rPr>
+              <a:t>aaa-lookup-service: POST /v1/first-connection {imsi, apn, imei}</a:t>
+            </a:r>
+            <a:endParaRPr lang="en-US" sz="950" dirty="0"/>
+          </a:p>
           <a:p>
             <a:pPr marL="0" indent="0">
               <a:buNone/>
             </a:pPr>
             <a:r>
-              <a:rPr lang="en-US" sz="1600" dirty="0">
-                <a:solidFill>
-                  <a:srgbClr val="7EA8E8"/>
-                </a:solidFill>
-                <a:latin typeface="Calibri" pitchFamily="34" charset="0"/>
-                <a:ea typeface="Calibri" pitchFamily="34" charset="-122"/>
-                <a:cs typeface="Calibri" pitchFamily="34" charset="-120"/>
-              </a:rPr>
-              <a:t>High-Performance Subscriber Provisioning</a:t>
-            </a:r>
-            <a:endParaRPr lang="en-US" sz="1600" dirty="0"/>
+              <a:rPr lang="en-US" sz="950" dirty="0">
+                <a:solidFill>
+                  <a:srgbClr val="CADCFC"/>
+                </a:solidFill>
+                <a:latin typeface="Courier New" pitchFamily="34" charset="0"/>
+                <a:ea typeface="Courier New" pitchFamily="34" charset="-122"/>
+                <a:cs typeface="Courier New" pitchFamily="34" charset="-120"/>
+              </a:rPr>
+              <a:t>1. Idempotency check: IMSI already exists?</a:t>
+            </a:r>
+            <a:endParaRPr lang="en-US" sz="950" dirty="0"/>
           </a:p>
           <a:p>
             <a:pPr marL="0" indent="0">
               <a:buNone/>
             </a:pPr>
             <a:r>
-              <a:rPr lang="en-US" sz="1600" dirty="0">
-                <a:solidFill>
-                  <a:srgbClr val="7EA8E8"/>
-                </a:solidFill>
-                <a:latin typeface="Calibri" pitchFamily="34" charset="0"/>
-                <a:ea typeface="Calibri" pitchFamily="34" charset="-122"/>
-                <a:cs typeface="Calibri" pitchFamily="34" charset="-120"/>
-              </a:rPr>
-              <a:t>&amp; Real-Time RADIUS Authentication</a:t>
-            </a:r>
-            <a:endParaRPr lang="en-US" sz="1600" dirty="0"/>
-          </a:p>
-        </p:txBody>
-      </p:sp>
-      <p:sp>
-        <p:nvSpPr>
-          <p:cNvPr id="10" name="Shape 8"/>
-          <p:cNvSpPr/>
-          <p:nvPr/>
-        </p:nvSpPr>
-        <p:spPr>
-          <a:xfrm>
-            <a:off x="274320" y="3657600"/>
-            <a:ext cx="1737360" cy="822960"/>
-          </a:xfrm>
-          <a:prstGeom prst="rect">
-            <a:avLst/>
-          </a:prstGeom>
-          <a:solidFill>
-            <a:srgbClr val="142050"/>
+              <a:rPr lang="en-US" sz="950" dirty="0">
+                <a:solidFill>
+                  <a:srgbClr val="CADCFC"/>
+                </a:solidFill>
+                <a:latin typeface="Courier New" pitchFamily="34" charset="0"/>
+                <a:ea typeface="Courier New" pitchFamily="34" charset="-122"/>
+                <a:cs typeface="Courier New" pitchFamily="34" charset="-120"/>
+              </a:rPr>
+              <a:t>2. Match range config (f_imsi &lt;= $imsi &lt;= t_imsi)</a:t>
+            </a:r>
+            <a:endParaRPr lang="en-US" sz="950" dirty="0"/>
+          </a:p>
+          <a:p>
+            <a:pPr marL="0" indent="0">
+              <a:buNone/>
+            </a:pPr>
+            <a:r>
+              <a:rPr lang="en-US" sz="950" dirty="0">
+                <a:solidFill>
+                  <a:srgbClr val="CADCFC"/>
+                </a:solidFill>
+                <a:latin typeface="Courier New" pitchFamily="34" charset="0"/>
+                <a:ea typeface="Courier New" pitchFamily="34" charset="-122"/>
+                <a:cs typeface="Courier New" pitchFamily="34" charset="-120"/>
+              </a:rPr>
+              <a:t>3. Claim IP:  DELETE FROM ip_pool_available</a:t>
+            </a:r>
+            <a:endParaRPr lang="en-US" sz="950" dirty="0"/>
+          </a:p>
+          <a:p>
+            <a:pPr marL="0" indent="0">
+              <a:buNone/>
+            </a:pPr>
+            <a:r>
+              <a:rPr lang="en-US" sz="950" dirty="0">
+                <a:solidFill>
+                  <a:srgbClr val="CADCFC"/>
+                </a:solidFill>
+                <a:latin typeface="Courier New" pitchFamily="34" charset="0"/>
+                <a:ea typeface="Courier New" pitchFamily="34" charset="-122"/>
+                <a:cs typeface="Courier New" pitchFamily="34" charset="-120"/>
+              </a:rPr>
+              <a:t>   FOR UPDATE SKIP LOCKED</a:t>
+            </a:r>
+            <a:endParaRPr lang="en-US" sz="950" dirty="0"/>
+          </a:p>
+          <a:p>
+            <a:pPr marL="0" indent="0">
+              <a:buNone/>
+            </a:pPr>
+            <a:r>
+              <a:rPr lang="en-US" sz="950" dirty="0">
+                <a:solidFill>
+                  <a:srgbClr val="CADCFC"/>
+                </a:solidFill>
+                <a:latin typeface="Courier New" pitchFamily="34" charset="0"/>
+                <a:ea typeface="Courier New" pitchFamily="34" charset="-122"/>
+                <a:cs typeface="Courier New" pitchFamily="34" charset="-120"/>
+              </a:rPr>
+              <a:t>4. INSERT profile + IMSI + IP  (atomic COMMIT)</a:t>
+            </a:r>
+            <a:endParaRPr lang="en-US" sz="950" dirty="0"/>
+          </a:p>
+        </p:txBody>
+      </p:sp>
+      <p:sp>
+        <p:nvSpPr>
+          <p:cNvPr id="16" name="Text 14"/>
+          <p:cNvSpPr/>
+          <p:nvPr/>
+        </p:nvSpPr>
+        <p:spPr>
+          <a:xfrm>
+            <a:off x="4663440" y="960120"/>
+            <a:ext cx="4114800" cy="256032"/>
+          </a:xfrm>
+          <a:prstGeom prst="rect">
+            <a:avLst/>
+          </a:prstGeom>
+          <a:noFill/>
+          <a:ln/>
+        </p:spPr>
+        <p:txBody>
+          <a:bodyPr wrap="square" lIns="0" tIns="0" rIns="0" bIns="0" rtlCol="0" anchor="ctr"/>
+          <a:lstStyle/>
+          <a:p>
+            <a:pPr marL="0" indent="0">
+              <a:buNone/>
+            </a:pPr>
+            <a:r>
+              <a:rPr lang="en-US" sz="1000" b="1" dirty="0">
+                <a:solidFill>
+                  <a:srgbClr val="2E75B6"/>
+                </a:solidFill>
+              </a:rPr>
+              <a:t>First-Connection Outcomes  (subscriber-profile-api)</a:t>
+            </a:r>
+            <a:endParaRPr lang="en-US" sz="1000" dirty="0"/>
+          </a:p>
+        </p:txBody>
+      </p:sp>
+      <p:sp>
+        <p:nvSpPr>
+          <p:cNvPr id="17" name="Shape 15"/>
+          <p:cNvSpPr/>
+          <p:nvPr/>
+        </p:nvSpPr>
+        <p:spPr>
+          <a:xfrm>
+            <a:off x="4663440" y="1261872"/>
+            <a:ext cx="4114800" cy="868680"/>
+          </a:xfrm>
+          <a:prstGeom prst="rect">
+            <a:avLst/>
+          </a:prstGeom>
+          <a:solidFill>
+            <a:srgbClr val="E8F5E9"/>
           </a:solidFill>
           <a:ln w="12700">
             <a:solidFill>
+              <a:srgbClr val="2ECC8C"/>
+            </a:solidFill>
+            <a:prstDash val="solid"/>
+          </a:ln>
+        </p:spPr>
+        <p:txBody>
+          <a:bodyPr/>
+          <a:lstStyle/>
+          <a:p>
+            <a:endParaRPr lang="LID4096"/>
+          </a:p>
+        </p:txBody>
+      </p:sp>
+      <p:sp>
+        <p:nvSpPr>
+          <p:cNvPr id="18" name="Shape 16"/>
+          <p:cNvSpPr/>
+          <p:nvPr/>
+        </p:nvSpPr>
+        <p:spPr>
+          <a:xfrm>
+            <a:off x="4663440" y="1261872"/>
+            <a:ext cx="54864" cy="868680"/>
+          </a:xfrm>
+          <a:prstGeom prst="rect">
+            <a:avLst/>
+          </a:prstGeom>
+          <a:solidFill>
+            <a:srgbClr val="2ECC8C"/>
+          </a:solidFill>
+          <a:ln w="12700">
+            <a:solidFill>
+              <a:srgbClr val="2ECC8C"/>
+            </a:solidFill>
+            <a:prstDash val="solid"/>
+          </a:ln>
+        </p:spPr>
+        <p:txBody>
+          <a:bodyPr/>
+          <a:lstStyle/>
+          <a:p>
+            <a:endParaRPr lang="LID4096"/>
+          </a:p>
+        </p:txBody>
+      </p:sp>
+      <p:sp>
+        <p:nvSpPr>
+          <p:cNvPr id="19" name="Text 17"/>
+          <p:cNvSpPr/>
+          <p:nvPr/>
+        </p:nvSpPr>
+        <p:spPr>
+          <a:xfrm>
+            <a:off x="4773168" y="1307592"/>
+            <a:ext cx="3886200" cy="256032"/>
+          </a:xfrm>
+          <a:prstGeom prst="rect">
+            <a:avLst/>
+          </a:prstGeom>
+          <a:noFill/>
+          <a:ln/>
+        </p:spPr>
+        <p:txBody>
+          <a:bodyPr wrap="square" lIns="0" tIns="0" rIns="0" bIns="0" rtlCol="0" anchor="ctr"/>
+          <a:lstStyle/>
+          <a:p>
+            <a:pPr marL="0" indent="0">
+              <a:buNone/>
+            </a:pPr>
+            <a:r>
+              <a:rPr lang="en-US" sz="1150" b="1" dirty="0">
+                <a:solidFill>
+                  <a:srgbClr val="1E2761"/>
+                </a:solidFill>
+              </a:rPr>
+              <a:t>200 OK — IP Allocated</a:t>
+            </a:r>
+            <a:endParaRPr lang="en-US" sz="1150" dirty="0"/>
+          </a:p>
+        </p:txBody>
+      </p:sp>
+      <p:sp>
+        <p:nvSpPr>
+          <p:cNvPr id="20" name="Text 18"/>
+          <p:cNvSpPr/>
+          <p:nvPr/>
+        </p:nvSpPr>
+        <p:spPr>
+          <a:xfrm>
+            <a:off x="4773168" y="1563624"/>
+            <a:ext cx="3886200" cy="512064"/>
+          </a:xfrm>
+          <a:prstGeom prst="rect">
+            <a:avLst/>
+          </a:prstGeom>
+          <a:noFill/>
+          <a:ln/>
+        </p:spPr>
+        <p:txBody>
+          <a:bodyPr wrap="square" lIns="0" tIns="0" rIns="0" bIns="0" rtlCol="0" anchor="ctr"/>
+          <a:lstStyle/>
+          <a:p>
+            <a:pPr marL="0" indent="0">
+              <a:buNone/>
+            </a:pPr>
+            <a:r>
+              <a:rPr lang="en-US" sz="1000" dirty="0">
+                <a:solidFill>
+                  <a:srgbClr val="3C4D6B"/>
+                </a:solidFill>
+              </a:rPr>
+              <a:t>subscriber-profile-api creates sim_id</a:t>
+            </a:r>
+            <a:endParaRPr lang="en-US" sz="1000" dirty="0"/>
+          </a:p>
+          <a:p>
+            <a:pPr marL="0" indent="0">
+              <a:buNone/>
+            </a:pPr>
+            <a:r>
+              <a:rPr lang="en-US" sz="1000" dirty="0">
+                <a:solidFill>
+                  <a:srgbClr val="3C4D6B"/>
+                </a:solidFill>
+              </a:rPr>
+              <a:t>(gen_random_uuid). static_ip returned.</a:t>
+            </a:r>
+            <a:endParaRPr lang="en-US" sz="1000" dirty="0"/>
+          </a:p>
+          <a:p>
+            <a:pPr marL="0" indent="0">
+              <a:buNone/>
+            </a:pPr>
+            <a:r>
+              <a:rPr lang="en-US" sz="1000" dirty="0">
+                <a:solidFill>
+                  <a:srgbClr val="3C4D6B"/>
+                </a:solidFill>
+              </a:rPr>
+              <a:t>aaa-lookup-service returns 200 to aaa-radius-server. Access-Accept issued.</a:t>
+            </a:r>
+            <a:endParaRPr lang="en-US" sz="1000" dirty="0"/>
+          </a:p>
+        </p:txBody>
+      </p:sp>
+      <p:sp>
+        <p:nvSpPr>
+          <p:cNvPr id="21" name="Shape 19"/>
+          <p:cNvSpPr/>
+          <p:nvPr/>
+        </p:nvSpPr>
+        <p:spPr>
+          <a:xfrm>
+            <a:off x="4663440" y="2221992"/>
+            <a:ext cx="4114800" cy="868680"/>
+          </a:xfrm>
+          <a:prstGeom prst="rect">
+            <a:avLst/>
+          </a:prstGeom>
+          <a:solidFill>
+            <a:srgbClr val="E3F2FD"/>
+          </a:solidFill>
+          <a:ln w="12700">
+            <a:solidFill>
               <a:srgbClr val="2E75B6"/>
             </a:solidFill>
             <a:prstDash val="solid"/>
@@ -2189,24 +2894,24 @@
       </p:sp>
       <p:sp>
         <p:nvSpPr>
-          <p:cNvPr id="11" name="Shape 9"/>
-          <p:cNvSpPr/>
-          <p:nvPr/>
-        </p:nvSpPr>
-        <p:spPr>
-          <a:xfrm>
-            <a:off x="274320" y="3657600"/>
-            <a:ext cx="1737360" cy="54864"/>
-          </a:xfrm>
-          <a:prstGeom prst="rect">
-            <a:avLst/>
-          </a:prstGeom>
-          <a:solidFill>
-            <a:srgbClr val="4FC3F7"/>
+          <p:cNvPr id="22" name="Shape 20"/>
+          <p:cNvSpPr/>
+          <p:nvPr/>
+        </p:nvSpPr>
+        <p:spPr>
+          <a:xfrm>
+            <a:off x="4663440" y="2221992"/>
+            <a:ext cx="54864" cy="868680"/>
+          </a:xfrm>
+          <a:prstGeom prst="rect">
+            <a:avLst/>
+          </a:prstGeom>
+          <a:solidFill>
+            <a:srgbClr val="2E75B6"/>
           </a:solidFill>
           <a:ln w="12700">
             <a:solidFill>
-              <a:srgbClr val="4FC3F7"/>
+              <a:srgbClr val="2E75B6"/>
             </a:solidFill>
             <a:prstDash val="solid"/>
           </a:ln>
@@ -2221,96 +2926,124 @@
       </p:sp>
       <p:sp>
         <p:nvSpPr>
-          <p:cNvPr id="12" name="Text 10"/>
-          <p:cNvSpPr/>
-          <p:nvPr/>
-        </p:nvSpPr>
-        <p:spPr>
-          <a:xfrm>
-            <a:off x="274320" y="3749040"/>
-            <a:ext cx="1737360" cy="365760"/>
-          </a:xfrm>
-          <a:prstGeom prst="rect">
-            <a:avLst/>
-          </a:prstGeom>
-          <a:noFill/>
-          <a:ln/>
-        </p:spPr>
-        <p:txBody>
-          <a:bodyPr wrap="square" lIns="0" tIns="0" rIns="0" bIns="0" rtlCol="0" anchor="ctr"/>
-          <a:lstStyle/>
-          <a:p>
-            <a:pPr marL="0" indent="0" algn="ctr">
-              <a:buNone/>
-            </a:pPr>
-            <a:r>
-              <a:rPr lang="en-US" sz="1600" b="1" dirty="0">
-                <a:solidFill>
-                  <a:srgbClr val="FFFFFF"/>
-                </a:solidFill>
-              </a:rPr>
-              <a:t>&lt; 15ms</a:t>
-            </a:r>
-            <a:endParaRPr lang="en-US" sz="1600" dirty="0"/>
-          </a:p>
-        </p:txBody>
-      </p:sp>
-      <p:sp>
-        <p:nvSpPr>
-          <p:cNvPr id="13" name="Text 11"/>
-          <p:cNvSpPr/>
-          <p:nvPr/>
-        </p:nvSpPr>
-        <p:spPr>
-          <a:xfrm>
-            <a:off x="274320" y="4114800"/>
-            <a:ext cx="1737360" cy="320040"/>
-          </a:xfrm>
-          <a:prstGeom prst="rect">
-            <a:avLst/>
-          </a:prstGeom>
-          <a:noFill/>
-          <a:ln/>
-        </p:spPr>
-        <p:txBody>
-          <a:bodyPr wrap="square" lIns="0" tIns="0" rIns="0" bIns="0" rtlCol="0" anchor="ctr"/>
-          <a:lstStyle/>
-          <a:p>
-            <a:pPr marL="0" indent="0" algn="ctr">
-              <a:buNone/>
-            </a:pPr>
-            <a:r>
-              <a:rPr lang="en-US" sz="900" dirty="0">
-                <a:solidFill>
-                  <a:srgbClr val="7EA8E8"/>
-                </a:solidFill>
-              </a:rPr>
-              <a:t>p99 Lookup SLA</a:t>
-            </a:r>
-            <a:endParaRPr lang="en-US" sz="900" dirty="0"/>
-          </a:p>
-        </p:txBody>
-      </p:sp>
-      <p:sp>
-        <p:nvSpPr>
-          <p:cNvPr id="14" name="Shape 12"/>
-          <p:cNvSpPr/>
-          <p:nvPr/>
-        </p:nvSpPr>
-        <p:spPr>
-          <a:xfrm>
-            <a:off x="2194560" y="3657600"/>
-            <a:ext cx="1737360" cy="822960"/>
-          </a:xfrm>
-          <a:prstGeom prst="rect">
-            <a:avLst/>
-          </a:prstGeom>
-          <a:solidFill>
-            <a:srgbClr val="142050"/>
+          <p:cNvPr id="23" name="Text 21"/>
+          <p:cNvSpPr/>
+          <p:nvPr/>
+        </p:nvSpPr>
+        <p:spPr>
+          <a:xfrm>
+            <a:off x="4773168" y="2267712"/>
+            <a:ext cx="3886200" cy="256032"/>
+          </a:xfrm>
+          <a:prstGeom prst="rect">
+            <a:avLst/>
+          </a:prstGeom>
+          <a:noFill/>
+          <a:ln/>
+        </p:spPr>
+        <p:txBody>
+          <a:bodyPr wrap="square" lIns="0" tIns="0" rIns="0" bIns="0" rtlCol="0" anchor="ctr"/>
+          <a:lstStyle/>
+          <a:p>
+            <a:pPr marL="0" indent="0">
+              <a:buNone/>
+            </a:pPr>
+            <a:r>
+              <a:rPr lang="en-US" sz="1150" b="1" dirty="0">
+                <a:solidFill>
+                  <a:srgbClr val="1E2761"/>
+                </a:solidFill>
+              </a:rPr>
+              <a:t>200 OK — Idempotent Return</a:t>
+            </a:r>
+            <a:endParaRPr lang="en-US" sz="1150" dirty="0"/>
+          </a:p>
+        </p:txBody>
+      </p:sp>
+      <p:sp>
+        <p:nvSpPr>
+          <p:cNvPr id="24" name="Text 22"/>
+          <p:cNvSpPr/>
+          <p:nvPr/>
+        </p:nvSpPr>
+        <p:spPr>
+          <a:xfrm>
+            <a:off x="4773168" y="2523744"/>
+            <a:ext cx="3886200" cy="512064"/>
+          </a:xfrm>
+          <a:prstGeom prst="rect">
+            <a:avLst/>
+          </a:prstGeom>
+          <a:noFill/>
+          <a:ln/>
+        </p:spPr>
+        <p:txBody>
+          <a:bodyPr wrap="square" lIns="0" tIns="0" rIns="0" bIns="0" rtlCol="0" anchor="ctr"/>
+          <a:lstStyle/>
+          <a:p>
+            <a:pPr marL="0" indent="0">
+              <a:buNone/>
+            </a:pPr>
+            <a:r>
+              <a:rPr lang="en-US" sz="1000" dirty="0">
+                <a:solidFill>
+                  <a:srgbClr val="3C4D6B"/>
+                </a:solidFill>
+              </a:rPr>
+              <a:t>IMSI already existed in DB.</a:t>
+            </a:r>
+            <a:endParaRPr lang="en-US" sz="1000" dirty="0"/>
+          </a:p>
+          <a:p>
+            <a:pPr marL="0" indent="0">
+              <a:buNone/>
+            </a:pPr>
+            <a:r>
+              <a:rPr lang="en-US" sz="1000" dirty="0">
+                <a:solidFill>
+                  <a:srgbClr val="3C4D6B"/>
+                </a:solidFill>
+              </a:rPr>
+              <a:t>Same sim_id &amp; IP returned.</a:t>
+            </a:r>
+            <a:endParaRPr lang="en-US" sz="1000" dirty="0"/>
+          </a:p>
+          <a:p>
+            <a:pPr marL="0" indent="0">
+              <a:buNone/>
+            </a:pPr>
+            <a:r>
+              <a:rPr lang="en-US" sz="1000" dirty="0">
+                <a:solidFill>
+                  <a:srgbClr val="3C4D6B"/>
+                </a:solidFill>
+              </a:rPr>
+              <a:t>Safe to retry — no duplicates.</a:t>
+            </a:r>
+            <a:endParaRPr lang="en-US" sz="1000" dirty="0"/>
+          </a:p>
+        </p:txBody>
+      </p:sp>
+      <p:sp>
+        <p:nvSpPr>
+          <p:cNvPr id="25" name="Shape 23"/>
+          <p:cNvSpPr/>
+          <p:nvPr/>
+        </p:nvSpPr>
+        <p:spPr>
+          <a:xfrm>
+            <a:off x="4663440" y="3182112"/>
+            <a:ext cx="4114800" cy="868680"/>
+          </a:xfrm>
+          <a:prstGeom prst="rect">
+            <a:avLst/>
+          </a:prstGeom>
+          <a:solidFill>
+            <a:srgbClr val="FFF3E0"/>
           </a:solidFill>
           <a:ln w="12700">
             <a:solidFill>
-              <a:srgbClr val="2E75B6"/>
+              <a:srgbClr val="F5A623"/>
             </a:solidFill>
             <a:prstDash val="solid"/>
           </a:ln>
@@ -2325,24 +3058,24 @@
       </p:sp>
       <p:sp>
         <p:nvSpPr>
-          <p:cNvPr id="15" name="Shape 13"/>
-          <p:cNvSpPr/>
-          <p:nvPr/>
-        </p:nvSpPr>
-        <p:spPr>
-          <a:xfrm>
-            <a:off x="2194560" y="3657600"/>
-            <a:ext cx="1737360" cy="54864"/>
-          </a:xfrm>
-          <a:prstGeom prst="rect">
-            <a:avLst/>
-          </a:prstGeom>
-          <a:solidFill>
-            <a:srgbClr val="4FC3F7"/>
+          <p:cNvPr id="26" name="Shape 24"/>
+          <p:cNvSpPr/>
+          <p:nvPr/>
+        </p:nvSpPr>
+        <p:spPr>
+          <a:xfrm>
+            <a:off x="4663440" y="3182112"/>
+            <a:ext cx="54864" cy="868680"/>
+          </a:xfrm>
+          <a:prstGeom prst="rect">
+            <a:avLst/>
+          </a:prstGeom>
+          <a:solidFill>
+            <a:srgbClr val="F5A623"/>
           </a:solidFill>
           <a:ln w="12700">
             <a:solidFill>
-              <a:srgbClr val="4FC3F7"/>
+              <a:srgbClr val="F5A623"/>
             </a:solidFill>
             <a:prstDash val="solid"/>
           </a:ln>
@@ -2357,96 +3090,110 @@
       </p:sp>
       <p:sp>
         <p:nvSpPr>
-          <p:cNvPr id="16" name="Text 14"/>
-          <p:cNvSpPr/>
-          <p:nvPr/>
-        </p:nvSpPr>
-        <p:spPr>
-          <a:xfrm>
-            <a:off x="2194560" y="3749040"/>
-            <a:ext cx="1737360" cy="365760"/>
-          </a:xfrm>
-          <a:prstGeom prst="rect">
-            <a:avLst/>
-          </a:prstGeom>
-          <a:noFill/>
-          <a:ln/>
-        </p:spPr>
-        <p:txBody>
-          <a:bodyPr wrap="square" lIns="0" tIns="0" rIns="0" bIns="0" rtlCol="0" anchor="ctr"/>
-          <a:lstStyle/>
-          <a:p>
-            <a:pPr marL="0" indent="0" algn="ctr">
-              <a:buNone/>
-            </a:pPr>
-            <a:r>
-              <a:rPr lang="en-US" sz="1600" b="1" dirty="0">
-                <a:solidFill>
-                  <a:srgbClr val="FFFFFF"/>
-                </a:solidFill>
-              </a:rPr>
-              <a:t>100K+</a:t>
-            </a:r>
-            <a:endParaRPr lang="en-US" sz="1600" dirty="0"/>
-          </a:p>
-        </p:txBody>
-      </p:sp>
-      <p:sp>
-        <p:nvSpPr>
-          <p:cNvPr id="17" name="Text 15"/>
-          <p:cNvSpPr/>
-          <p:nvPr/>
-        </p:nvSpPr>
-        <p:spPr>
-          <a:xfrm>
-            <a:off x="2194560" y="4114800"/>
-            <a:ext cx="1737360" cy="320040"/>
-          </a:xfrm>
-          <a:prstGeom prst="rect">
-            <a:avLst/>
-          </a:prstGeom>
-          <a:noFill/>
-          <a:ln/>
-        </p:spPr>
-        <p:txBody>
-          <a:bodyPr wrap="square" lIns="0" tIns="0" rIns="0" bIns="0" rtlCol="0" anchor="ctr"/>
-          <a:lstStyle/>
-          <a:p>
-            <a:pPr marL="0" indent="0" algn="ctr">
-              <a:buNone/>
-            </a:pPr>
-            <a:r>
-              <a:rPr lang="en-US" sz="900" dirty="0">
-                <a:solidFill>
-                  <a:srgbClr val="7EA8E8"/>
-                </a:solidFill>
-              </a:rPr>
-              <a:t>Bulk Profiles/Job</a:t>
-            </a:r>
-            <a:endParaRPr lang="en-US" sz="900" dirty="0"/>
-          </a:p>
-        </p:txBody>
-      </p:sp>
-      <p:sp>
-        <p:nvSpPr>
-          <p:cNvPr id="18" name="Shape 16"/>
-          <p:cNvSpPr/>
-          <p:nvPr/>
-        </p:nvSpPr>
-        <p:spPr>
-          <a:xfrm>
-            <a:off x="4114800" y="3657600"/>
-            <a:ext cx="1737360" cy="822960"/>
-          </a:xfrm>
-          <a:prstGeom prst="rect">
-            <a:avLst/>
-          </a:prstGeom>
-          <a:solidFill>
-            <a:srgbClr val="142050"/>
+          <p:cNvPr id="27" name="Text 25"/>
+          <p:cNvSpPr/>
+          <p:nvPr/>
+        </p:nvSpPr>
+        <p:spPr>
+          <a:xfrm>
+            <a:off x="4773168" y="3227832"/>
+            <a:ext cx="3886200" cy="256032"/>
+          </a:xfrm>
+          <a:prstGeom prst="rect">
+            <a:avLst/>
+          </a:prstGeom>
+          <a:noFill/>
+          <a:ln/>
+        </p:spPr>
+        <p:txBody>
+          <a:bodyPr wrap="square" lIns="0" tIns="0" rIns="0" bIns="0" rtlCol="0" anchor="ctr"/>
+          <a:lstStyle/>
+          <a:p>
+            <a:pPr marL="0" indent="0">
+              <a:buNone/>
+            </a:pPr>
+            <a:r>
+              <a:rPr lang="en-US" sz="1150" b="1" dirty="0">
+                <a:solidFill>
+                  <a:srgbClr val="1E2761"/>
+                </a:solidFill>
+              </a:rPr>
+              <a:t>404 — No Range Config</a:t>
+            </a:r>
+            <a:endParaRPr lang="en-US" sz="1150" dirty="0"/>
+          </a:p>
+        </p:txBody>
+      </p:sp>
+      <p:sp>
+        <p:nvSpPr>
+          <p:cNvPr id="28" name="Text 26"/>
+          <p:cNvSpPr/>
+          <p:nvPr/>
+        </p:nvSpPr>
+        <p:spPr>
+          <a:xfrm>
+            <a:off x="4773168" y="3483864"/>
+            <a:ext cx="3886200" cy="512064"/>
+          </a:xfrm>
+          <a:prstGeom prst="rect">
+            <a:avLst/>
+          </a:prstGeom>
+          <a:noFill/>
+          <a:ln/>
+        </p:spPr>
+        <p:txBody>
+          <a:bodyPr wrap="square" lIns="0" tIns="0" rIns="0" bIns="0" rtlCol="0" anchor="ctr"/>
+          <a:lstStyle/>
+          <a:p>
+            <a:pPr marL="0" indent="0">
+              <a:buNone/>
+            </a:pPr>
+            <a:r>
+              <a:rPr lang="en-US" sz="1000" dirty="0">
+                <a:solidFill>
+                  <a:srgbClr val="3C4D6B"/>
+                </a:solidFill>
+              </a:rPr>
+              <a:t>IMSI not in any active range config.</a:t>
+            </a:r>
+            <a:endParaRPr lang="en-US" sz="1000" dirty="0"/>
+          </a:p>
+          <a:p>
+            <a:pPr marL="0" indent="0">
+              <a:buNone/>
+            </a:pPr>
+            <a:r>
+              <a:rPr lang="en-US" sz="1000" dirty="0">
+                <a:solidFill>
+                  <a:srgbClr val="3C4D6B"/>
+                </a:solidFill>
+              </a:rPr>
+              <a:t>aaa-radius-server issues Access-Reject.</a:t>
+            </a:r>
+            <a:endParaRPr lang="en-US" sz="1000" dirty="0"/>
+          </a:p>
+        </p:txBody>
+      </p:sp>
+      <p:sp>
+        <p:nvSpPr>
+          <p:cNvPr id="29" name="Shape 27"/>
+          <p:cNvSpPr/>
+          <p:nvPr/>
+        </p:nvSpPr>
+        <p:spPr>
+          <a:xfrm>
+            <a:off x="4663440" y="4142232"/>
+            <a:ext cx="4114800" cy="868680"/>
+          </a:xfrm>
+          <a:prstGeom prst="rect">
+            <a:avLst/>
+          </a:prstGeom>
+          <a:solidFill>
+            <a:srgbClr val="FFEBEE"/>
           </a:solidFill>
           <a:ln w="12700">
             <a:solidFill>
-              <a:srgbClr val="2E75B6"/>
+              <a:srgbClr val="E05C5C"/>
             </a:solidFill>
             <a:prstDash val="solid"/>
           </a:ln>
@@ -2461,24 +3208,24 @@
       </p:sp>
       <p:sp>
         <p:nvSpPr>
-          <p:cNvPr id="19" name="Shape 17"/>
-          <p:cNvSpPr/>
-          <p:nvPr/>
-        </p:nvSpPr>
-        <p:spPr>
-          <a:xfrm>
-            <a:off x="4114800" y="3657600"/>
-            <a:ext cx="1737360" cy="54864"/>
-          </a:xfrm>
-          <a:prstGeom prst="rect">
-            <a:avLst/>
-          </a:prstGeom>
-          <a:solidFill>
-            <a:srgbClr val="4FC3F7"/>
+          <p:cNvPr id="30" name="Shape 28"/>
+          <p:cNvSpPr/>
+          <p:nvPr/>
+        </p:nvSpPr>
+        <p:spPr>
+          <a:xfrm>
+            <a:off x="4663440" y="4142232"/>
+            <a:ext cx="54864" cy="868680"/>
+          </a:xfrm>
+          <a:prstGeom prst="rect">
+            <a:avLst/>
+          </a:prstGeom>
+          <a:solidFill>
+            <a:srgbClr val="E05C5C"/>
           </a:solidFill>
           <a:ln w="12700">
             <a:solidFill>
-              <a:srgbClr val="4FC3F7"/>
+              <a:srgbClr val="E05C5C"/>
             </a:solidFill>
             <a:prstDash val="solid"/>
           </a:ln>
@@ -2493,403 +3240,101 @@
       </p:sp>
       <p:sp>
         <p:nvSpPr>
-          <p:cNvPr id="20" name="Text 18"/>
-          <p:cNvSpPr/>
-          <p:nvPr/>
-        </p:nvSpPr>
-        <p:spPr>
-          <a:xfrm>
-            <a:off x="4114800" y="3749040"/>
-            <a:ext cx="1737360" cy="365760"/>
-          </a:xfrm>
-          <a:prstGeom prst="rect">
-            <a:avLst/>
-          </a:prstGeom>
-          <a:noFill/>
-          <a:ln/>
-        </p:spPr>
-        <p:txBody>
-          <a:bodyPr wrap="square" lIns="0" tIns="0" rIns="0" bIns="0" rtlCol="0" anchor="ctr"/>
-          <a:lstStyle/>
-          <a:p>
-            <a:pPr marL="0" indent="0" algn="ctr">
-              <a:buNone/>
-            </a:pPr>
-            <a:r>
-              <a:rPr lang="en-US" sz="1600" b="1" dirty="0">
-                <a:solidFill>
-                  <a:srgbClr val="FFFFFF"/>
-                </a:solidFill>
-              </a:rPr>
-              <a:t>Multi-IMSI</a:t>
-            </a:r>
-            <a:endParaRPr lang="en-US" sz="1600" dirty="0"/>
-          </a:p>
-        </p:txBody>
-      </p:sp>
-      <p:sp>
-        <p:nvSpPr>
-          <p:cNvPr id="21" name="Text 19"/>
-          <p:cNvSpPr/>
-          <p:nvPr/>
-        </p:nvSpPr>
-        <p:spPr>
-          <a:xfrm>
-            <a:off x="4114800" y="4114800"/>
-            <a:ext cx="1737360" cy="320040"/>
-          </a:xfrm>
-          <a:prstGeom prst="rect">
-            <a:avLst/>
-          </a:prstGeom>
-          <a:noFill/>
-          <a:ln/>
-        </p:spPr>
-        <p:txBody>
-          <a:bodyPr wrap="square" lIns="0" tIns="0" rIns="0" bIns="0" rtlCol="0" anchor="ctr"/>
-          <a:lstStyle/>
-          <a:p>
-            <a:pPr marL="0" indent="0" algn="ctr">
-              <a:buNone/>
-            </a:pPr>
-            <a:r>
-              <a:rPr lang="en-US" sz="900" dirty="0">
-                <a:solidFill>
-                  <a:srgbClr val="7EA8E8"/>
-                </a:solidFill>
-              </a:rPr>
-              <a:t>Auto-Provisioning</a:t>
-            </a:r>
-            <a:endParaRPr lang="en-US" sz="900" dirty="0"/>
-          </a:p>
-        </p:txBody>
-      </p:sp>
-      <p:sp>
-        <p:nvSpPr>
-          <p:cNvPr id="22" name="Text 20"/>
-          <p:cNvSpPr/>
-          <p:nvPr/>
-        </p:nvSpPr>
-        <p:spPr>
-          <a:xfrm>
-            <a:off x="6766560" y="914400"/>
-            <a:ext cx="2194560" cy="320040"/>
-          </a:xfrm>
-          <a:prstGeom prst="rect">
-            <a:avLst/>
-          </a:prstGeom>
-          <a:noFill/>
-          <a:ln/>
-        </p:spPr>
-        <p:txBody>
-          <a:bodyPr wrap="square" lIns="0" tIns="0" rIns="0" bIns="0" rtlCol="0" anchor="ctr"/>
-          <a:lstStyle/>
-          <a:p>
-            <a:pPr marL="0" indent="0" algn="l">
-              <a:buNone/>
-            </a:pPr>
-            <a:r>
-              <a:rPr lang="en-US" sz="1200" i="1" dirty="0">
-                <a:solidFill>
-                  <a:srgbClr val="CADCFC"/>
-                </a:solidFill>
-              </a:rPr>
-              <a:t>C++17 / Drogon</a:t>
-            </a:r>
-            <a:endParaRPr lang="en-US" sz="1200" dirty="0"/>
-          </a:p>
-        </p:txBody>
-      </p:sp>
-      <p:sp>
-        <p:nvSpPr>
-          <p:cNvPr id="23" name="Shape 21"/>
-          <p:cNvSpPr/>
-          <p:nvPr/>
-        </p:nvSpPr>
-        <p:spPr>
-          <a:xfrm>
-            <a:off x="6675120" y="1074420"/>
-            <a:ext cx="73152" cy="0"/>
-          </a:xfrm>
-          <a:prstGeom prst="line">
-            <a:avLst/>
-          </a:prstGeom>
-          <a:noFill/>
-          <a:ln w="25400">
-            <a:solidFill>
-              <a:srgbClr val="4FC3F7"/>
-            </a:solidFill>
-            <a:prstDash val="solid"/>
-          </a:ln>
-        </p:spPr>
-        <p:txBody>
-          <a:bodyPr/>
-          <a:lstStyle/>
-          <a:p>
-            <a:endParaRPr lang="LID4096"/>
-          </a:p>
-        </p:txBody>
-      </p:sp>
-      <p:sp>
-        <p:nvSpPr>
-          <p:cNvPr id="24" name="Text 22"/>
-          <p:cNvSpPr/>
-          <p:nvPr/>
-        </p:nvSpPr>
-        <p:spPr>
-          <a:xfrm>
-            <a:off x="6766560" y="1481328"/>
-            <a:ext cx="2194560" cy="320040"/>
-          </a:xfrm>
-          <a:prstGeom prst="rect">
-            <a:avLst/>
-          </a:prstGeom>
-          <a:noFill/>
-          <a:ln/>
-        </p:spPr>
-        <p:txBody>
-          <a:bodyPr wrap="square" lIns="0" tIns="0" rIns="0" bIns="0" rtlCol="0" anchor="ctr"/>
-          <a:lstStyle/>
-          <a:p>
-            <a:pPr marL="0" indent="0" algn="l">
-              <a:buNone/>
-            </a:pPr>
-            <a:r>
-              <a:rPr lang="en-US" sz="1200" i="1" dirty="0">
-                <a:solidFill>
-                  <a:srgbClr val="CADCFC"/>
-                </a:solidFill>
-              </a:rPr>
-              <a:t>Python / FastAPI</a:t>
-            </a:r>
-            <a:endParaRPr lang="en-US" sz="1200" dirty="0"/>
-          </a:p>
-        </p:txBody>
-      </p:sp>
-      <p:sp>
-        <p:nvSpPr>
-          <p:cNvPr id="25" name="Shape 23"/>
-          <p:cNvSpPr/>
-          <p:nvPr/>
-        </p:nvSpPr>
-        <p:spPr>
-          <a:xfrm>
-            <a:off x="6675120" y="1641348"/>
-            <a:ext cx="73152" cy="0"/>
-          </a:xfrm>
-          <a:prstGeom prst="line">
-            <a:avLst/>
-          </a:prstGeom>
-          <a:noFill/>
-          <a:ln w="25400">
-            <a:solidFill>
-              <a:srgbClr val="4FC3F7"/>
-            </a:solidFill>
-            <a:prstDash val="solid"/>
-          </a:ln>
-        </p:spPr>
-        <p:txBody>
-          <a:bodyPr/>
-          <a:lstStyle/>
-          <a:p>
-            <a:endParaRPr lang="LID4096"/>
-          </a:p>
-        </p:txBody>
-      </p:sp>
-      <p:sp>
-        <p:nvSpPr>
-          <p:cNvPr id="26" name="Text 24"/>
-          <p:cNvSpPr/>
-          <p:nvPr/>
-        </p:nvSpPr>
-        <p:spPr>
-          <a:xfrm>
-            <a:off x="6766560" y="2048256"/>
-            <a:ext cx="2194560" cy="320040"/>
-          </a:xfrm>
-          <a:prstGeom prst="rect">
-            <a:avLst/>
-          </a:prstGeom>
-          <a:noFill/>
-          <a:ln/>
-        </p:spPr>
-        <p:txBody>
-          <a:bodyPr wrap="square" lIns="0" tIns="0" rIns="0" bIns="0" rtlCol="0" anchor="ctr"/>
-          <a:lstStyle/>
-          <a:p>
-            <a:pPr marL="0" indent="0" algn="l">
-              <a:buNone/>
-            </a:pPr>
-            <a:r>
-              <a:rPr lang="en-US" sz="1200" i="1" dirty="0">
-                <a:solidFill>
-                  <a:srgbClr val="CADCFC"/>
-                </a:solidFill>
-              </a:rPr>
-              <a:t>PostgreSQL 15</a:t>
-            </a:r>
-            <a:endParaRPr lang="en-US" sz="1200" dirty="0"/>
-          </a:p>
-        </p:txBody>
-      </p:sp>
-      <p:sp>
-        <p:nvSpPr>
-          <p:cNvPr id="27" name="Shape 25"/>
-          <p:cNvSpPr/>
-          <p:nvPr/>
-        </p:nvSpPr>
-        <p:spPr>
-          <a:xfrm>
-            <a:off x="6675120" y="2208276"/>
-            <a:ext cx="73152" cy="0"/>
-          </a:xfrm>
-          <a:prstGeom prst="line">
-            <a:avLst/>
-          </a:prstGeom>
-          <a:noFill/>
-          <a:ln w="25400">
-            <a:solidFill>
-              <a:srgbClr val="4FC3F7"/>
-            </a:solidFill>
-            <a:prstDash val="solid"/>
-          </a:ln>
-        </p:spPr>
-        <p:txBody>
-          <a:bodyPr/>
-          <a:lstStyle/>
-          <a:p>
-            <a:endParaRPr lang="LID4096"/>
-          </a:p>
-        </p:txBody>
-      </p:sp>
-      <p:sp>
-        <p:nvSpPr>
-          <p:cNvPr id="28" name="Text 26"/>
-          <p:cNvSpPr/>
-          <p:nvPr/>
-        </p:nvSpPr>
-        <p:spPr>
-          <a:xfrm>
-            <a:off x="6766560" y="2615184"/>
-            <a:ext cx="2194560" cy="320040"/>
-          </a:xfrm>
-          <a:prstGeom prst="rect">
-            <a:avLst/>
-          </a:prstGeom>
-          <a:noFill/>
-          <a:ln/>
-        </p:spPr>
-        <p:txBody>
-          <a:bodyPr wrap="square" lIns="0" tIns="0" rIns="0" bIns="0" rtlCol="0" anchor="ctr"/>
-          <a:lstStyle/>
-          <a:p>
-            <a:pPr marL="0" indent="0" algn="l">
-              <a:buNone/>
-            </a:pPr>
-            <a:r>
-              <a:rPr lang="en-US" sz="1200" i="1" dirty="0">
-                <a:solidFill>
-                  <a:srgbClr val="CADCFC"/>
-                </a:solidFill>
-              </a:rPr>
-              <a:t>Kubernetes / Helm</a:t>
-            </a:r>
-            <a:endParaRPr lang="en-US" sz="1200" dirty="0"/>
-          </a:p>
-        </p:txBody>
-      </p:sp>
-      <p:sp>
-        <p:nvSpPr>
-          <p:cNvPr id="29" name="Shape 27"/>
-          <p:cNvSpPr/>
-          <p:nvPr/>
-        </p:nvSpPr>
-        <p:spPr>
-          <a:xfrm>
-            <a:off x="6675120" y="2775204"/>
-            <a:ext cx="73152" cy="0"/>
-          </a:xfrm>
-          <a:prstGeom prst="line">
-            <a:avLst/>
-          </a:prstGeom>
-          <a:noFill/>
-          <a:ln w="25400">
-            <a:solidFill>
-              <a:srgbClr val="4FC3F7"/>
-            </a:solidFill>
-            <a:prstDash val="solid"/>
-          </a:ln>
-        </p:spPr>
-        <p:txBody>
-          <a:bodyPr/>
-          <a:lstStyle/>
-          <a:p>
-            <a:endParaRPr lang="LID4096"/>
-          </a:p>
-        </p:txBody>
-      </p:sp>
-      <p:sp>
-        <p:nvSpPr>
-          <p:cNvPr id="30" name="Text 28"/>
-          <p:cNvSpPr/>
-          <p:nvPr/>
-        </p:nvSpPr>
-        <p:spPr>
-          <a:xfrm>
-            <a:off x="6766560" y="3182112"/>
-            <a:ext cx="2194560" cy="320040"/>
-          </a:xfrm>
-          <a:prstGeom prst="rect">
-            <a:avLst/>
-          </a:prstGeom>
-          <a:noFill/>
-          <a:ln/>
-        </p:spPr>
-        <p:txBody>
-          <a:bodyPr wrap="square" lIns="0" tIns="0" rIns="0" bIns="0" rtlCol="0" anchor="ctr"/>
-          <a:lstStyle/>
-          <a:p>
-            <a:pPr marL="0" indent="0" algn="l">
-              <a:buNone/>
-            </a:pPr>
-            <a:r>
-              <a:rPr lang="en-US" sz="1200" i="1" dirty="0">
-                <a:solidFill>
-                  <a:srgbClr val="CADCFC"/>
-                </a:solidFill>
-              </a:rPr>
-              <a:t>Prometheus / Grafana</a:t>
-            </a:r>
-            <a:endParaRPr lang="en-US" sz="1200" dirty="0"/>
-          </a:p>
-        </p:txBody>
-      </p:sp>
-      <p:sp>
-        <p:nvSpPr>
-          <p:cNvPr id="31" name="Shape 29"/>
-          <p:cNvSpPr/>
-          <p:nvPr/>
-        </p:nvSpPr>
-        <p:spPr>
-          <a:xfrm>
-            <a:off x="6675120" y="3342132"/>
-            <a:ext cx="73152" cy="0"/>
-          </a:xfrm>
-          <a:prstGeom prst="line">
-            <a:avLst/>
-          </a:prstGeom>
-          <a:noFill/>
-          <a:ln w="25400">
-            <a:solidFill>
-              <a:srgbClr val="4FC3F7"/>
-            </a:solidFill>
-            <a:prstDash val="solid"/>
-          </a:ln>
-        </p:spPr>
-        <p:txBody>
-          <a:bodyPr/>
-          <a:lstStyle/>
-          <a:p>
-            <a:endParaRPr lang="LID4096"/>
+          <p:cNvPr id="31" name="Text 29"/>
+          <p:cNvSpPr/>
+          <p:nvPr/>
+        </p:nvSpPr>
+        <p:spPr>
+          <a:xfrm>
+            <a:off x="4773168" y="4187952"/>
+            <a:ext cx="3886200" cy="256032"/>
+          </a:xfrm>
+          <a:prstGeom prst="rect">
+            <a:avLst/>
+          </a:prstGeom>
+          <a:noFill/>
+          <a:ln/>
+        </p:spPr>
+        <p:txBody>
+          <a:bodyPr wrap="square" lIns="0" tIns="0" rIns="0" bIns="0" rtlCol="0" anchor="ctr"/>
+          <a:lstStyle/>
+          <a:p>
+            <a:pPr marL="0" indent="0">
+              <a:buNone/>
+            </a:pPr>
+            <a:r>
+              <a:rPr lang="en-US" sz="1150" b="1" dirty="0">
+                <a:solidFill>
+                  <a:srgbClr val="1E2761"/>
+                </a:solidFill>
+              </a:rPr>
+              <a:t>503 — Pool Exhausted</a:t>
+            </a:r>
+            <a:endParaRPr lang="en-US" sz="1150" dirty="0"/>
+          </a:p>
+        </p:txBody>
+      </p:sp>
+      <p:sp>
+        <p:nvSpPr>
+          <p:cNvPr id="32" name="Text 30"/>
+          <p:cNvSpPr/>
+          <p:nvPr/>
+        </p:nvSpPr>
+        <p:spPr>
+          <a:xfrm>
+            <a:off x="4773168" y="4443984"/>
+            <a:ext cx="3886200" cy="512064"/>
+          </a:xfrm>
+          <a:prstGeom prst="rect">
+            <a:avLst/>
+          </a:prstGeom>
+          <a:noFill/>
+          <a:ln/>
+        </p:spPr>
+        <p:txBody>
+          <a:bodyPr wrap="square" lIns="0" tIns="0" rIns="0" bIns="0" rtlCol="0" anchor="ctr"/>
+          <a:lstStyle/>
+          <a:p>
+            <a:pPr marL="0" indent="0">
+              <a:buNone/>
+            </a:pPr>
+            <a:r>
+              <a:rPr lang="en-US" sz="1000" dirty="0">
+                <a:solidFill>
+                  <a:srgbClr val="3C4D6B"/>
+                </a:solidFill>
+              </a:rPr>
+              <a:t>No available IPs remaining.</a:t>
+            </a:r>
+            <a:endParaRPr lang="en-US" sz="1000" dirty="0"/>
+          </a:p>
+          <a:p>
+            <a:pPr marL="0" indent="0">
+              <a:buNone/>
+            </a:pPr>
+            <a:r>
+              <a:rPr lang="en-US" sz="1000" dirty="0">
+                <a:solidFill>
+                  <a:srgbClr val="3C4D6B"/>
+                </a:solidFill>
+              </a:rPr>
+              <a:t>Create a new pool.</a:t>
+            </a:r>
+            <a:endParaRPr lang="en-US" sz="1000" dirty="0"/>
+          </a:p>
+          <a:p>
+            <a:pPr marL="0" indent="0">
+              <a:buNone/>
+            </a:pPr>
+            <a:r>
+              <a:rPr lang="en-US" sz="1000" dirty="0">
+                <a:solidFill>
+                  <a:srgbClr val="3C4D6B"/>
+                </a:solidFill>
+              </a:rPr>
+              <a:t>Alert fires automatically.</a:t>
+            </a:r>
+            <a:endParaRPr lang="en-US" sz="1000" dirty="0"/>
           </a:p>
         </p:txBody>
       </p:sp>
@@ -2901,7 +3346,7 @@
 </p:sld>
 </file>
 
-<file path=ppt/slides/slide10.xml><?xml version="1.0" encoding="utf-8"?>
+<file path=ppt/slides/slide11.xml><?xml version="1.0" encoding="utf-8"?>
 <p:sld xmlns:a="http://schemas.openxmlformats.org/drawingml/2006/main" xmlns:r="http://schemas.openxmlformats.org/officeDocument/2006/relationships" xmlns:p="http://schemas.openxmlformats.org/presentationml/2006/main">
   <p:cSld name="Slide 7">
     <p:bg>
@@ -4492,7 +4937,7 @@
 </p:sld>
 </file>
 
-<file path=ppt/slides/slide11.xml><?xml version="1.0" encoding="utf-8"?>
+<file path=ppt/slides/slide12.xml><?xml version="1.0" encoding="utf-8"?>
 <p:sld xmlns:a="http://schemas.openxmlformats.org/drawingml/2006/main" xmlns:r="http://schemas.openxmlformats.org/officeDocument/2006/relationships" xmlns:p="http://schemas.openxmlformats.org/presentationml/2006/main">
   <p:cSld name="Slide 8">
     <p:bg>
@@ -6399,7 +6844,7 @@
 </p:sld>
 </file>
 
-<file path=ppt/slides/slide12.xml><?xml version="1.0" encoding="utf-8"?>
+<file path=ppt/slides/slide13.xml><?xml version="1.0" encoding="utf-8"?>
 <p:sld xmlns:a="http://schemas.openxmlformats.org/drawingml/2006/main" xmlns:r="http://schemas.openxmlformats.org/officeDocument/2006/relationships" xmlns:p="http://schemas.openxmlformats.org/presentationml/2006/main">
   <p:cSld name="Slide 9">
     <p:bg>
@@ -8719,7 +9164,7 @@
 </p:sld>
 </file>
 
-<file path=ppt/slides/slide13.xml><?xml version="1.0" encoding="utf-8"?>
+<file path=ppt/slides/slide14.xml><?xml version="1.0" encoding="utf-8"?>
 <p:sld xmlns:a="http://schemas.openxmlformats.org/drawingml/2006/main" xmlns:r="http://schemas.openxmlformats.org/officeDocument/2006/relationships" xmlns:p="http://schemas.openxmlformats.org/presentationml/2006/main">
   <p:cSld name="Slide 10">
     <p:bg>
@@ -10309,7 +10754,7 @@
 </p:sld>
 </file>
 
-<file path=ppt/slides/slide14.xml><?xml version="1.0" encoding="utf-8"?>
+<file path=ppt/slides/slide15.xml><?xml version="1.0" encoding="utf-8"?>
 <p:sld xmlns:a="http://schemas.openxmlformats.org/drawingml/2006/main" xmlns:r="http://schemas.openxmlformats.org/officeDocument/2006/relationships" xmlns:p="http://schemas.openxmlformats.org/presentationml/2006/main">
   <p:cSld name="Slide 11">
     <p:bg>
@@ -12710,7 +13155,7 @@
 </p:sld>
 </file>
 
-<file path=ppt/slides/slide15.xml><?xml version="1.0" encoding="utf-8"?>
+<file path=ppt/slides/slide16.xml><?xml version="1.0" encoding="utf-8"?>
 <p:sld xmlns:a="http://schemas.openxmlformats.org/drawingml/2006/main" xmlns:r="http://schemas.openxmlformats.org/officeDocument/2006/relationships" xmlns:p="http://schemas.openxmlformats.org/presentationml/2006/main">
   <p:cSld name="Slide 12">
     <p:bg>
@@ -14286,7 +14731,7 @@
 </p:sld>
 </file>
 
-<file path=ppt/slides/slide16.xml><?xml version="1.0" encoding="utf-8"?>
+<file path=ppt/slides/slide17.xml><?xml version="1.0" encoding="utf-8"?>
 <p:sld xmlns:a="http://schemas.openxmlformats.org/drawingml/2006/main" xmlns:r="http://schemas.openxmlformats.org/officeDocument/2006/relationships" xmlns:p="http://schemas.openxmlformats.org/presentationml/2006/main">
   <p:cSld name="Slide 13">
     <p:bg>
@@ -15938,7 +16383,7 @@
 </p:sld>
 </file>
 
-<file path=ppt/slides/slide17.xml><?xml version="1.0" encoding="utf-8"?>
+<file path=ppt/slides/slide18.xml><?xml version="1.0" encoding="utf-8"?>
 <p:sld xmlns:a="http://schemas.openxmlformats.org/drawingml/2006/main" xmlns:r="http://schemas.openxmlformats.org/officeDocument/2006/relationships" xmlns:p="http://schemas.openxmlformats.org/presentationml/2006/main">
   <p:cSld name="Slide 14">
     <p:spTree>
@@ -20447,7 +20892,7 @@
 </p:sld>
 </file>
 
-<file path=ppt/slides/slide18.xml><?xml version="1.0" encoding="utf-8"?>
+<file path=ppt/slides/slide19.xml><?xml version="1.0" encoding="utf-8"?>
 <p:sld xmlns:a="http://schemas.openxmlformats.org/drawingml/2006/main" xmlns:r="http://schemas.openxmlformats.org/officeDocument/2006/relationships" xmlns:p="http://schemas.openxmlformats.org/presentationml/2006/main">
   <p:cSld name="Slide 15">
     <p:bg>
@@ -21160,6 +21605,1081 @@
 
 <file path=ppt/slides/slide2.xml><?xml version="1.0" encoding="utf-8"?>
 <p:sld xmlns:a="http://schemas.openxmlformats.org/drawingml/2006/main" xmlns:r="http://schemas.openxmlformats.org/officeDocument/2006/relationships" xmlns:p="http://schemas.openxmlformats.org/presentationml/2006/main">
+  <p:cSld name="Slide 1">
+    <p:bg>
+      <p:bgPr>
+        <a:solidFill>
+          <a:srgbClr val="1E2761"/>
+        </a:solidFill>
+        <a:effectLst/>
+      </p:bgPr>
+    </p:bg>
+    <p:spTree>
+      <p:nvGrpSpPr>
+        <p:cNvPr id="1" name=""/>
+        <p:cNvGrpSpPr/>
+        <p:nvPr/>
+      </p:nvGrpSpPr>
+      <p:grpSpPr>
+        <a:xfrm>
+          <a:off x="0" y="0"/>
+          <a:ext cx="0" cy="0"/>
+          <a:chOff x="0" y="0"/>
+          <a:chExt cx="0" cy="0"/>
+        </a:xfrm>
+      </p:grpSpPr>
+      <p:sp>
+        <p:nvSpPr>
+          <p:cNvPr id="2" name="Shape 0"/>
+          <p:cNvSpPr/>
+          <p:nvPr/>
+        </p:nvSpPr>
+        <p:spPr>
+          <a:xfrm>
+            <a:off x="5943600" y="-274320"/>
+            <a:ext cx="4114800" cy="5692140"/>
+          </a:xfrm>
+          <a:prstGeom prst="rect">
+            <a:avLst/>
+          </a:prstGeom>
+          <a:solidFill>
+            <a:srgbClr val="172055">
+              <a:alpha val="60000"/>
+            </a:srgbClr>
+          </a:solidFill>
+          <a:ln w="12700">
+            <a:solidFill>
+              <a:srgbClr val="172055"/>
+            </a:solidFill>
+            <a:prstDash val="solid"/>
+          </a:ln>
+        </p:spPr>
+        <p:txBody>
+          <a:bodyPr/>
+          <a:lstStyle/>
+          <a:p>
+            <a:endParaRPr lang="LID4096"/>
+          </a:p>
+        </p:txBody>
+      </p:sp>
+      <p:sp>
+        <p:nvSpPr>
+          <p:cNvPr id="3" name="Shape 1"/>
+          <p:cNvSpPr/>
+          <p:nvPr/>
+        </p:nvSpPr>
+        <p:spPr>
+          <a:xfrm>
+            <a:off x="6583680" y="-274320"/>
+            <a:ext cx="3200400" cy="5692140"/>
+          </a:xfrm>
+          <a:prstGeom prst="rect">
+            <a:avLst/>
+          </a:prstGeom>
+          <a:solidFill>
+            <a:srgbClr val="0D1844">
+              <a:alpha val="60000"/>
+            </a:srgbClr>
+          </a:solidFill>
+          <a:ln w="12700">
+            <a:solidFill>
+              <a:srgbClr val="0D1844"/>
+            </a:solidFill>
+            <a:prstDash val="solid"/>
+          </a:ln>
+        </p:spPr>
+        <p:txBody>
+          <a:bodyPr/>
+          <a:lstStyle/>
+          <a:p>
+            <a:endParaRPr lang="LID4096"/>
+          </a:p>
+        </p:txBody>
+      </p:sp>
+      <p:sp>
+        <p:nvSpPr>
+          <p:cNvPr id="4" name="Shape 2"/>
+          <p:cNvSpPr/>
+          <p:nvPr/>
+        </p:nvSpPr>
+        <p:spPr>
+          <a:xfrm>
+            <a:off x="0" y="0"/>
+            <a:ext cx="109728" cy="5143500"/>
+          </a:xfrm>
+          <a:prstGeom prst="rect">
+            <a:avLst/>
+          </a:prstGeom>
+          <a:solidFill>
+            <a:srgbClr val="4FC3F7"/>
+          </a:solidFill>
+          <a:ln w="12700">
+            <a:solidFill>
+              <a:srgbClr val="4FC3F7"/>
+            </a:solidFill>
+            <a:prstDash val="solid"/>
+          </a:ln>
+        </p:spPr>
+        <p:txBody>
+          <a:bodyPr/>
+          <a:lstStyle/>
+          <a:p>
+            <a:endParaRPr lang="LID4096"/>
+          </a:p>
+        </p:txBody>
+      </p:sp>
+      <p:sp>
+        <p:nvSpPr>
+          <p:cNvPr id="5" name="Shape 3"/>
+          <p:cNvSpPr/>
+          <p:nvPr/>
+        </p:nvSpPr>
+        <p:spPr>
+          <a:xfrm>
+            <a:off x="274320" y="365760"/>
+            <a:ext cx="3200400" cy="237744"/>
+          </a:xfrm>
+          <a:prstGeom prst="roundRect">
+            <a:avLst>
+              <a:gd name="adj" fmla="val 50000"/>
+            </a:avLst>
+          </a:prstGeom>
+          <a:solidFill>
+            <a:srgbClr val="3C4D6B"/>
+          </a:solidFill>
+          <a:ln w="12700">
+            <a:solidFill>
+              <a:srgbClr val="3C4D6B"/>
+            </a:solidFill>
+            <a:prstDash val="solid"/>
+          </a:ln>
+        </p:spPr>
+        <p:txBody>
+          <a:bodyPr/>
+          <a:lstStyle/>
+          <a:p>
+            <a:endParaRPr lang="LID4096"/>
+          </a:p>
+        </p:txBody>
+      </p:sp>
+      <p:sp>
+        <p:nvSpPr>
+          <p:cNvPr id="6" name="Text 4"/>
+          <p:cNvSpPr/>
+          <p:nvPr/>
+        </p:nvSpPr>
+        <p:spPr>
+          <a:xfrm>
+            <a:off x="274320" y="365760"/>
+            <a:ext cx="3200400" cy="237744"/>
+          </a:xfrm>
+          <a:prstGeom prst="rect">
+            <a:avLst/>
+          </a:prstGeom>
+          <a:noFill/>
+          <a:ln/>
+        </p:spPr>
+        <p:txBody>
+          <a:bodyPr wrap="square" lIns="0" tIns="0" rIns="0" bIns="0" rtlCol="0" anchor="ctr"/>
+          <a:lstStyle/>
+          <a:p>
+            <a:pPr marL="0" indent="0" algn="ctr">
+              <a:buNone/>
+            </a:pPr>
+            <a:r>
+              <a:rPr lang="en-US" sz="900" b="1" dirty="0">
+                <a:solidFill>
+                  <a:srgbClr val="CADCFC"/>
+                </a:solidFill>
+              </a:rPr>
+              <a:t>TELECOM  |  AAA  |  CLOUD-NATIVE</a:t>
+            </a:r>
+            <a:endParaRPr lang="en-US" sz="900" dirty="0"/>
+          </a:p>
+        </p:txBody>
+      </p:sp>
+      <p:sp>
+        <p:nvSpPr>
+          <p:cNvPr id="7" name="Text 5"/>
+          <p:cNvSpPr/>
+          <p:nvPr/>
+        </p:nvSpPr>
+        <p:spPr>
+          <a:xfrm>
+            <a:off x="274320" y="1005840"/>
+            <a:ext cx="5943600" cy="914400"/>
+          </a:xfrm>
+          <a:prstGeom prst="rect">
+            <a:avLst/>
+          </a:prstGeom>
+          <a:noFill/>
+          <a:ln/>
+        </p:spPr>
+        <p:txBody>
+          <a:bodyPr wrap="square" rtlCol="0" anchor="ctr"/>
+          <a:lstStyle/>
+          <a:p>
+            <a:pPr marL="0" indent="0">
+              <a:buNone/>
+            </a:pPr>
+            <a:r>
+              <a:rPr lang="en-US" sz="4200" b="1" dirty="0">
+                <a:solidFill>
+                  <a:srgbClr val="FFFFFF"/>
+                </a:solidFill>
+                <a:latin typeface="Calibri" pitchFamily="34" charset="0"/>
+                <a:ea typeface="Calibri" pitchFamily="34" charset="-122"/>
+                <a:cs typeface="Calibri" pitchFamily="34" charset="-120"/>
+              </a:rPr>
+              <a:t>AAA Cloud-Native</a:t>
+            </a:r>
+            <a:endParaRPr lang="en-US" sz="4200" dirty="0"/>
+          </a:p>
+        </p:txBody>
+      </p:sp>
+      <p:sp>
+        <p:nvSpPr>
+          <p:cNvPr id="8" name="Text 6"/>
+          <p:cNvSpPr/>
+          <p:nvPr/>
+        </p:nvSpPr>
+        <p:spPr>
+          <a:xfrm>
+            <a:off x="274320" y="1783080"/>
+            <a:ext cx="5943600" cy="822960"/>
+          </a:xfrm>
+          <a:prstGeom prst="rect">
+            <a:avLst/>
+          </a:prstGeom>
+          <a:noFill/>
+          <a:ln/>
+        </p:spPr>
+        <p:txBody>
+          <a:bodyPr wrap="square" rtlCol="0" anchor="ctr"/>
+          <a:lstStyle/>
+          <a:p>
+            <a:pPr marL="0" indent="0">
+              <a:buNone/>
+            </a:pPr>
+            <a:r>
+              <a:rPr lang="en-US" sz="4200" b="1" dirty="0">
+                <a:solidFill>
+                  <a:srgbClr val="4FC3F7"/>
+                </a:solidFill>
+                <a:latin typeface="Calibri" pitchFamily="34" charset="0"/>
+                <a:ea typeface="Calibri" pitchFamily="34" charset="-122"/>
+                <a:cs typeface="Calibri" pitchFamily="34" charset="-120"/>
+              </a:rPr>
+              <a:t>Platform</a:t>
+            </a:r>
+            <a:endParaRPr lang="en-US" sz="4200" dirty="0"/>
+          </a:p>
+        </p:txBody>
+      </p:sp>
+      <p:sp>
+        <p:nvSpPr>
+          <p:cNvPr id="9" name="Text 7"/>
+          <p:cNvSpPr/>
+          <p:nvPr/>
+        </p:nvSpPr>
+        <p:spPr>
+          <a:xfrm>
+            <a:off x="274320" y="2651760"/>
+            <a:ext cx="5669280" cy="731520"/>
+          </a:xfrm>
+          <a:prstGeom prst="rect">
+            <a:avLst/>
+          </a:prstGeom>
+          <a:noFill/>
+          <a:ln/>
+        </p:spPr>
+        <p:txBody>
+          <a:bodyPr wrap="square" rtlCol="0" anchor="ctr"/>
+          <a:lstStyle/>
+          <a:p>
+            <a:pPr marL="0" indent="0">
+              <a:buNone/>
+            </a:pPr>
+            <a:r>
+              <a:rPr lang="en-US" sz="1600" dirty="0">
+                <a:solidFill>
+                  <a:srgbClr val="7EA8E8"/>
+                </a:solidFill>
+                <a:latin typeface="Calibri" pitchFamily="34" charset="0"/>
+                <a:ea typeface="Calibri" pitchFamily="34" charset="-122"/>
+                <a:cs typeface="Calibri" pitchFamily="34" charset="-120"/>
+              </a:rPr>
+              <a:t>High-Performance Subscriber Provisioning</a:t>
+            </a:r>
+            <a:endParaRPr lang="en-US" sz="1600" dirty="0"/>
+          </a:p>
+          <a:p>
+            <a:pPr marL="0" indent="0">
+              <a:buNone/>
+            </a:pPr>
+            <a:r>
+              <a:rPr lang="en-US" sz="1600" dirty="0">
+                <a:solidFill>
+                  <a:srgbClr val="7EA8E8"/>
+                </a:solidFill>
+                <a:latin typeface="Calibri" pitchFamily="34" charset="0"/>
+                <a:ea typeface="Calibri" pitchFamily="34" charset="-122"/>
+                <a:cs typeface="Calibri" pitchFamily="34" charset="-120"/>
+              </a:rPr>
+              <a:t>&amp; Real-Time RADIUS Authentication</a:t>
+            </a:r>
+            <a:endParaRPr lang="en-US" sz="1600" dirty="0"/>
+          </a:p>
+        </p:txBody>
+      </p:sp>
+      <p:sp>
+        <p:nvSpPr>
+          <p:cNvPr id="10" name="Shape 8"/>
+          <p:cNvSpPr/>
+          <p:nvPr/>
+        </p:nvSpPr>
+        <p:spPr>
+          <a:xfrm>
+            <a:off x="274320" y="3657600"/>
+            <a:ext cx="1737360" cy="822960"/>
+          </a:xfrm>
+          <a:prstGeom prst="rect">
+            <a:avLst/>
+          </a:prstGeom>
+          <a:solidFill>
+            <a:srgbClr val="142050"/>
+          </a:solidFill>
+          <a:ln w="12700">
+            <a:solidFill>
+              <a:srgbClr val="2E75B6"/>
+            </a:solidFill>
+            <a:prstDash val="solid"/>
+          </a:ln>
+        </p:spPr>
+        <p:txBody>
+          <a:bodyPr/>
+          <a:lstStyle/>
+          <a:p>
+            <a:endParaRPr lang="LID4096"/>
+          </a:p>
+        </p:txBody>
+      </p:sp>
+      <p:sp>
+        <p:nvSpPr>
+          <p:cNvPr id="11" name="Shape 9"/>
+          <p:cNvSpPr/>
+          <p:nvPr/>
+        </p:nvSpPr>
+        <p:spPr>
+          <a:xfrm>
+            <a:off x="274320" y="3657600"/>
+            <a:ext cx="1737360" cy="54864"/>
+          </a:xfrm>
+          <a:prstGeom prst="rect">
+            <a:avLst/>
+          </a:prstGeom>
+          <a:solidFill>
+            <a:srgbClr val="4FC3F7"/>
+          </a:solidFill>
+          <a:ln w="12700">
+            <a:solidFill>
+              <a:srgbClr val="4FC3F7"/>
+            </a:solidFill>
+            <a:prstDash val="solid"/>
+          </a:ln>
+        </p:spPr>
+        <p:txBody>
+          <a:bodyPr/>
+          <a:lstStyle/>
+          <a:p>
+            <a:endParaRPr lang="LID4096"/>
+          </a:p>
+        </p:txBody>
+      </p:sp>
+      <p:sp>
+        <p:nvSpPr>
+          <p:cNvPr id="12" name="Text 10"/>
+          <p:cNvSpPr/>
+          <p:nvPr/>
+        </p:nvSpPr>
+        <p:spPr>
+          <a:xfrm>
+            <a:off x="274320" y="3749040"/>
+            <a:ext cx="1737360" cy="365760"/>
+          </a:xfrm>
+          <a:prstGeom prst="rect">
+            <a:avLst/>
+          </a:prstGeom>
+          <a:noFill/>
+          <a:ln/>
+        </p:spPr>
+        <p:txBody>
+          <a:bodyPr wrap="square" lIns="0" tIns="0" rIns="0" bIns="0" rtlCol="0" anchor="ctr"/>
+          <a:lstStyle/>
+          <a:p>
+            <a:pPr marL="0" indent="0" algn="ctr">
+              <a:buNone/>
+            </a:pPr>
+            <a:r>
+              <a:rPr lang="en-US" sz="1600" b="1" dirty="0">
+                <a:solidFill>
+                  <a:srgbClr val="FFFFFF"/>
+                </a:solidFill>
+              </a:rPr>
+              <a:t>&lt; 15ms</a:t>
+            </a:r>
+            <a:endParaRPr lang="en-US" sz="1600" dirty="0"/>
+          </a:p>
+        </p:txBody>
+      </p:sp>
+      <p:sp>
+        <p:nvSpPr>
+          <p:cNvPr id="13" name="Text 11"/>
+          <p:cNvSpPr/>
+          <p:nvPr/>
+        </p:nvSpPr>
+        <p:spPr>
+          <a:xfrm>
+            <a:off x="274320" y="4114800"/>
+            <a:ext cx="1737360" cy="320040"/>
+          </a:xfrm>
+          <a:prstGeom prst="rect">
+            <a:avLst/>
+          </a:prstGeom>
+          <a:noFill/>
+          <a:ln/>
+        </p:spPr>
+        <p:txBody>
+          <a:bodyPr wrap="square" lIns="0" tIns="0" rIns="0" bIns="0" rtlCol="0" anchor="ctr"/>
+          <a:lstStyle/>
+          <a:p>
+            <a:pPr marL="0" indent="0" algn="ctr">
+              <a:buNone/>
+            </a:pPr>
+            <a:r>
+              <a:rPr lang="en-US" sz="900" dirty="0">
+                <a:solidFill>
+                  <a:srgbClr val="7EA8E8"/>
+                </a:solidFill>
+              </a:rPr>
+              <a:t>p99 Lookup SLA</a:t>
+            </a:r>
+            <a:endParaRPr lang="en-US" sz="900" dirty="0"/>
+          </a:p>
+        </p:txBody>
+      </p:sp>
+      <p:sp>
+        <p:nvSpPr>
+          <p:cNvPr id="14" name="Shape 12"/>
+          <p:cNvSpPr/>
+          <p:nvPr/>
+        </p:nvSpPr>
+        <p:spPr>
+          <a:xfrm>
+            <a:off x="2194560" y="3657600"/>
+            <a:ext cx="1737360" cy="822960"/>
+          </a:xfrm>
+          <a:prstGeom prst="rect">
+            <a:avLst/>
+          </a:prstGeom>
+          <a:solidFill>
+            <a:srgbClr val="142050"/>
+          </a:solidFill>
+          <a:ln w="12700">
+            <a:solidFill>
+              <a:srgbClr val="2E75B6"/>
+            </a:solidFill>
+            <a:prstDash val="solid"/>
+          </a:ln>
+        </p:spPr>
+        <p:txBody>
+          <a:bodyPr/>
+          <a:lstStyle/>
+          <a:p>
+            <a:endParaRPr lang="LID4096"/>
+          </a:p>
+        </p:txBody>
+      </p:sp>
+      <p:sp>
+        <p:nvSpPr>
+          <p:cNvPr id="15" name="Shape 13"/>
+          <p:cNvSpPr/>
+          <p:nvPr/>
+        </p:nvSpPr>
+        <p:spPr>
+          <a:xfrm>
+            <a:off x="2194560" y="3657600"/>
+            <a:ext cx="1737360" cy="54864"/>
+          </a:xfrm>
+          <a:prstGeom prst="rect">
+            <a:avLst/>
+          </a:prstGeom>
+          <a:solidFill>
+            <a:srgbClr val="4FC3F7"/>
+          </a:solidFill>
+          <a:ln w="12700">
+            <a:solidFill>
+              <a:srgbClr val="4FC3F7"/>
+            </a:solidFill>
+            <a:prstDash val="solid"/>
+          </a:ln>
+        </p:spPr>
+        <p:txBody>
+          <a:bodyPr/>
+          <a:lstStyle/>
+          <a:p>
+            <a:endParaRPr lang="LID4096"/>
+          </a:p>
+        </p:txBody>
+      </p:sp>
+      <p:sp>
+        <p:nvSpPr>
+          <p:cNvPr id="16" name="Text 14"/>
+          <p:cNvSpPr/>
+          <p:nvPr/>
+        </p:nvSpPr>
+        <p:spPr>
+          <a:xfrm>
+            <a:off x="2194560" y="3749040"/>
+            <a:ext cx="1737360" cy="365760"/>
+          </a:xfrm>
+          <a:prstGeom prst="rect">
+            <a:avLst/>
+          </a:prstGeom>
+          <a:noFill/>
+          <a:ln/>
+        </p:spPr>
+        <p:txBody>
+          <a:bodyPr wrap="square" lIns="0" tIns="0" rIns="0" bIns="0" rtlCol="0" anchor="ctr"/>
+          <a:lstStyle/>
+          <a:p>
+            <a:pPr marL="0" indent="0" algn="ctr">
+              <a:buNone/>
+            </a:pPr>
+            <a:r>
+              <a:rPr lang="en-US" sz="1600" b="1" dirty="0">
+                <a:solidFill>
+                  <a:srgbClr val="FFFFFF"/>
+                </a:solidFill>
+              </a:rPr>
+              <a:t>100K+</a:t>
+            </a:r>
+            <a:endParaRPr lang="en-US" sz="1600" dirty="0"/>
+          </a:p>
+        </p:txBody>
+      </p:sp>
+      <p:sp>
+        <p:nvSpPr>
+          <p:cNvPr id="17" name="Text 15"/>
+          <p:cNvSpPr/>
+          <p:nvPr/>
+        </p:nvSpPr>
+        <p:spPr>
+          <a:xfrm>
+            <a:off x="2194560" y="4114800"/>
+            <a:ext cx="1737360" cy="320040"/>
+          </a:xfrm>
+          <a:prstGeom prst="rect">
+            <a:avLst/>
+          </a:prstGeom>
+          <a:noFill/>
+          <a:ln/>
+        </p:spPr>
+        <p:txBody>
+          <a:bodyPr wrap="square" lIns="0" tIns="0" rIns="0" bIns="0" rtlCol="0" anchor="ctr"/>
+          <a:lstStyle/>
+          <a:p>
+            <a:pPr marL="0" indent="0" algn="ctr">
+              <a:buNone/>
+            </a:pPr>
+            <a:r>
+              <a:rPr lang="en-US" sz="900" dirty="0">
+                <a:solidFill>
+                  <a:srgbClr val="7EA8E8"/>
+                </a:solidFill>
+              </a:rPr>
+              <a:t>Bulk Profiles/Job</a:t>
+            </a:r>
+            <a:endParaRPr lang="en-US" sz="900" dirty="0"/>
+          </a:p>
+        </p:txBody>
+      </p:sp>
+      <p:sp>
+        <p:nvSpPr>
+          <p:cNvPr id="18" name="Shape 16"/>
+          <p:cNvSpPr/>
+          <p:nvPr/>
+        </p:nvSpPr>
+        <p:spPr>
+          <a:xfrm>
+            <a:off x="4114800" y="3657600"/>
+            <a:ext cx="1737360" cy="822960"/>
+          </a:xfrm>
+          <a:prstGeom prst="rect">
+            <a:avLst/>
+          </a:prstGeom>
+          <a:solidFill>
+            <a:srgbClr val="142050"/>
+          </a:solidFill>
+          <a:ln w="12700">
+            <a:solidFill>
+              <a:srgbClr val="2E75B6"/>
+            </a:solidFill>
+            <a:prstDash val="solid"/>
+          </a:ln>
+        </p:spPr>
+        <p:txBody>
+          <a:bodyPr/>
+          <a:lstStyle/>
+          <a:p>
+            <a:endParaRPr lang="LID4096"/>
+          </a:p>
+        </p:txBody>
+      </p:sp>
+      <p:sp>
+        <p:nvSpPr>
+          <p:cNvPr id="19" name="Shape 17"/>
+          <p:cNvSpPr/>
+          <p:nvPr/>
+        </p:nvSpPr>
+        <p:spPr>
+          <a:xfrm>
+            <a:off x="4114800" y="3657600"/>
+            <a:ext cx="1737360" cy="54864"/>
+          </a:xfrm>
+          <a:prstGeom prst="rect">
+            <a:avLst/>
+          </a:prstGeom>
+          <a:solidFill>
+            <a:srgbClr val="4FC3F7"/>
+          </a:solidFill>
+          <a:ln w="12700">
+            <a:solidFill>
+              <a:srgbClr val="4FC3F7"/>
+            </a:solidFill>
+            <a:prstDash val="solid"/>
+          </a:ln>
+        </p:spPr>
+        <p:txBody>
+          <a:bodyPr/>
+          <a:lstStyle/>
+          <a:p>
+            <a:endParaRPr lang="LID4096"/>
+          </a:p>
+        </p:txBody>
+      </p:sp>
+      <p:sp>
+        <p:nvSpPr>
+          <p:cNvPr id="20" name="Text 18"/>
+          <p:cNvSpPr/>
+          <p:nvPr/>
+        </p:nvSpPr>
+        <p:spPr>
+          <a:xfrm>
+            <a:off x="4114800" y="3749040"/>
+            <a:ext cx="1737360" cy="365760"/>
+          </a:xfrm>
+          <a:prstGeom prst="rect">
+            <a:avLst/>
+          </a:prstGeom>
+          <a:noFill/>
+          <a:ln/>
+        </p:spPr>
+        <p:txBody>
+          <a:bodyPr wrap="square" lIns="0" tIns="0" rIns="0" bIns="0" rtlCol="0" anchor="ctr"/>
+          <a:lstStyle/>
+          <a:p>
+            <a:pPr marL="0" indent="0" algn="ctr">
+              <a:buNone/>
+            </a:pPr>
+            <a:r>
+              <a:rPr lang="en-US" sz="1600" b="1" dirty="0">
+                <a:solidFill>
+                  <a:srgbClr val="FFFFFF"/>
+                </a:solidFill>
+              </a:rPr>
+              <a:t>Multi-IMSI</a:t>
+            </a:r>
+            <a:endParaRPr lang="en-US" sz="1600" dirty="0"/>
+          </a:p>
+        </p:txBody>
+      </p:sp>
+      <p:sp>
+        <p:nvSpPr>
+          <p:cNvPr id="21" name="Text 19"/>
+          <p:cNvSpPr/>
+          <p:nvPr/>
+        </p:nvSpPr>
+        <p:spPr>
+          <a:xfrm>
+            <a:off x="4114800" y="4114800"/>
+            <a:ext cx="1737360" cy="320040"/>
+          </a:xfrm>
+          <a:prstGeom prst="rect">
+            <a:avLst/>
+          </a:prstGeom>
+          <a:noFill/>
+          <a:ln/>
+        </p:spPr>
+        <p:txBody>
+          <a:bodyPr wrap="square" lIns="0" tIns="0" rIns="0" bIns="0" rtlCol="0" anchor="ctr"/>
+          <a:lstStyle/>
+          <a:p>
+            <a:pPr marL="0" indent="0" algn="ctr">
+              <a:buNone/>
+            </a:pPr>
+            <a:r>
+              <a:rPr lang="en-US" sz="900" dirty="0">
+                <a:solidFill>
+                  <a:srgbClr val="7EA8E8"/>
+                </a:solidFill>
+              </a:rPr>
+              <a:t>Auto-Provisioning</a:t>
+            </a:r>
+            <a:endParaRPr lang="en-US" sz="900" dirty="0"/>
+          </a:p>
+        </p:txBody>
+      </p:sp>
+      <p:sp>
+        <p:nvSpPr>
+          <p:cNvPr id="22" name="Text 20"/>
+          <p:cNvSpPr/>
+          <p:nvPr/>
+        </p:nvSpPr>
+        <p:spPr>
+          <a:xfrm>
+            <a:off x="6766560" y="914400"/>
+            <a:ext cx="2194560" cy="320040"/>
+          </a:xfrm>
+          <a:prstGeom prst="rect">
+            <a:avLst/>
+          </a:prstGeom>
+          <a:noFill/>
+          <a:ln/>
+        </p:spPr>
+        <p:txBody>
+          <a:bodyPr wrap="square" lIns="0" tIns="0" rIns="0" bIns="0" rtlCol="0" anchor="ctr"/>
+          <a:lstStyle/>
+          <a:p>
+            <a:pPr marL="0" indent="0" algn="l">
+              <a:buNone/>
+            </a:pPr>
+            <a:r>
+              <a:rPr lang="en-US" sz="1200" i="1" dirty="0">
+                <a:solidFill>
+                  <a:srgbClr val="CADCFC"/>
+                </a:solidFill>
+              </a:rPr>
+              <a:t>C++17 / Drogon</a:t>
+            </a:r>
+            <a:endParaRPr lang="en-US" sz="1200" dirty="0"/>
+          </a:p>
+        </p:txBody>
+      </p:sp>
+      <p:sp>
+        <p:nvSpPr>
+          <p:cNvPr id="23" name="Shape 21"/>
+          <p:cNvSpPr/>
+          <p:nvPr/>
+        </p:nvSpPr>
+        <p:spPr>
+          <a:xfrm>
+            <a:off x="6675120" y="1074420"/>
+            <a:ext cx="73152" cy="0"/>
+          </a:xfrm>
+          <a:prstGeom prst="line">
+            <a:avLst/>
+          </a:prstGeom>
+          <a:noFill/>
+          <a:ln w="25400">
+            <a:solidFill>
+              <a:srgbClr val="4FC3F7"/>
+            </a:solidFill>
+            <a:prstDash val="solid"/>
+          </a:ln>
+        </p:spPr>
+        <p:txBody>
+          <a:bodyPr/>
+          <a:lstStyle/>
+          <a:p>
+            <a:endParaRPr lang="LID4096"/>
+          </a:p>
+        </p:txBody>
+      </p:sp>
+      <p:sp>
+        <p:nvSpPr>
+          <p:cNvPr id="24" name="Text 22"/>
+          <p:cNvSpPr/>
+          <p:nvPr/>
+        </p:nvSpPr>
+        <p:spPr>
+          <a:xfrm>
+            <a:off x="6766560" y="1481328"/>
+            <a:ext cx="2194560" cy="320040"/>
+          </a:xfrm>
+          <a:prstGeom prst="rect">
+            <a:avLst/>
+          </a:prstGeom>
+          <a:noFill/>
+          <a:ln/>
+        </p:spPr>
+        <p:txBody>
+          <a:bodyPr wrap="square" lIns="0" tIns="0" rIns="0" bIns="0" rtlCol="0" anchor="ctr"/>
+          <a:lstStyle/>
+          <a:p>
+            <a:pPr marL="0" indent="0" algn="l">
+              <a:buNone/>
+            </a:pPr>
+            <a:r>
+              <a:rPr lang="en-US" sz="1200" i="1" dirty="0">
+                <a:solidFill>
+                  <a:srgbClr val="CADCFC"/>
+                </a:solidFill>
+              </a:rPr>
+              <a:t>Python / FastAPI</a:t>
+            </a:r>
+            <a:endParaRPr lang="en-US" sz="1200" dirty="0"/>
+          </a:p>
+        </p:txBody>
+      </p:sp>
+      <p:sp>
+        <p:nvSpPr>
+          <p:cNvPr id="25" name="Shape 23"/>
+          <p:cNvSpPr/>
+          <p:nvPr/>
+        </p:nvSpPr>
+        <p:spPr>
+          <a:xfrm>
+            <a:off x="6675120" y="1641348"/>
+            <a:ext cx="73152" cy="0"/>
+          </a:xfrm>
+          <a:prstGeom prst="line">
+            <a:avLst/>
+          </a:prstGeom>
+          <a:noFill/>
+          <a:ln w="25400">
+            <a:solidFill>
+              <a:srgbClr val="4FC3F7"/>
+            </a:solidFill>
+            <a:prstDash val="solid"/>
+          </a:ln>
+        </p:spPr>
+        <p:txBody>
+          <a:bodyPr/>
+          <a:lstStyle/>
+          <a:p>
+            <a:endParaRPr lang="LID4096"/>
+          </a:p>
+        </p:txBody>
+      </p:sp>
+      <p:sp>
+        <p:nvSpPr>
+          <p:cNvPr id="26" name="Text 24"/>
+          <p:cNvSpPr/>
+          <p:nvPr/>
+        </p:nvSpPr>
+        <p:spPr>
+          <a:xfrm>
+            <a:off x="6766560" y="2048256"/>
+            <a:ext cx="2194560" cy="320040"/>
+          </a:xfrm>
+          <a:prstGeom prst="rect">
+            <a:avLst/>
+          </a:prstGeom>
+          <a:noFill/>
+          <a:ln/>
+        </p:spPr>
+        <p:txBody>
+          <a:bodyPr wrap="square" lIns="0" tIns="0" rIns="0" bIns="0" rtlCol="0" anchor="ctr"/>
+          <a:lstStyle/>
+          <a:p>
+            <a:pPr marL="0" indent="0" algn="l">
+              <a:buNone/>
+            </a:pPr>
+            <a:r>
+              <a:rPr lang="en-US" sz="1200" i="1" dirty="0">
+                <a:solidFill>
+                  <a:srgbClr val="CADCFC"/>
+                </a:solidFill>
+              </a:rPr>
+              <a:t>PostgreSQL 15</a:t>
+            </a:r>
+            <a:endParaRPr lang="en-US" sz="1200" dirty="0"/>
+          </a:p>
+        </p:txBody>
+      </p:sp>
+      <p:sp>
+        <p:nvSpPr>
+          <p:cNvPr id="27" name="Shape 25"/>
+          <p:cNvSpPr/>
+          <p:nvPr/>
+        </p:nvSpPr>
+        <p:spPr>
+          <a:xfrm>
+            <a:off x="6675120" y="2208276"/>
+            <a:ext cx="73152" cy="0"/>
+          </a:xfrm>
+          <a:prstGeom prst="line">
+            <a:avLst/>
+          </a:prstGeom>
+          <a:noFill/>
+          <a:ln w="25400">
+            <a:solidFill>
+              <a:srgbClr val="4FC3F7"/>
+            </a:solidFill>
+            <a:prstDash val="solid"/>
+          </a:ln>
+        </p:spPr>
+        <p:txBody>
+          <a:bodyPr/>
+          <a:lstStyle/>
+          <a:p>
+            <a:endParaRPr lang="LID4096"/>
+          </a:p>
+        </p:txBody>
+      </p:sp>
+      <p:sp>
+        <p:nvSpPr>
+          <p:cNvPr id="28" name="Text 26"/>
+          <p:cNvSpPr/>
+          <p:nvPr/>
+        </p:nvSpPr>
+        <p:spPr>
+          <a:xfrm>
+            <a:off x="6766560" y="2615184"/>
+            <a:ext cx="2194560" cy="320040"/>
+          </a:xfrm>
+          <a:prstGeom prst="rect">
+            <a:avLst/>
+          </a:prstGeom>
+          <a:noFill/>
+          <a:ln/>
+        </p:spPr>
+        <p:txBody>
+          <a:bodyPr wrap="square" lIns="0" tIns="0" rIns="0" bIns="0" rtlCol="0" anchor="ctr"/>
+          <a:lstStyle/>
+          <a:p>
+            <a:pPr marL="0" indent="0" algn="l">
+              <a:buNone/>
+            </a:pPr>
+            <a:r>
+              <a:rPr lang="en-US" sz="1200" i="1" dirty="0">
+                <a:solidFill>
+                  <a:srgbClr val="CADCFC"/>
+                </a:solidFill>
+              </a:rPr>
+              <a:t>Kubernetes / Helm</a:t>
+            </a:r>
+            <a:endParaRPr lang="en-US" sz="1200" dirty="0"/>
+          </a:p>
+        </p:txBody>
+      </p:sp>
+      <p:sp>
+        <p:nvSpPr>
+          <p:cNvPr id="29" name="Shape 27"/>
+          <p:cNvSpPr/>
+          <p:nvPr/>
+        </p:nvSpPr>
+        <p:spPr>
+          <a:xfrm>
+            <a:off x="6675120" y="2775204"/>
+            <a:ext cx="73152" cy="0"/>
+          </a:xfrm>
+          <a:prstGeom prst="line">
+            <a:avLst/>
+          </a:prstGeom>
+          <a:noFill/>
+          <a:ln w="25400">
+            <a:solidFill>
+              <a:srgbClr val="4FC3F7"/>
+            </a:solidFill>
+            <a:prstDash val="solid"/>
+          </a:ln>
+        </p:spPr>
+        <p:txBody>
+          <a:bodyPr/>
+          <a:lstStyle/>
+          <a:p>
+            <a:endParaRPr lang="LID4096"/>
+          </a:p>
+        </p:txBody>
+      </p:sp>
+      <p:sp>
+        <p:nvSpPr>
+          <p:cNvPr id="30" name="Text 28"/>
+          <p:cNvSpPr/>
+          <p:nvPr/>
+        </p:nvSpPr>
+        <p:spPr>
+          <a:xfrm>
+            <a:off x="6766560" y="3182112"/>
+            <a:ext cx="2194560" cy="320040"/>
+          </a:xfrm>
+          <a:prstGeom prst="rect">
+            <a:avLst/>
+          </a:prstGeom>
+          <a:noFill/>
+          <a:ln/>
+        </p:spPr>
+        <p:txBody>
+          <a:bodyPr wrap="square" lIns="0" tIns="0" rIns="0" bIns="0" rtlCol="0" anchor="ctr"/>
+          <a:lstStyle/>
+          <a:p>
+            <a:pPr marL="0" indent="0" algn="l">
+              <a:buNone/>
+            </a:pPr>
+            <a:r>
+              <a:rPr lang="en-US" sz="1200" i="1" dirty="0">
+                <a:solidFill>
+                  <a:srgbClr val="CADCFC"/>
+                </a:solidFill>
+              </a:rPr>
+              <a:t>Prometheus / Grafana</a:t>
+            </a:r>
+            <a:endParaRPr lang="en-US" sz="1200" dirty="0"/>
+          </a:p>
+        </p:txBody>
+      </p:sp>
+      <p:sp>
+        <p:nvSpPr>
+          <p:cNvPr id="31" name="Shape 29"/>
+          <p:cNvSpPr/>
+          <p:nvPr/>
+        </p:nvSpPr>
+        <p:spPr>
+          <a:xfrm>
+            <a:off x="6675120" y="3342132"/>
+            <a:ext cx="73152" cy="0"/>
+          </a:xfrm>
+          <a:prstGeom prst="line">
+            <a:avLst/>
+          </a:prstGeom>
+          <a:noFill/>
+          <a:ln w="25400">
+            <a:solidFill>
+              <a:srgbClr val="4FC3F7"/>
+            </a:solidFill>
+            <a:prstDash val="solid"/>
+          </a:ln>
+        </p:spPr>
+        <p:txBody>
+          <a:bodyPr/>
+          <a:lstStyle/>
+          <a:p>
+            <a:endParaRPr lang="LID4096"/>
+          </a:p>
+        </p:txBody>
+      </p:sp>
+    </p:spTree>
+  </p:cSld>
+  <p:clrMapOvr>
+    <a:masterClrMapping/>
+  </p:clrMapOvr>
+</p:sld>
+</file>
+
+<file path=ppt/slides/slide3.xml><?xml version="1.0" encoding="utf-8"?>
+<p:sld xmlns:a="http://schemas.openxmlformats.org/drawingml/2006/main" xmlns:r="http://schemas.openxmlformats.org/officeDocument/2006/relationships" xmlns:p="http://schemas.openxmlformats.org/presentationml/2006/main">
   <p:cSld name="Slide 17">
     <p:bg>
       <p:bgPr>
@@ -21344,7 +22864,7 @@
         </p:nvSpPr>
         <p:spPr>
           <a:xfrm>
-            <a:off x="160000" y="1210000"/>
+            <a:off x="150001" y="2913662"/>
             <a:ext cx="4280000" cy="580000"/>
           </a:xfrm>
           <a:prstGeom prst="rect">
@@ -21366,6 +22886,483 @@
                   <a:srgbClr val="F5A623"/>
                 </a:solidFill>
               </a:rPr>
+              <a:t>05  </a:t>
+            </a:r>
+            <a:r>
+              <a:rPr lang="en-US" sz="1100" b="1" dirty="0">
+                <a:solidFill>
+                  <a:srgbClr val="1E2761"/>
+                </a:solidFill>
+              </a:rPr>
+              <a:t>Horizontal Scale-Out Capabilities</a:t>
+            </a:r>
+          </a:p>
+          <a:p>
+            <a:pPr marL="457200" indent="0">
+              <a:buNone/>
+            </a:pPr>
+            <a:r>
+              <a:rPr lang="en-US" sz="950" dirty="0">
+                <a:solidFill>
+                  <a:srgbClr val="3C4D6B"/>
+                </a:solidFill>
+              </a:rPr>
+              <a:t>Add Lookup / API replicas with zero config changes; scales to millions of daily requests</a:t>
+            </a:r>
+          </a:p>
+        </p:txBody>
+      </p:sp>
+      <p:sp>
+        <p:nvSpPr>
+          <p:cNvPr id="8" name="Item4"/>
+          <p:cNvSpPr/>
+          <p:nvPr/>
+        </p:nvSpPr>
+        <p:spPr>
+          <a:xfrm>
+            <a:off x="4680000" y="676209"/>
+            <a:ext cx="4280000" cy="580000"/>
+          </a:xfrm>
+          <a:prstGeom prst="rect">
+            <a:avLst/>
+          </a:prstGeom>
+          <a:noFill/>
+          <a:ln/>
+        </p:spPr>
+        <p:txBody>
+          <a:bodyPr wrap="square" lIns="91440" tIns="45720" rIns="91440" bIns="45720" rtlCol="0" anchor="t"/>
+          <a:lstStyle/>
+          <a:p>
+            <a:pPr marL="0" indent="0">
+              <a:buNone/>
+            </a:pPr>
+            <a:r>
+              <a:rPr lang="en-US" sz="1100" b="1" dirty="0">
+                <a:solidFill>
+                  <a:srgbClr val="F5A623"/>
+                </a:solidFill>
+              </a:rPr>
+              <a:t>08  </a:t>
+            </a:r>
+            <a:r>
+              <a:rPr lang="en-US" sz="1100" b="1" dirty="0">
+                <a:solidFill>
+                  <a:srgbClr val="1E2761"/>
+                </a:solidFill>
+              </a:rPr>
+              <a:t>Deployable on OCI or On-Premises</a:t>
+            </a:r>
+          </a:p>
+          <a:p>
+            <a:pPr marL="457200" indent="0">
+              <a:buNone/>
+            </a:pPr>
+            <a:r>
+              <a:rPr lang="en-US" sz="950" dirty="0">
+                <a:solidFill>
+                  <a:srgbClr val="3C4D6B"/>
+                </a:solidFill>
+              </a:rPr>
+              <a:t>Helm-based; runs on OCI Kubernetes, on-premises clusters, or local k3d/k8s</a:t>
+            </a:r>
+          </a:p>
+        </p:txBody>
+      </p:sp>
+      <p:sp>
+        <p:nvSpPr>
+          <p:cNvPr id="9" name="Item5"/>
+          <p:cNvSpPr/>
+          <p:nvPr/>
+        </p:nvSpPr>
+        <p:spPr>
+          <a:xfrm>
+            <a:off x="4690000" y="2779070"/>
+            <a:ext cx="4280000" cy="860000"/>
+          </a:xfrm>
+          <a:prstGeom prst="rect">
+            <a:avLst/>
+          </a:prstGeom>
+          <a:noFill/>
+          <a:ln/>
+        </p:spPr>
+        <p:txBody>
+          <a:bodyPr wrap="square" lIns="91440" tIns="45720" rIns="91440" bIns="45720" rtlCol="0" anchor="t"/>
+          <a:lstStyle/>
+          <a:p>
+            <a:pPr marL="0" indent="0">
+              <a:buNone/>
+            </a:pPr>
+            <a:r>
+              <a:rPr lang="en-US" sz="1100" b="1" dirty="0">
+                <a:solidFill>
+                  <a:srgbClr val="F5A623"/>
+                </a:solidFill>
+              </a:rPr>
+              <a:t>11  </a:t>
+            </a:r>
+            <a:r>
+              <a:rPr lang="en-US" sz="1100" b="1" dirty="0">
+                <a:solidFill>
+                  <a:srgbClr val="1E2761"/>
+                </a:solidFill>
+              </a:rPr>
+              <a:t>~500 Regression Tests on K8s</a:t>
+            </a:r>
+          </a:p>
+          <a:p>
+            <a:pPr marL="457200" indent="0">
+              <a:buNone/>
+            </a:pPr>
+            <a:r>
+              <a:rPr lang="en-US" sz="900" dirty="0">
+                <a:solidFill>
+                  <a:srgbClr val="3C4D6B"/>
+                </a:solidFill>
+              </a:rPr>
+              <a:t>a)  Runs on K8s CI; deployable as dedicated pod on pre-production environment</a:t>
+            </a:r>
+          </a:p>
+          <a:p>
+            <a:pPr marL="457200" indent="0">
+              <a:buNone/>
+            </a:pPr>
+            <a:r>
+              <a:rPr lang="en-US" sz="900" dirty="0">
+                <a:solidFill>
+                  <a:srgbClr val="3C4D6B"/>
+                </a:solidFill>
+              </a:rPr>
+              <a:t>b)  CPU &amp; RAM requirements documented per container image</a:t>
+            </a:r>
+          </a:p>
+        </p:txBody>
+      </p:sp>
+      <p:sp>
+        <p:nvSpPr>
+          <p:cNvPr id="10" name="Item6"/>
+          <p:cNvSpPr/>
+          <p:nvPr/>
+        </p:nvSpPr>
+        <p:spPr>
+          <a:xfrm>
+            <a:off x="150001" y="3569919"/>
+            <a:ext cx="4280000" cy="580000"/>
+          </a:xfrm>
+          <a:prstGeom prst="rect">
+            <a:avLst/>
+          </a:prstGeom>
+          <a:noFill/>
+          <a:ln/>
+        </p:spPr>
+        <p:txBody>
+          <a:bodyPr wrap="square" lIns="91440" tIns="45720" rIns="91440" bIns="45720" rtlCol="0" anchor="t"/>
+          <a:lstStyle/>
+          <a:p>
+            <a:pPr marL="0" indent="0">
+              <a:buNone/>
+            </a:pPr>
+            <a:r>
+              <a:rPr lang="en-US" sz="1100" b="1" dirty="0">
+                <a:solidFill>
+                  <a:srgbClr val="F5A623"/>
+                </a:solidFill>
+              </a:rPr>
+              <a:t>06  </a:t>
+            </a:r>
+            <a:r>
+              <a:rPr lang="en-US" sz="1100" b="1" dirty="0">
+                <a:solidFill>
+                  <a:srgbClr val="1E2761"/>
+                </a:solidFill>
+              </a:rPr>
+              <a:t>Dedicated Load-Test Pod</a:t>
+            </a:r>
+          </a:p>
+          <a:p>
+            <a:pPr marL="457200" indent="0">
+              <a:buNone/>
+            </a:pPr>
+            <a:r>
+              <a:rPr lang="en-US" sz="950" dirty="0">
+                <a:solidFill>
+                  <a:srgbClr val="3C4D6B"/>
+                </a:solidFill>
+              </a:rPr>
+              <a:t>Isolated performance-testing workload with configurable concurrency and traffic targets</a:t>
+            </a:r>
+          </a:p>
+        </p:txBody>
+      </p:sp>
+      <p:sp>
+        <p:nvSpPr>
+          <p:cNvPr id="11" name="Item7"/>
+          <p:cNvSpPr/>
+          <p:nvPr/>
+        </p:nvSpPr>
+        <p:spPr>
+          <a:xfrm>
+            <a:off x="120002" y="1760000"/>
+            <a:ext cx="4300000" cy="580000"/>
+          </a:xfrm>
+          <a:prstGeom prst="rect">
+            <a:avLst/>
+          </a:prstGeom>
+          <a:noFill/>
+          <a:ln/>
+        </p:spPr>
+        <p:txBody>
+          <a:bodyPr wrap="square" lIns="91440" tIns="45720" rIns="91440" bIns="45720" rtlCol="0" anchor="t"/>
+          <a:lstStyle/>
+          <a:p>
+            <a:pPr marL="0" indent="0">
+              <a:buNone/>
+            </a:pPr>
+            <a:r>
+              <a:rPr lang="en-US" sz="1100" b="1" dirty="0">
+                <a:solidFill>
+                  <a:srgbClr val="F5A623"/>
+                </a:solidFill>
+              </a:rPr>
+              <a:t>03  </a:t>
+            </a:r>
+            <a:r>
+              <a:rPr lang="en-US" sz="1100" b="1" dirty="0">
+                <a:solidFill>
+                  <a:srgbClr val="1E2761"/>
+                </a:solidFill>
+              </a:rPr>
+              <a:t>Routing Domain support</a:t>
+            </a:r>
+          </a:p>
+          <a:p>
+            <a:pPr marL="457200" indent="0">
+              <a:buNone/>
+            </a:pPr>
+            <a:r>
+              <a:rPr lang="en-US" sz="950" dirty="0">
+                <a:solidFill>
+                  <a:srgbClr val="3C4D6B"/>
+                </a:solidFill>
+              </a:rPr>
+              <a:t>Per </a:t>
+            </a:r>
+            <a:r>
+              <a:rPr lang="en-US" sz="950" dirty="0" err="1">
+                <a:solidFill>
+                  <a:srgbClr val="3C4D6B"/>
+                </a:solidFill>
+              </a:rPr>
+              <a:t>vDOM</a:t>
+            </a:r>
+            <a:r>
+              <a:rPr lang="en-US" sz="950" dirty="0">
+                <a:solidFill>
+                  <a:srgbClr val="3C4D6B"/>
+                </a:solidFill>
+              </a:rPr>
+              <a:t>, Per Gi interface routing-domain</a:t>
+            </a:r>
+          </a:p>
+        </p:txBody>
+      </p:sp>
+      <p:sp>
+        <p:nvSpPr>
+          <p:cNvPr id="12" name="Item8"/>
+          <p:cNvSpPr/>
+          <p:nvPr/>
+        </p:nvSpPr>
+        <p:spPr>
+          <a:xfrm>
+            <a:off x="160000" y="2375000"/>
+            <a:ext cx="4300000" cy="580000"/>
+          </a:xfrm>
+          <a:prstGeom prst="rect">
+            <a:avLst/>
+          </a:prstGeom>
+          <a:noFill/>
+          <a:ln/>
+        </p:spPr>
+        <p:txBody>
+          <a:bodyPr wrap="square" lIns="91440" tIns="45720" rIns="91440" bIns="45720" rtlCol="0" anchor="t"/>
+          <a:lstStyle/>
+          <a:p>
+            <a:pPr marL="0" indent="0">
+              <a:buNone/>
+            </a:pPr>
+            <a:r>
+              <a:rPr lang="en-US" sz="1100" b="1" dirty="0">
+                <a:solidFill>
+                  <a:srgbClr val="F5A623"/>
+                </a:solidFill>
+              </a:rPr>
+              <a:t>04  </a:t>
+            </a:r>
+            <a:r>
+              <a:rPr lang="en-US" sz="1100" b="1" dirty="0">
+                <a:solidFill>
+                  <a:srgbClr val="1E2761"/>
+                </a:solidFill>
+              </a:rPr>
+              <a:t>Different Static IP par APN (also PGW with vAPN)</a:t>
+            </a:r>
+          </a:p>
+          <a:p>
+            <a:pPr marL="457200" indent="0">
+              <a:buNone/>
+            </a:pPr>
+            <a:r>
+              <a:rPr lang="en-US" sz="950" dirty="0">
+                <a:solidFill>
+                  <a:srgbClr val="3C4D6B"/>
+                </a:solidFill>
+              </a:rPr>
+              <a:t>Allow support GR with semi static IP (without BGP)</a:t>
+            </a:r>
+          </a:p>
+        </p:txBody>
+      </p:sp>
+      <p:sp>
+        <p:nvSpPr>
+          <p:cNvPr id="13" name="Item9"/>
+          <p:cNvSpPr/>
+          <p:nvPr/>
+        </p:nvSpPr>
+        <p:spPr>
+          <a:xfrm>
+            <a:off x="4680000" y="1405570"/>
+            <a:ext cx="4300000" cy="580000"/>
+          </a:xfrm>
+          <a:prstGeom prst="rect">
+            <a:avLst/>
+          </a:prstGeom>
+          <a:noFill/>
+          <a:ln/>
+        </p:spPr>
+        <p:txBody>
+          <a:bodyPr wrap="square" lIns="91440" tIns="45720" rIns="91440" bIns="45720" rtlCol="0" anchor="t"/>
+          <a:lstStyle/>
+          <a:p>
+            <a:pPr marL="0" indent="0">
+              <a:buNone/>
+            </a:pPr>
+            <a:r>
+              <a:rPr lang="en-US" sz="1100" b="1" dirty="0">
+                <a:solidFill>
+                  <a:srgbClr val="F5A623"/>
+                </a:solidFill>
+              </a:rPr>
+              <a:t>09  </a:t>
+            </a:r>
+            <a:r>
+              <a:rPr lang="en-US" sz="1100" b="1" dirty="0">
+                <a:solidFill>
+                  <a:srgbClr val="1E2761"/>
+                </a:solidFill>
+              </a:rPr>
+              <a:t>Out-of-the-Box Prometheus Alerting</a:t>
+            </a:r>
+          </a:p>
+          <a:p>
+            <a:pPr marL="457200" indent="0">
+              <a:buNone/>
+            </a:pPr>
+            <a:r>
+              <a:rPr lang="en-US" sz="950" dirty="0">
+                <a:solidFill>
+                  <a:srgbClr val="3C4D6B"/>
+                </a:solidFill>
+              </a:rPr>
+              <a:t>Pre-built alert rules for p99 SLA breach, pool exhaustion, and DB health</a:t>
+            </a:r>
+          </a:p>
+        </p:txBody>
+      </p:sp>
+      <p:sp>
+        <p:nvSpPr>
+          <p:cNvPr id="14" name="Item10"/>
+          <p:cNvSpPr/>
+          <p:nvPr/>
+        </p:nvSpPr>
+        <p:spPr>
+          <a:xfrm>
+            <a:off x="4639999" y="2057744"/>
+            <a:ext cx="4300000" cy="580000"/>
+          </a:xfrm>
+          <a:prstGeom prst="rect">
+            <a:avLst/>
+          </a:prstGeom>
+          <a:noFill/>
+          <a:ln/>
+        </p:spPr>
+        <p:txBody>
+          <a:bodyPr wrap="square" lIns="91440" tIns="45720" rIns="91440" bIns="45720" rtlCol="0" anchor="t"/>
+          <a:lstStyle/>
+          <a:p>
+            <a:pPr marL="0" indent="0">
+              <a:buNone/>
+            </a:pPr>
+            <a:r>
+              <a:rPr lang="en-US" sz="1100" b="1" dirty="0">
+                <a:solidFill>
+                  <a:srgbClr val="F5A623"/>
+                </a:solidFill>
+              </a:rPr>
+              <a:t>10  </a:t>
+            </a:r>
+            <a:r>
+              <a:rPr lang="en-US" sz="1100" b="1" dirty="0">
+                <a:solidFill>
+                  <a:srgbClr val="1E2761"/>
+                </a:solidFill>
+              </a:rPr>
+              <a:t>Out-of-the-Box Grafana Dashboards</a:t>
+            </a:r>
+          </a:p>
+          <a:p>
+            <a:pPr marL="457200" indent="0">
+              <a:buNone/>
+            </a:pPr>
+            <a:r>
+              <a:rPr lang="en-US" sz="950" dirty="0">
+                <a:solidFill>
+                  <a:srgbClr val="3C4D6B"/>
+                </a:solidFill>
+              </a:rPr>
+              <a:t>Pre-built charts for lookup latency, request throughput, and pool utilization</a:t>
+            </a:r>
+          </a:p>
+        </p:txBody>
+      </p:sp>
+      <p:sp>
+        <p:nvSpPr>
+          <p:cNvPr id="15" name="Item11"/>
+          <p:cNvSpPr/>
+          <p:nvPr/>
+        </p:nvSpPr>
+        <p:spPr>
+          <a:xfrm>
+            <a:off x="130001" y="1190000"/>
+            <a:ext cx="4300000" cy="580000"/>
+          </a:xfrm>
+          <a:prstGeom prst="rect">
+            <a:avLst/>
+          </a:prstGeom>
+          <a:noFill/>
+          <a:ln/>
+        </p:spPr>
+        <p:txBody>
+          <a:bodyPr wrap="square" lIns="91440" tIns="45720" rIns="91440" bIns="45720" rtlCol="0" anchor="t"/>
+          <a:lstStyle/>
+          <a:p>
+            <a:pPr marL="0" indent="0">
+              <a:buNone/>
+            </a:pPr>
+            <a:r>
+              <a:rPr lang="en-US" sz="1100" b="1" dirty="0">
+                <a:solidFill>
+                  <a:srgbClr val="F5A623"/>
+                </a:solidFill>
+              </a:rPr>
               <a:t>02  </a:t>
             </a:r>
             <a:r>
@@ -21374,7 +23371,7 @@
                   <a:srgbClr val="1E2761"/>
                 </a:solidFill>
               </a:rPr>
-              <a:t>Horizontal Scale-Out Capabilities</a:t>
+              <a:t>Auto Static-IP for All SIM Types</a:t>
             </a:r>
           </a:p>
           <a:p>
@@ -21387,20 +23384,76 @@
                   <a:srgbClr val="3C4D6B"/>
                 </a:solidFill>
               </a:rPr>
-              <a:t>Add Lookup / API replicas with zero config changes; scales to millions of daily requests</a:t>
-            </a:r>
-          </a:p>
-        </p:txBody>
-      </p:sp>
-      <p:sp>
-        <p:nvSpPr>
-          <p:cNvPr id="7" name="Item3"/>
-          <p:cNvSpPr/>
-          <p:nvPr/>
-        </p:nvSpPr>
-        <p:spPr>
-          <a:xfrm>
-            <a:off x="160000" y="1800000"/>
+              <a:t>Supports imsi / imsi_apn / iccid / iccid_apn modes with full auto-configuration</a:t>
+            </a:r>
+          </a:p>
+        </p:txBody>
+      </p:sp>
+      <p:sp>
+        <p:nvSpPr>
+          <p:cNvPr id="16" name="Item12"/>
+          <p:cNvSpPr/>
+          <p:nvPr/>
+        </p:nvSpPr>
+        <p:spPr>
+          <a:xfrm>
+            <a:off x="4710000" y="3576002"/>
+            <a:ext cx="4300000" cy="580000"/>
+          </a:xfrm>
+          <a:prstGeom prst="rect">
+            <a:avLst/>
+          </a:prstGeom>
+          <a:noFill/>
+          <a:ln/>
+        </p:spPr>
+        <p:txBody>
+          <a:bodyPr wrap="square" lIns="91440" tIns="45720" rIns="91440" bIns="45720" rtlCol="0" anchor="t"/>
+          <a:lstStyle/>
+          <a:p>
+            <a:pPr marL="0" indent="0">
+              <a:buNone/>
+            </a:pPr>
+            <a:r>
+              <a:rPr lang="en-US" sz="1100" b="1" dirty="0">
+                <a:solidFill>
+                  <a:srgbClr val="F5A623"/>
+                </a:solidFill>
+              </a:rPr>
+              <a:t>12  </a:t>
+            </a:r>
+            <a:r>
+              <a:rPr lang="en-US" sz="1100" b="1" dirty="0">
+                <a:solidFill>
+                  <a:srgbClr val="1E2761"/>
+                </a:solidFill>
+              </a:rPr>
+              <a:t>Helm Charts for Kubernetes Deployment</a:t>
+            </a:r>
+          </a:p>
+          <a:p>
+            <a:pPr marL="457200" indent="0">
+              <a:buNone/>
+            </a:pPr>
+            <a:r>
+              <a:rPr lang="en-US" sz="950" dirty="0">
+                <a:solidFill>
+                  <a:srgbClr val="3C4D6B"/>
+                </a:solidFill>
+              </a:rPr>
+              <a:t>CPU &amp; RAM requests and limits defined per container; reproducible k8s deployments</a:t>
+            </a:r>
+          </a:p>
+        </p:txBody>
+      </p:sp>
+      <p:sp>
+        <p:nvSpPr>
+          <p:cNvPr id="17" name="Item13"/>
+          <p:cNvSpPr/>
+          <p:nvPr/>
+        </p:nvSpPr>
+        <p:spPr>
+          <a:xfrm>
+            <a:off x="120002" y="4281871"/>
             <a:ext cx="4280000" cy="580000"/>
           </a:xfrm>
           <a:prstGeom prst="rect">
@@ -21422,7 +23475,7 @@
                   <a:srgbClr val="F5A623"/>
                 </a:solidFill>
               </a:rPr>
-              <a:t>03  </a:t>
+              <a:t>07  </a:t>
             </a:r>
             <a:r>
               <a:rPr lang="en-US" sz="1100" b="1" dirty="0">
@@ -21430,7 +23483,7 @@
                   <a:srgbClr val="1E2761"/>
                 </a:solidFill>
               </a:rPr>
-              <a:t>One UI for All</a:t>
+              <a:t>Multi-Region &amp; Multi-AZ Support</a:t>
             </a:r>
           </a:p>
           <a:p>
@@ -21443,21 +23496,27 @@
                   <a:srgbClr val="3C4D6B"/>
                 </a:solidFill>
               </a:rPr>
-              <a:t>Unified management portal for subscriber, pool, range-config, and bulk-job management</a:t>
-            </a:r>
-          </a:p>
-        </p:txBody>
-      </p:sp>
-      <p:sp>
-        <p:nvSpPr>
-          <p:cNvPr id="8" name="Item4"/>
-          <p:cNvSpPr/>
-          <p:nvPr/>
-        </p:nvSpPr>
-        <p:spPr>
-          <a:xfrm>
-            <a:off x="160000" y="2390000"/>
-            <a:ext cx="4280000" cy="580000"/>
+              <a:t>Scales independently per-region and per-availability-zone; survives zone failures</a:t>
+            </a:r>
+          </a:p>
+        </p:txBody>
+      </p:sp>
+      <p:sp>
+        <p:nvSpPr>
+          <p:cNvPr id="18" name="Item12">
+            <a:extLst>
+              <a:ext uri="{FF2B5EF4-FFF2-40B4-BE49-F238E27FC236}">
+                <a16:creationId xmlns:a16="http://schemas.microsoft.com/office/drawing/2014/main" id="{F0539C8D-121F-F3B5-2EE7-2E9F2F74DBCD}"/>
+              </a:ext>
+            </a:extLst>
+          </p:cNvPr>
+          <p:cNvSpPr/>
+          <p:nvPr/>
+        </p:nvSpPr>
+        <p:spPr>
+          <a:xfrm>
+            <a:off x="4723998" y="4202110"/>
+            <a:ext cx="4300000" cy="580000"/>
           </a:xfrm>
           <a:prstGeom prst="rect">
             <a:avLst/>
@@ -21478,7 +23537,7 @@
                   <a:srgbClr val="F5A623"/>
                 </a:solidFill>
               </a:rPr>
-              <a:t>04  </a:t>
+              <a:t>13  </a:t>
             </a:r>
             <a:r>
               <a:rPr lang="en-US" sz="1100" b="1" dirty="0">
@@ -21486,538 +23545,29 @@
                   <a:srgbClr val="1E2761"/>
                 </a:solidFill>
               </a:rPr>
-              <a:t>Deployable on OCI or On-Premises</a:t>
+              <a:t>Single API for CMP self service</a:t>
+            </a:r>
+          </a:p>
+          <a:p>
+            <a:pPr marL="457200"/>
+            <a:r>
+              <a:rPr lang="en-US" sz="950" dirty="0">
+                <a:solidFill>
+                  <a:srgbClr val="3C4D6B"/>
+                </a:solidFill>
+              </a:rPr>
+              <a:t>CMP can provision static IP for all IMSIs with single API, Unified management for subscriber, pool, range-config, and bulk-job management</a:t>
             </a:r>
           </a:p>
           <a:p>
             <a:pPr marL="457200" indent="0">
               <a:buNone/>
             </a:pPr>
-            <a:r>
-              <a:rPr lang="en-US" sz="950" dirty="0">
-                <a:solidFill>
-                  <a:srgbClr val="3C4D6B"/>
-                </a:solidFill>
-              </a:rPr>
-              <a:t>Helm-based; runs on OCI Kubernetes, on-premises clusters, or local k3d/k8s</a:t>
-            </a:r>
-          </a:p>
-        </p:txBody>
-      </p:sp>
-      <p:sp>
-        <p:nvSpPr>
-          <p:cNvPr id="9" name="Item5"/>
-          <p:cNvSpPr/>
-          <p:nvPr/>
-        </p:nvSpPr>
-        <p:spPr>
-          <a:xfrm>
-            <a:off x="160000" y="2980000"/>
-            <a:ext cx="4280000" cy="860000"/>
-          </a:xfrm>
-          <a:prstGeom prst="rect">
-            <a:avLst/>
-          </a:prstGeom>
-          <a:noFill/>
-          <a:ln/>
-        </p:spPr>
-        <p:txBody>
-          <a:bodyPr wrap="square" lIns="91440" tIns="45720" rIns="91440" bIns="45720" rtlCol="0" anchor="t"/>
-          <a:lstStyle/>
-          <a:p>
-            <a:pPr marL="0" indent="0">
-              <a:buNone/>
-            </a:pPr>
-            <a:r>
-              <a:rPr lang="en-US" sz="1100" b="1" dirty="0">
-                <a:solidFill>
-                  <a:srgbClr val="F5A623"/>
-                </a:solidFill>
-              </a:rPr>
-              <a:t>05  </a:t>
-            </a:r>
-            <a:r>
-              <a:rPr lang="en-US" sz="1100" b="1" dirty="0">
-                <a:solidFill>
-                  <a:srgbClr val="1E2761"/>
-                </a:solidFill>
-              </a:rPr>
-              <a:t>~300 Regression Tests on K8s</a:t>
-            </a:r>
-          </a:p>
-          <a:p>
-            <a:pPr marL="457200" indent="0">
-              <a:buNone/>
-            </a:pPr>
-            <a:r>
-              <a:rPr lang="en-US" sz="900" dirty="0">
-                <a:solidFill>
-                  <a:srgbClr val="3C4D6B"/>
-                </a:solidFill>
-              </a:rPr>
-              <a:t>a)  Runs on K8s CI; deployable as dedicated pod on pre-production environment</a:t>
-            </a:r>
-          </a:p>
-          <a:p>
-            <a:pPr marL="457200" indent="0">
-              <a:buNone/>
-            </a:pPr>
-            <a:r>
-              <a:rPr lang="en-US" sz="900" dirty="0">
-                <a:solidFill>
-                  <a:srgbClr val="3C4D6B"/>
-                </a:solidFill>
-              </a:rPr>
-              <a:t>b)  CPU &amp; RAM requirements documented per container image</a:t>
-            </a:r>
-          </a:p>
-        </p:txBody>
-      </p:sp>
-      <p:sp>
-        <p:nvSpPr>
-          <p:cNvPr id="10" name="Item6"/>
-          <p:cNvSpPr/>
-          <p:nvPr/>
-        </p:nvSpPr>
-        <p:spPr>
-          <a:xfrm>
-            <a:off x="160000" y="3850000"/>
-            <a:ext cx="4280000" cy="580000"/>
-          </a:xfrm>
-          <a:prstGeom prst="rect">
-            <a:avLst/>
-          </a:prstGeom>
-          <a:noFill/>
-          <a:ln/>
-        </p:spPr>
-        <p:txBody>
-          <a:bodyPr wrap="square" lIns="91440" tIns="45720" rIns="91440" bIns="45720" rtlCol="0" anchor="t"/>
-          <a:lstStyle/>
-          <a:p>
-            <a:pPr marL="0" indent="0">
-              <a:buNone/>
-            </a:pPr>
-            <a:r>
-              <a:rPr lang="en-US" sz="1100" b="1" dirty="0">
-                <a:solidFill>
-                  <a:srgbClr val="F5A623"/>
-                </a:solidFill>
-              </a:rPr>
-              <a:t>06  </a:t>
-            </a:r>
-            <a:r>
-              <a:rPr lang="en-US" sz="1100" b="1" dirty="0">
-                <a:solidFill>
-                  <a:srgbClr val="1E2761"/>
-                </a:solidFill>
-              </a:rPr>
-              <a:t>Dedicated Load-Test Pod</a:t>
-            </a:r>
-          </a:p>
-          <a:p>
-            <a:pPr marL="457200" indent="0">
-              <a:buNone/>
-            </a:pPr>
-            <a:r>
-              <a:rPr lang="en-US" sz="950" dirty="0">
-                <a:solidFill>
-                  <a:srgbClr val="3C4D6B"/>
-                </a:solidFill>
-              </a:rPr>
-              <a:t>Isolated performance-testing workload with configurable concurrency and traffic targets</a:t>
-            </a:r>
-          </a:p>
-        </p:txBody>
-      </p:sp>
-      <p:sp>
-        <p:nvSpPr>
-          <p:cNvPr id="11" name="Item7"/>
-          <p:cNvSpPr/>
-          <p:nvPr/>
-        </p:nvSpPr>
-        <p:spPr>
-          <a:xfrm>
-            <a:off x="4700000" y="620000"/>
-            <a:ext cx="4300000" cy="580000"/>
-          </a:xfrm>
-          <a:prstGeom prst="rect">
-            <a:avLst/>
-          </a:prstGeom>
-          <a:noFill/>
-          <a:ln/>
-        </p:spPr>
-        <p:txBody>
-          <a:bodyPr wrap="square" lIns="91440" tIns="45720" rIns="91440" bIns="45720" rtlCol="0" anchor="t"/>
-          <a:lstStyle/>
-          <a:p>
-            <a:pPr marL="0" indent="0">
-              <a:buNone/>
-            </a:pPr>
-            <a:r>
-              <a:rPr lang="en-US" sz="1100" b="1" dirty="0">
-                <a:solidFill>
-                  <a:srgbClr val="F5A623"/>
-                </a:solidFill>
-              </a:rPr>
-              <a:t>07  </a:t>
-            </a:r>
-            <a:r>
-              <a:rPr lang="en-US" sz="1100" b="1" dirty="0">
-                <a:solidFill>
-                  <a:srgbClr val="1E2761"/>
-                </a:solidFill>
-              </a:rPr>
-              <a:t>IP Pool Management by Routing Domain</a:t>
-            </a:r>
-          </a:p>
-          <a:p>
-            <a:pPr marL="457200" indent="0">
-              <a:buNone/>
-            </a:pPr>
-            <a:r>
-              <a:rPr lang="en-US" sz="950" dirty="0">
-                <a:solidFill>
-                  <a:srgbClr val="3C4D6B"/>
-                </a:solidFill>
-              </a:rPr>
-              <a:t>Per-APN and per-domain pools with race-safe SKIP LOCKED allocation</a:t>
-            </a:r>
-          </a:p>
-        </p:txBody>
-      </p:sp>
-      <p:sp>
-        <p:nvSpPr>
-          <p:cNvPr id="12" name="Item8"/>
-          <p:cNvSpPr/>
-          <p:nvPr/>
-        </p:nvSpPr>
-        <p:spPr>
-          <a:xfrm>
-            <a:off x="4700000" y="1310000"/>
-            <a:ext cx="4300000" cy="580000"/>
-          </a:xfrm>
-          <a:prstGeom prst="rect">
-            <a:avLst/>
-          </a:prstGeom>
-          <a:noFill/>
-          <a:ln/>
-        </p:spPr>
-        <p:txBody>
-          <a:bodyPr wrap="square" lIns="91440" tIns="45720" rIns="91440" bIns="45720" rtlCol="0" anchor="t"/>
-          <a:lstStyle/>
-          <a:p>
-            <a:pPr marL="0" indent="0">
-              <a:buNone/>
-            </a:pPr>
-            <a:r>
-              <a:rPr lang="en-US" sz="1100" b="1" dirty="0">
-                <a:solidFill>
-                  <a:srgbClr val="F5A623"/>
-                </a:solidFill>
-              </a:rPr>
-              <a:t>08  </a:t>
-            </a:r>
-            <a:r>
-              <a:rPr lang="en-US" sz="1100" b="1" dirty="0">
-                <a:solidFill>
-                  <a:srgbClr val="1E2761"/>
-                </a:solidFill>
-              </a:rPr>
-              <a:t>Native Prometheus Integration</a:t>
-            </a:r>
-          </a:p>
-          <a:p>
-            <a:pPr marL="457200" indent="0">
-              <a:buNone/>
-            </a:pPr>
-            <a:r>
-              <a:rPr lang="en-US" sz="950" dirty="0">
-                <a:solidFill>
-                  <a:srgbClr val="3C4D6B"/>
-                </a:solidFill>
-              </a:rPr>
-              <a:t>Metrics scraped natively from all services; no adapters or sidecars required</a:t>
-            </a:r>
-          </a:p>
-        </p:txBody>
-      </p:sp>
-      <p:sp>
-        <p:nvSpPr>
-          <p:cNvPr id="13" name="Item9"/>
-          <p:cNvSpPr/>
-          <p:nvPr/>
-        </p:nvSpPr>
-        <p:spPr>
-          <a:xfrm>
-            <a:off x="4700000" y="2000000"/>
-            <a:ext cx="4300000" cy="580000"/>
-          </a:xfrm>
-          <a:prstGeom prst="rect">
-            <a:avLst/>
-          </a:prstGeom>
-          <a:noFill/>
-          <a:ln/>
-        </p:spPr>
-        <p:txBody>
-          <a:bodyPr wrap="square" lIns="91440" tIns="45720" rIns="91440" bIns="45720" rtlCol="0" anchor="t"/>
-          <a:lstStyle/>
-          <a:p>
-            <a:pPr marL="0" indent="0">
-              <a:buNone/>
-            </a:pPr>
-            <a:r>
-              <a:rPr lang="en-US" sz="1100" b="1" dirty="0">
-                <a:solidFill>
-                  <a:srgbClr val="F5A623"/>
-                </a:solidFill>
-              </a:rPr>
-              <a:t>09  </a:t>
-            </a:r>
-            <a:r>
-              <a:rPr lang="en-US" sz="1100" b="1" dirty="0">
-                <a:solidFill>
-                  <a:srgbClr val="1E2761"/>
-                </a:solidFill>
-              </a:rPr>
-              <a:t>Out-of-the-Box Prometheus Alerting</a:t>
-            </a:r>
-          </a:p>
-          <a:p>
-            <a:pPr marL="457200" indent="0">
-              <a:buNone/>
-            </a:pPr>
-            <a:r>
-              <a:rPr lang="en-US" sz="950" dirty="0">
-                <a:solidFill>
-                  <a:srgbClr val="3C4D6B"/>
-                </a:solidFill>
-              </a:rPr>
-              <a:t>Pre-built alert rules for p99 SLA breach, pool exhaustion, and DB health</a:t>
-            </a:r>
-          </a:p>
-        </p:txBody>
-      </p:sp>
-      <p:sp>
-        <p:nvSpPr>
-          <p:cNvPr id="14" name="Item10"/>
-          <p:cNvSpPr/>
-          <p:nvPr/>
-        </p:nvSpPr>
-        <p:spPr>
-          <a:xfrm>
-            <a:off x="4700000" y="2690000"/>
-            <a:ext cx="4300000" cy="580000"/>
-          </a:xfrm>
-          <a:prstGeom prst="rect">
-            <a:avLst/>
-          </a:prstGeom>
-          <a:noFill/>
-          <a:ln/>
-        </p:spPr>
-        <p:txBody>
-          <a:bodyPr wrap="square" lIns="91440" tIns="45720" rIns="91440" bIns="45720" rtlCol="0" anchor="t"/>
-          <a:lstStyle/>
-          <a:p>
-            <a:pPr marL="0" indent="0">
-              <a:buNone/>
-            </a:pPr>
-            <a:r>
-              <a:rPr lang="en-US" sz="1100" b="1" dirty="0">
-                <a:solidFill>
-                  <a:srgbClr val="F5A623"/>
-                </a:solidFill>
-              </a:rPr>
-              <a:t>10  </a:t>
-            </a:r>
-            <a:r>
-              <a:rPr lang="en-US" sz="1100" b="1" dirty="0">
-                <a:solidFill>
-                  <a:srgbClr val="1E2761"/>
-                </a:solidFill>
-              </a:rPr>
-              <a:t>Out-of-the-Box Grafana Dashboards</a:t>
-            </a:r>
-          </a:p>
-          <a:p>
-            <a:pPr marL="457200" indent="0">
-              <a:buNone/>
-            </a:pPr>
-            <a:r>
-              <a:rPr lang="en-US" sz="950" dirty="0">
-                <a:solidFill>
-                  <a:srgbClr val="3C4D6B"/>
-                </a:solidFill>
-              </a:rPr>
-              <a:t>Pre-built charts for lookup latency, request throughput, and pool utilization</a:t>
-            </a:r>
-          </a:p>
-        </p:txBody>
-      </p:sp>
-      <p:sp>
-        <p:nvSpPr>
-          <p:cNvPr id="15" name="Item11"/>
-          <p:cNvSpPr/>
-          <p:nvPr/>
-        </p:nvSpPr>
-        <p:spPr>
-          <a:xfrm>
-            <a:off x="4700000" y="3380000"/>
-            <a:ext cx="4300000" cy="580000"/>
-          </a:xfrm>
-          <a:prstGeom prst="rect">
-            <a:avLst/>
-          </a:prstGeom>
-          <a:noFill/>
-          <a:ln/>
-        </p:spPr>
-        <p:txBody>
-          <a:bodyPr wrap="square" lIns="91440" tIns="45720" rIns="91440" bIns="45720" rtlCol="0" anchor="t"/>
-          <a:lstStyle/>
-          <a:p>
-            <a:pPr marL="0" indent="0">
-              <a:buNone/>
-            </a:pPr>
-            <a:r>
-              <a:rPr lang="en-US" sz="1100" b="1" dirty="0">
-                <a:solidFill>
-                  <a:srgbClr val="F5A623"/>
-                </a:solidFill>
-              </a:rPr>
-              <a:t>11  </a:t>
-            </a:r>
-            <a:r>
-              <a:rPr lang="en-US" sz="1100" b="1" dirty="0">
-                <a:solidFill>
-                  <a:srgbClr val="1E2761"/>
-                </a:solidFill>
-              </a:rPr>
-              <a:t>Auto Static-IP for All SIM Types</a:t>
-            </a:r>
-          </a:p>
-          <a:p>
-            <a:pPr marL="457200" indent="0">
-              <a:buNone/>
-            </a:pPr>
-            <a:r>
-              <a:rPr lang="en-US" sz="950" dirty="0">
-                <a:solidFill>
-                  <a:srgbClr val="3C4D6B"/>
-                </a:solidFill>
-              </a:rPr>
-              <a:t>Supports imsi / imsi_apn / iccid / iccid_apn modes with full auto-configuration</a:t>
-            </a:r>
-          </a:p>
-        </p:txBody>
-      </p:sp>
-      <p:sp>
-        <p:nvSpPr>
-          <p:cNvPr id="16" name="Item12"/>
-          <p:cNvSpPr/>
-          <p:nvPr/>
-        </p:nvSpPr>
-        <p:spPr>
-          <a:xfrm>
-            <a:off x="4700000" y="4070000"/>
-            <a:ext cx="4300000" cy="580000"/>
-          </a:xfrm>
-          <a:prstGeom prst="rect">
-            <a:avLst/>
-          </a:prstGeom>
-          <a:noFill/>
-          <a:ln/>
-        </p:spPr>
-        <p:txBody>
-          <a:bodyPr wrap="square" lIns="91440" tIns="45720" rIns="91440" bIns="45720" rtlCol="0" anchor="t"/>
-          <a:lstStyle/>
-          <a:p>
-            <a:pPr marL="0" indent="0">
-              <a:buNone/>
-            </a:pPr>
-            <a:r>
-              <a:rPr lang="en-US" sz="1100" b="1" dirty="0">
-                <a:solidFill>
-                  <a:srgbClr val="F5A623"/>
-                </a:solidFill>
-              </a:rPr>
-              <a:t>12  </a:t>
-            </a:r>
-            <a:r>
-              <a:rPr lang="en-US" sz="1100" b="1" dirty="0">
-                <a:solidFill>
-                  <a:srgbClr val="1E2761"/>
-                </a:solidFill>
-              </a:rPr>
-              <a:t>Helm Charts for Kubernetes Deployment</a:t>
-            </a:r>
-          </a:p>
-          <a:p>
-            <a:pPr marL="457200" indent="0">
-              <a:buNone/>
-            </a:pPr>
-            <a:r>
-              <a:rPr lang="en-US" sz="950" dirty="0">
-                <a:solidFill>
-                  <a:srgbClr val="3C4D6B"/>
-                </a:solidFill>
-              </a:rPr>
-              <a:t>CPU &amp; RAM requests and limits defined per container; reproducible k8s deployments</a:t>
-            </a:r>
-          </a:p>
-        </p:txBody>
-      </p:sp>
-      <p:sp>
-        <p:nvSpPr>
-          <p:cNvPr id="17" name="Item13"/>
-          <p:cNvSpPr/>
-          <p:nvPr/>
-        </p:nvSpPr>
-        <p:spPr>
-          <a:xfrm>
-            <a:off x="160000" y="4440000"/>
-            <a:ext cx="4280000" cy="580000"/>
-          </a:xfrm>
-          <a:prstGeom prst="rect">
-            <a:avLst/>
-          </a:prstGeom>
-          <a:noFill/>
-          <a:ln/>
-        </p:spPr>
-        <p:txBody>
-          <a:bodyPr wrap="square" lIns="91440" tIns="45720" rIns="91440" bIns="45720" rtlCol="0" anchor="t"/>
-          <a:lstStyle/>
-          <a:p>
-            <a:pPr marL="0" indent="0">
-              <a:buNone/>
-            </a:pPr>
-            <a:r>
-              <a:rPr lang="en-US" sz="1100" b="1" dirty="0">
-                <a:solidFill>
-                  <a:srgbClr val="F5A623"/>
-                </a:solidFill>
-              </a:rPr>
-              <a:t>13  </a:t>
-            </a:r>
-            <a:r>
-              <a:rPr lang="en-US" sz="1100" b="1" dirty="0">
-                <a:solidFill>
-                  <a:srgbClr val="1E2761"/>
-                </a:solidFill>
-              </a:rPr>
-              <a:t>Multi-Region &amp; Multi-AZ Support</a:t>
-            </a:r>
-          </a:p>
-          <a:p>
-            <a:pPr marL="457200" indent="0">
-              <a:buNone/>
-            </a:pPr>
-            <a:r>
-              <a:rPr lang="en-US" sz="950" dirty="0">
-                <a:solidFill>
-                  <a:srgbClr val="3C4D6B"/>
-                </a:solidFill>
-              </a:rPr>
-              <a:t>Scales independently per-region and per-availability-zone; survives zone failures</a:t>
-            </a:r>
+            <a:endParaRPr lang="en-US" sz="950" dirty="0">
+              <a:solidFill>
+                <a:srgbClr val="3C4D6B"/>
+              </a:solidFill>
+            </a:endParaRPr>
           </a:p>
         </p:txBody>
       </p:sp>
@@ -22029,7 +23579,7 @@
 </p:sld>
 </file>
 
-<file path=ppt/slides/slide3.xml><?xml version="1.0" encoding="utf-8"?>
+<file path=ppt/slides/slide4.xml><?xml version="1.0" encoding="utf-8"?>
 <p:sld xmlns:a="http://schemas.openxmlformats.org/drawingml/2006/main" xmlns:r="http://schemas.openxmlformats.org/officeDocument/2006/relationships" xmlns:p="http://schemas.openxmlformats.org/presentationml/2006/main">
   <p:cSld>
     <p:spTree>
@@ -24384,7 +25934,7 @@
 </p:sld>
 </file>
 
-<file path=ppt/slides/slide4.xml><?xml version="1.0" encoding="utf-8"?>
+<file path=ppt/slides/slide5.xml><?xml version="1.0" encoding="utf-8"?>
 <p:sld xmlns:a="http://schemas.openxmlformats.org/drawingml/2006/main" xmlns:r="http://schemas.openxmlformats.org/officeDocument/2006/relationships" xmlns:p="http://schemas.openxmlformats.org/presentationml/2006/main">
   <p:cSld name="Container Resources">
     <p:spTree>
@@ -25088,13 +26638,22 @@
           <a:p>
             <a:pPr algn="ctr"/>
             <a:r>
+              <a:rPr lang="en-US" sz="820" dirty="0">
+                <a:solidFill>
+                  <a:srgbClr val="1E2761"/>
+                </a:solidFill>
+                <a:latin typeface="Calibri"/>
+              </a:rPr>
+              <a:t>1</a:t>
+            </a:r>
+            <a:r>
               <a:rPr lang="en-US" sz="820" b="0" i="0" dirty="0">
                 <a:solidFill>
                   <a:srgbClr val="1E2761"/>
                 </a:solidFill>
                 <a:latin typeface="Calibri"/>
               </a:rPr>
-              <a:t>2,000m</a:t>
+              <a:t>,000m</a:t>
             </a:r>
           </a:p>
         </p:txBody>
@@ -28045,7 +29604,7 @@
 </p:sld>
 </file>
 
-<file path=ppt/slides/slide5.xml><?xml version="1.0" encoding="utf-8"?>
+<file path=ppt/slides/slide6.xml><?xml version="1.0" encoding="utf-8"?>
 <p:sld xmlns:a="http://schemas.openxmlformats.org/drawingml/2006/main" xmlns:r="http://schemas.openxmlformats.org/officeDocument/2006/relationships" xmlns:p="http://schemas.openxmlformats.org/presentationml/2006/main">
   <p:cSld name="Slide 2">
     <p:bg>
@@ -28690,7 +30249,7 @@
 </p:sld>
 </file>
 
-<file path=ppt/slides/slide6.xml><?xml version="1.0" encoding="utf-8"?>
+<file path=ppt/slides/slide7.xml><?xml version="1.0" encoding="utf-8"?>
 <p:sld xmlns:a="http://schemas.openxmlformats.org/drawingml/2006/main" xmlns:r="http://schemas.openxmlformats.org/officeDocument/2006/relationships" xmlns:p="http://schemas.openxmlformats.org/presentationml/2006/main">
   <p:cSld name="Slide 3">
     <p:bg>
@@ -29632,7 +31191,7 @@
 </p:sld>
 </file>
 
-<file path=ppt/slides/slide7.xml><?xml version="1.0" encoding="utf-8"?>
+<file path=ppt/slides/slide8.xml><?xml version="1.0" encoding="utf-8"?>
 <p:sld xmlns:a="http://schemas.openxmlformats.org/drawingml/2006/main" xmlns:r="http://schemas.openxmlformats.org/officeDocument/2006/relationships" xmlns:p="http://schemas.openxmlformats.org/presentationml/2006/main">
   <p:cSld name="Slide 4">
     <p:bg>
@@ -30900,7 +32459,7 @@
 </p:sld>
 </file>
 
-<file path=ppt/slides/slide8.xml><?xml version="1.0" encoding="utf-8"?>
+<file path=ppt/slides/slide9.xml><?xml version="1.0" encoding="utf-8"?>
 <p:sld xmlns:a="http://schemas.openxmlformats.org/drawingml/2006/main" xmlns:r="http://schemas.openxmlformats.org/officeDocument/2006/relationships" xmlns:p="http://schemas.openxmlformats.org/presentationml/2006/main">
   <p:cSld name="Slide 5">
     <p:bg>
@@ -32243,1361 +33802,6 @@
               <a:t>SLA: p99 &lt; 15ms end-to-end</a:t>
             </a:r>
             <a:endParaRPr lang="en-US" sz="1100" dirty="0"/>
-          </a:p>
-        </p:txBody>
-      </p:sp>
-    </p:spTree>
-  </p:cSld>
-  <p:clrMapOvr>
-    <a:masterClrMapping/>
-  </p:clrMapOvr>
-</p:sld>
-</file>
-
-<file path=ppt/slides/slide9.xml><?xml version="1.0" encoding="utf-8"?>
-<p:sld xmlns:a="http://schemas.openxmlformats.org/drawingml/2006/main" xmlns:r="http://schemas.openxmlformats.org/officeDocument/2006/relationships" xmlns:p="http://schemas.openxmlformats.org/presentationml/2006/main">
-  <p:cSld name="Slide 6">
-    <p:bg>
-      <p:bgPr>
-        <a:solidFill>
-          <a:srgbClr val="EEF3FB"/>
-        </a:solidFill>
-        <a:effectLst/>
-      </p:bgPr>
-    </p:bg>
-    <p:spTree>
-      <p:nvGrpSpPr>
-        <p:cNvPr id="1" name=""/>
-        <p:cNvGrpSpPr/>
-        <p:nvPr/>
-      </p:nvGrpSpPr>
-      <p:grpSpPr>
-        <a:xfrm>
-          <a:off x="0" y="0"/>
-          <a:ext cx="0" cy="0"/>
-          <a:chOff x="0" y="0"/>
-          <a:chExt cx="0" cy="0"/>
-        </a:xfrm>
-      </p:grpSpPr>
-      <p:sp>
-        <p:nvSpPr>
-          <p:cNvPr id="2" name="Shape 0"/>
-          <p:cNvSpPr/>
-          <p:nvPr/>
-        </p:nvSpPr>
-        <p:spPr>
-          <a:xfrm>
-            <a:off x="0" y="0"/>
-            <a:ext cx="9144000" cy="777240"/>
-          </a:xfrm>
-          <a:prstGeom prst="rect">
-            <a:avLst/>
-          </a:prstGeom>
-          <a:solidFill>
-            <a:srgbClr val="1E2761"/>
-          </a:solidFill>
-          <a:ln w="12700">
-            <a:solidFill>
-              <a:srgbClr val="1E2761"/>
-            </a:solidFill>
-            <a:prstDash val="solid"/>
-          </a:ln>
-        </p:spPr>
-        <p:txBody>
-          <a:bodyPr/>
-          <a:lstStyle/>
-          <a:p>
-            <a:endParaRPr lang="LID4096"/>
-          </a:p>
-        </p:txBody>
-      </p:sp>
-      <p:sp>
-        <p:nvSpPr>
-          <p:cNvPr id="3" name="Text 1"/>
-          <p:cNvSpPr/>
-          <p:nvPr/>
-        </p:nvSpPr>
-        <p:spPr>
-          <a:xfrm>
-            <a:off x="365760" y="0"/>
-            <a:ext cx="8412480" cy="777240"/>
-          </a:xfrm>
-          <a:prstGeom prst="rect">
-            <a:avLst/>
-          </a:prstGeom>
-          <a:noFill/>
-          <a:ln/>
-        </p:spPr>
-        <p:txBody>
-          <a:bodyPr wrap="square" lIns="0" tIns="0" rIns="0" bIns="0" rtlCol="0" anchor="ctr"/>
-          <a:lstStyle/>
-          <a:p>
-            <a:pPr marL="0" indent="0">
-              <a:buNone/>
-            </a:pPr>
-            <a:r>
-              <a:rPr lang="en-US" sz="2200" b="1" dirty="0">
-                <a:solidFill>
-                  <a:srgbClr val="FFFFFF"/>
-                </a:solidFill>
-              </a:rPr>
-              <a:t>Two-Stage First-Connection Allocation</a:t>
-            </a:r>
-            <a:endParaRPr lang="en-US" sz="2200" dirty="0"/>
-          </a:p>
-        </p:txBody>
-      </p:sp>
-      <p:sp>
-        <p:nvSpPr>
-          <p:cNvPr id="4" name="Text 2"/>
-          <p:cNvSpPr/>
-          <p:nvPr/>
-        </p:nvSpPr>
-        <p:spPr>
-          <a:xfrm>
-            <a:off x="365760" y="777240"/>
-            <a:ext cx="8412480" cy="347472"/>
-          </a:xfrm>
-          <a:prstGeom prst="rect">
-            <a:avLst/>
-          </a:prstGeom>
-          <a:noFill/>
-          <a:ln/>
-        </p:spPr>
-        <p:txBody>
-          <a:bodyPr wrap="square" rtlCol="0" anchor="ctr"/>
-          <a:lstStyle/>
-          <a:p>
-            <a:pPr marL="0" indent="0">
-              <a:buNone/>
-            </a:pPr>
-            <a:r>
-              <a:rPr lang="en-US" sz="1300" i="1" dirty="0">
-                <a:solidFill>
-                  <a:srgbClr val="2E75B6"/>
-                </a:solidFill>
-              </a:rPr>
-              <a:t>Unknown IMSI → auto-provisioned in a single atomic transaction</a:t>
-            </a:r>
-            <a:endParaRPr lang="en-US" sz="1300" dirty="0"/>
-          </a:p>
-        </p:txBody>
-      </p:sp>
-      <p:sp>
-        <p:nvSpPr>
-          <p:cNvPr id="5" name="Shape 3"/>
-          <p:cNvSpPr/>
-          <p:nvPr/>
-        </p:nvSpPr>
-        <p:spPr>
-          <a:xfrm>
-            <a:off x="274320" y="960120"/>
-            <a:ext cx="4023360" cy="1600200"/>
-          </a:xfrm>
-          <a:prstGeom prst="rect">
-            <a:avLst/>
-          </a:prstGeom>
-          <a:solidFill>
-            <a:srgbClr val="1E2761"/>
-          </a:solidFill>
-          <a:ln w="12700">
-            <a:solidFill>
-              <a:srgbClr val="1E2761"/>
-            </a:solidFill>
-            <a:prstDash val="solid"/>
-          </a:ln>
-          <a:effectLst>
-            <a:outerShdw blurRad="63500" dist="25400" dir="8100000" algn="bl" rotWithShape="0">
-              <a:srgbClr val="000000">
-                <a:alpha val="10000"/>
-              </a:srgbClr>
-            </a:outerShdw>
-          </a:effectLst>
-        </p:spPr>
-        <p:txBody>
-          <a:bodyPr/>
-          <a:lstStyle/>
-          <a:p>
-            <a:endParaRPr lang="LID4096"/>
-          </a:p>
-        </p:txBody>
-      </p:sp>
-      <p:sp>
-        <p:nvSpPr>
-          <p:cNvPr id="6" name="Shape 4"/>
-          <p:cNvSpPr/>
-          <p:nvPr/>
-        </p:nvSpPr>
-        <p:spPr>
-          <a:xfrm>
-            <a:off x="365760" y="1005840"/>
-            <a:ext cx="1097280" cy="237744"/>
-          </a:xfrm>
-          <a:prstGeom prst="roundRect">
-            <a:avLst>
-              <a:gd name="adj" fmla="val 50000"/>
-            </a:avLst>
-          </a:prstGeom>
-          <a:solidFill>
-            <a:srgbClr val="2E75B6"/>
-          </a:solidFill>
-          <a:ln w="12700">
-            <a:solidFill>
-              <a:srgbClr val="2E75B6"/>
-            </a:solidFill>
-            <a:prstDash val="solid"/>
-          </a:ln>
-        </p:spPr>
-        <p:txBody>
-          <a:bodyPr/>
-          <a:lstStyle/>
-          <a:p>
-            <a:endParaRPr lang="LID4096"/>
-          </a:p>
-        </p:txBody>
-      </p:sp>
-      <p:sp>
-        <p:nvSpPr>
-          <p:cNvPr id="7" name="Text 5"/>
-          <p:cNvSpPr/>
-          <p:nvPr/>
-        </p:nvSpPr>
-        <p:spPr>
-          <a:xfrm>
-            <a:off x="365760" y="1005840"/>
-            <a:ext cx="1097280" cy="237744"/>
-          </a:xfrm>
-          <a:prstGeom prst="rect">
-            <a:avLst/>
-          </a:prstGeom>
-          <a:noFill/>
-          <a:ln/>
-        </p:spPr>
-        <p:txBody>
-          <a:bodyPr wrap="square" lIns="0" tIns="0" rIns="0" bIns="0" rtlCol="0" anchor="ctr"/>
-          <a:lstStyle/>
-          <a:p>
-            <a:pPr marL="0" indent="0" algn="ctr">
-              <a:buNone/>
-            </a:pPr>
-            <a:r>
-              <a:rPr lang="en-US" sz="900" b="1" dirty="0">
-                <a:solidFill>
-                  <a:srgbClr val="FFFFFF"/>
-                </a:solidFill>
-              </a:rPr>
-              <a:t>STAGE 1</a:t>
-            </a:r>
-            <a:endParaRPr lang="en-US" sz="900" dirty="0"/>
-          </a:p>
-        </p:txBody>
-      </p:sp>
-      <p:sp>
-        <p:nvSpPr>
-          <p:cNvPr id="8" name="Text 6"/>
-          <p:cNvSpPr/>
-          <p:nvPr/>
-        </p:nvSpPr>
-        <p:spPr>
-          <a:xfrm>
-            <a:off x="365760" y="1298448"/>
-            <a:ext cx="3749040" cy="292608"/>
-          </a:xfrm>
-          <a:prstGeom prst="rect">
-            <a:avLst/>
-          </a:prstGeom>
-          <a:noFill/>
-          <a:ln/>
-        </p:spPr>
-        <p:txBody>
-          <a:bodyPr wrap="square" lIns="0" tIns="0" rIns="0" bIns="0" rtlCol="0" anchor="ctr"/>
-          <a:lstStyle/>
-          <a:p>
-            <a:pPr marL="0" indent="0">
-              <a:buNone/>
-            </a:pPr>
-            <a:r>
-              <a:rPr lang="en-US" sz="1300" b="1" dirty="0">
-                <a:solidFill>
-                  <a:srgbClr val="FFFFFF"/>
-                </a:solidFill>
-              </a:rPr>
-              <a:t>aaa-lookup-service</a:t>
-            </a:r>
-            <a:endParaRPr lang="en-US" sz="1300" dirty="0"/>
-          </a:p>
-        </p:txBody>
-      </p:sp>
-      <p:sp>
-        <p:nvSpPr>
-          <p:cNvPr id="9" name="Text 7"/>
-          <p:cNvSpPr/>
-          <p:nvPr/>
-        </p:nvSpPr>
-        <p:spPr>
-          <a:xfrm>
-            <a:off x="365760" y="1627632"/>
-            <a:ext cx="3749040" cy="822960"/>
-          </a:xfrm>
-          <a:prstGeom prst="rect">
-            <a:avLst/>
-          </a:prstGeom>
-          <a:noFill/>
-          <a:ln/>
-        </p:spPr>
-        <p:txBody>
-          <a:bodyPr wrap="square" lIns="0" tIns="0" rIns="0" bIns="0" rtlCol="0" anchor="ctr"/>
-          <a:lstStyle/>
-          <a:p>
-            <a:pPr marL="0" indent="0">
-              <a:buNone/>
-            </a:pPr>
-            <a:r>
-              <a:rPr lang="en-US" sz="1050" dirty="0">
-                <a:solidFill>
-                  <a:srgbClr val="CADCFC"/>
-                </a:solidFill>
-                <a:latin typeface="Courier New" pitchFamily="34" charset="0"/>
-                <a:ea typeface="Courier New" pitchFamily="34" charset="-122"/>
-                <a:cs typeface="Courier New" pitchFamily="34" charset="-120"/>
-              </a:rPr>
-              <a:t>GET /lookup?imsi={imsi}&amp;apn={apn}</a:t>
-            </a:r>
-            <a:endParaRPr lang="en-US" sz="1050" dirty="0"/>
-          </a:p>
-          <a:p>
-            <a:pPr marL="0" indent="0">
-              <a:buNone/>
-            </a:pPr>
-            <a:r>
-              <a:rPr lang="en-US" sz="1050" dirty="0">
-                <a:solidFill>
-                  <a:srgbClr val="CADCFC"/>
-                </a:solidFill>
-                <a:latin typeface="Courier New" pitchFamily="34" charset="0"/>
-                <a:ea typeface="Courier New" pitchFamily="34" charset="-122"/>
-                <a:cs typeface="Courier New" pitchFamily="34" charset="-120"/>
-              </a:rPr>
-              <a:t>→ Queries READ REPLICA</a:t>
-            </a:r>
-            <a:endParaRPr lang="en-US" sz="1050" dirty="0"/>
-          </a:p>
-          <a:p>
-            <a:pPr marL="0" indent="0">
-              <a:buNone/>
-            </a:pPr>
-            <a:r>
-              <a:rPr lang="en-US" sz="1050" dirty="0">
-                <a:solidFill>
-                  <a:srgbClr val="CADCFC"/>
-                </a:solidFill>
-                <a:latin typeface="Courier New" pitchFamily="34" charset="0"/>
-                <a:ea typeface="Courier New" pitchFamily="34" charset="-122"/>
-                <a:cs typeface="Courier New" pitchFamily="34" charset="-120"/>
-              </a:rPr>
-              <a:t>→ IMSI not found in imsi2sim</a:t>
-            </a:r>
-            <a:endParaRPr lang="en-US" sz="1050" dirty="0"/>
-          </a:p>
-          <a:p>
-            <a:pPr marL="0" indent="0">
-              <a:buNone/>
-            </a:pPr>
-            <a:r>
-              <a:rPr lang="en-US" sz="1050" dirty="0">
-                <a:solidFill>
-                  <a:srgbClr val="CADCFC"/>
-                </a:solidFill>
-                <a:latin typeface="Courier New" pitchFamily="34" charset="0"/>
-                <a:ea typeface="Courier New" pitchFamily="34" charset="-122"/>
-                <a:cs typeface="Courier New" pitchFamily="34" charset="-120"/>
-              </a:rPr>
-              <a:t>→ Returns 404 {"error": "not_found"}</a:t>
-            </a:r>
-            <a:endParaRPr lang="en-US" sz="1050" dirty="0"/>
-          </a:p>
-        </p:txBody>
-      </p:sp>
-      <p:sp>
-        <p:nvSpPr>
-          <p:cNvPr id="10" name="Text 8"/>
-          <p:cNvSpPr/>
-          <p:nvPr/>
-        </p:nvSpPr>
-        <p:spPr>
-          <a:xfrm>
-            <a:off x="365760" y="2633472"/>
-            <a:ext cx="4023360" cy="274320"/>
-          </a:xfrm>
-          <a:prstGeom prst="rect">
-            <a:avLst/>
-          </a:prstGeom>
-          <a:noFill/>
-          <a:ln/>
-        </p:spPr>
-        <p:txBody>
-          <a:bodyPr wrap="square" lIns="0" tIns="0" rIns="0" bIns="0" rtlCol="0" anchor="ctr"/>
-          <a:lstStyle/>
-          <a:p>
-            <a:pPr marL="0" indent="0" algn="ctr">
-              <a:buNone/>
-            </a:pPr>
-            <a:r>
-              <a:rPr lang="en-US" sz="1050" b="1" dirty="0">
-                <a:solidFill>
-                  <a:srgbClr val="F5A623"/>
-                </a:solidFill>
-              </a:rPr>
-              <a:t>▼  aaa-lookup-service calls POST /first-connection</a:t>
-            </a:r>
-            <a:endParaRPr lang="en-US" sz="1050" dirty="0"/>
-          </a:p>
-        </p:txBody>
-      </p:sp>
-      <p:sp>
-        <p:nvSpPr>
-          <p:cNvPr id="11" name="Shape 9"/>
-          <p:cNvSpPr/>
-          <p:nvPr/>
-        </p:nvSpPr>
-        <p:spPr>
-          <a:xfrm>
-            <a:off x="274320" y="2944368"/>
-            <a:ext cx="4023360" cy="1920240"/>
-          </a:xfrm>
-          <a:prstGeom prst="rect">
-            <a:avLst/>
-          </a:prstGeom>
-          <a:solidFill>
-            <a:srgbClr val="1E2761"/>
-          </a:solidFill>
-          <a:ln w="12700">
-            <a:solidFill>
-              <a:srgbClr val="1E2761"/>
-            </a:solidFill>
-            <a:prstDash val="solid"/>
-          </a:ln>
-          <a:effectLst>
-            <a:outerShdw blurRad="63500" dist="25400" dir="8100000" algn="bl" rotWithShape="0">
-              <a:srgbClr val="000000">
-                <a:alpha val="10000"/>
-              </a:srgbClr>
-            </a:outerShdw>
-          </a:effectLst>
-        </p:spPr>
-        <p:txBody>
-          <a:bodyPr/>
-          <a:lstStyle/>
-          <a:p>
-            <a:endParaRPr lang="LID4096"/>
-          </a:p>
-        </p:txBody>
-      </p:sp>
-      <p:sp>
-        <p:nvSpPr>
-          <p:cNvPr id="12" name="Shape 10"/>
-          <p:cNvSpPr/>
-          <p:nvPr/>
-        </p:nvSpPr>
-        <p:spPr>
-          <a:xfrm>
-            <a:off x="365760" y="2990088"/>
-            <a:ext cx="1097280" cy="237744"/>
-          </a:xfrm>
-          <a:prstGeom prst="roundRect">
-            <a:avLst>
-              <a:gd name="adj" fmla="val 50000"/>
-            </a:avLst>
-          </a:prstGeom>
-          <a:solidFill>
-            <a:srgbClr val="2ECC8C"/>
-          </a:solidFill>
-          <a:ln w="12700">
-            <a:solidFill>
-              <a:srgbClr val="2ECC8C"/>
-            </a:solidFill>
-            <a:prstDash val="solid"/>
-          </a:ln>
-        </p:spPr>
-        <p:txBody>
-          <a:bodyPr/>
-          <a:lstStyle/>
-          <a:p>
-            <a:endParaRPr lang="LID4096"/>
-          </a:p>
-        </p:txBody>
-      </p:sp>
-      <p:sp>
-        <p:nvSpPr>
-          <p:cNvPr id="13" name="Text 11"/>
-          <p:cNvSpPr/>
-          <p:nvPr/>
-        </p:nvSpPr>
-        <p:spPr>
-          <a:xfrm>
-            <a:off x="365760" y="2990088"/>
-            <a:ext cx="1097280" cy="237744"/>
-          </a:xfrm>
-          <a:prstGeom prst="rect">
-            <a:avLst/>
-          </a:prstGeom>
-          <a:noFill/>
-          <a:ln/>
-        </p:spPr>
-        <p:txBody>
-          <a:bodyPr wrap="square" lIns="0" tIns="0" rIns="0" bIns="0" rtlCol="0" anchor="ctr"/>
-          <a:lstStyle/>
-          <a:p>
-            <a:pPr marL="0" indent="0" algn="ctr">
-              <a:buNone/>
-            </a:pPr>
-            <a:r>
-              <a:rPr lang="en-US" sz="900" b="1" dirty="0">
-                <a:solidFill>
-                  <a:srgbClr val="FFFFFF"/>
-                </a:solidFill>
-              </a:rPr>
-              <a:t>STAGE 2</a:t>
-            </a:r>
-            <a:endParaRPr lang="en-US" sz="900" dirty="0"/>
-          </a:p>
-        </p:txBody>
-      </p:sp>
-      <p:sp>
-        <p:nvSpPr>
-          <p:cNvPr id="14" name="Text 12"/>
-          <p:cNvSpPr/>
-          <p:nvPr/>
-        </p:nvSpPr>
-        <p:spPr>
-          <a:xfrm>
-            <a:off x="365760" y="3282696"/>
-            <a:ext cx="3749040" cy="292608"/>
-          </a:xfrm>
-          <a:prstGeom prst="rect">
-            <a:avLst/>
-          </a:prstGeom>
-          <a:noFill/>
-          <a:ln/>
-        </p:spPr>
-        <p:txBody>
-          <a:bodyPr wrap="square" lIns="0" tIns="0" rIns="0" bIns="0" rtlCol="0" anchor="ctr"/>
-          <a:lstStyle/>
-          <a:p>
-            <a:pPr marL="0" indent="0">
-              <a:buNone/>
-            </a:pPr>
-            <a:r>
-              <a:rPr lang="en-US" sz="1300" b="1" dirty="0">
-                <a:solidFill>
-                  <a:srgbClr val="FFFFFF"/>
-                </a:solidFill>
-              </a:rPr>
-              <a:t>subscriber-profile-api</a:t>
-            </a:r>
-            <a:endParaRPr lang="en-US" sz="1300" dirty="0"/>
-          </a:p>
-        </p:txBody>
-      </p:sp>
-      <p:sp>
-        <p:nvSpPr>
-          <p:cNvPr id="15" name="Text 13"/>
-          <p:cNvSpPr/>
-          <p:nvPr/>
-        </p:nvSpPr>
-        <p:spPr>
-          <a:xfrm>
-            <a:off x="365760" y="3611880"/>
-            <a:ext cx="3749040" cy="1188720"/>
-          </a:xfrm>
-          <a:prstGeom prst="rect">
-            <a:avLst/>
-          </a:prstGeom>
-          <a:noFill/>
-          <a:ln/>
-        </p:spPr>
-        <p:txBody>
-          <a:bodyPr wrap="square" lIns="0" tIns="0" rIns="0" bIns="0" rtlCol="0" anchor="ctr"/>
-          <a:lstStyle/>
-          <a:p>
-            <a:pPr marL="0" indent="0">
-              <a:buNone/>
-            </a:pPr>
-            <a:r>
-              <a:rPr lang="en-US" sz="950" dirty="0">
-                <a:solidFill>
-                  <a:srgbClr val="CADCFC"/>
-                </a:solidFill>
-                <a:latin typeface="Courier New" pitchFamily="34" charset="0"/>
-                <a:ea typeface="Courier New" pitchFamily="34" charset="-122"/>
-                <a:cs typeface="Courier New" pitchFamily="34" charset="-120"/>
-              </a:rPr>
-              <a:t>aaa-lookup-service: POST /v1/first-connection {imsi, apn, imei}</a:t>
-            </a:r>
-            <a:endParaRPr lang="en-US" sz="950" dirty="0"/>
-          </a:p>
-          <a:p>
-            <a:pPr marL="0" indent="0">
-              <a:buNone/>
-            </a:pPr>
-            <a:r>
-              <a:rPr lang="en-US" sz="950" dirty="0">
-                <a:solidFill>
-                  <a:srgbClr val="CADCFC"/>
-                </a:solidFill>
-                <a:latin typeface="Courier New" pitchFamily="34" charset="0"/>
-                <a:ea typeface="Courier New" pitchFamily="34" charset="-122"/>
-                <a:cs typeface="Courier New" pitchFamily="34" charset="-120"/>
-              </a:rPr>
-              <a:t>1. Idempotency check: IMSI already exists?</a:t>
-            </a:r>
-            <a:endParaRPr lang="en-US" sz="950" dirty="0"/>
-          </a:p>
-          <a:p>
-            <a:pPr marL="0" indent="0">
-              <a:buNone/>
-            </a:pPr>
-            <a:r>
-              <a:rPr lang="en-US" sz="950" dirty="0">
-                <a:solidFill>
-                  <a:srgbClr val="CADCFC"/>
-                </a:solidFill>
-                <a:latin typeface="Courier New" pitchFamily="34" charset="0"/>
-                <a:ea typeface="Courier New" pitchFamily="34" charset="-122"/>
-                <a:cs typeface="Courier New" pitchFamily="34" charset="-120"/>
-              </a:rPr>
-              <a:t>2. Match range config (f_imsi &lt;= $imsi &lt;= t_imsi)</a:t>
-            </a:r>
-            <a:endParaRPr lang="en-US" sz="950" dirty="0"/>
-          </a:p>
-          <a:p>
-            <a:pPr marL="0" indent="0">
-              <a:buNone/>
-            </a:pPr>
-            <a:r>
-              <a:rPr lang="en-US" sz="950" dirty="0">
-                <a:solidFill>
-                  <a:srgbClr val="CADCFC"/>
-                </a:solidFill>
-                <a:latin typeface="Courier New" pitchFamily="34" charset="0"/>
-                <a:ea typeface="Courier New" pitchFamily="34" charset="-122"/>
-                <a:cs typeface="Courier New" pitchFamily="34" charset="-120"/>
-              </a:rPr>
-              <a:t>3. Claim IP:  DELETE FROM ip_pool_available</a:t>
-            </a:r>
-            <a:endParaRPr lang="en-US" sz="950" dirty="0"/>
-          </a:p>
-          <a:p>
-            <a:pPr marL="0" indent="0">
-              <a:buNone/>
-            </a:pPr>
-            <a:r>
-              <a:rPr lang="en-US" sz="950" dirty="0">
-                <a:solidFill>
-                  <a:srgbClr val="CADCFC"/>
-                </a:solidFill>
-                <a:latin typeface="Courier New" pitchFamily="34" charset="0"/>
-                <a:ea typeface="Courier New" pitchFamily="34" charset="-122"/>
-                <a:cs typeface="Courier New" pitchFamily="34" charset="-120"/>
-              </a:rPr>
-              <a:t>   FOR UPDATE SKIP LOCKED</a:t>
-            </a:r>
-            <a:endParaRPr lang="en-US" sz="950" dirty="0"/>
-          </a:p>
-          <a:p>
-            <a:pPr marL="0" indent="0">
-              <a:buNone/>
-            </a:pPr>
-            <a:r>
-              <a:rPr lang="en-US" sz="950" dirty="0">
-                <a:solidFill>
-                  <a:srgbClr val="CADCFC"/>
-                </a:solidFill>
-                <a:latin typeface="Courier New" pitchFamily="34" charset="0"/>
-                <a:ea typeface="Courier New" pitchFamily="34" charset="-122"/>
-                <a:cs typeface="Courier New" pitchFamily="34" charset="-120"/>
-              </a:rPr>
-              <a:t>4. INSERT profile + IMSI + IP  (atomic COMMIT)</a:t>
-            </a:r>
-            <a:endParaRPr lang="en-US" sz="950" dirty="0"/>
-          </a:p>
-        </p:txBody>
-      </p:sp>
-      <p:sp>
-        <p:nvSpPr>
-          <p:cNvPr id="16" name="Text 14"/>
-          <p:cNvSpPr/>
-          <p:nvPr/>
-        </p:nvSpPr>
-        <p:spPr>
-          <a:xfrm>
-            <a:off x="4663440" y="960120"/>
-            <a:ext cx="4114800" cy="256032"/>
-          </a:xfrm>
-          <a:prstGeom prst="rect">
-            <a:avLst/>
-          </a:prstGeom>
-          <a:noFill/>
-          <a:ln/>
-        </p:spPr>
-        <p:txBody>
-          <a:bodyPr wrap="square" lIns="0" tIns="0" rIns="0" bIns="0" rtlCol="0" anchor="ctr"/>
-          <a:lstStyle/>
-          <a:p>
-            <a:pPr marL="0" indent="0">
-              <a:buNone/>
-            </a:pPr>
-            <a:r>
-              <a:rPr lang="en-US" sz="1000" b="1" dirty="0">
-                <a:solidFill>
-                  <a:srgbClr val="2E75B6"/>
-                </a:solidFill>
-              </a:rPr>
-              <a:t>First-Connection Outcomes  (subscriber-profile-api)</a:t>
-            </a:r>
-            <a:endParaRPr lang="en-US" sz="1000" dirty="0"/>
-          </a:p>
-        </p:txBody>
-      </p:sp>
-      <p:sp>
-        <p:nvSpPr>
-          <p:cNvPr id="17" name="Shape 15"/>
-          <p:cNvSpPr/>
-          <p:nvPr/>
-        </p:nvSpPr>
-        <p:spPr>
-          <a:xfrm>
-            <a:off x="4663440" y="1261872"/>
-            <a:ext cx="4114800" cy="868680"/>
-          </a:xfrm>
-          <a:prstGeom prst="rect">
-            <a:avLst/>
-          </a:prstGeom>
-          <a:solidFill>
-            <a:srgbClr val="E8F5E9"/>
-          </a:solidFill>
-          <a:ln w="12700">
-            <a:solidFill>
-              <a:srgbClr val="2ECC8C"/>
-            </a:solidFill>
-            <a:prstDash val="solid"/>
-          </a:ln>
-        </p:spPr>
-        <p:txBody>
-          <a:bodyPr/>
-          <a:lstStyle/>
-          <a:p>
-            <a:endParaRPr lang="LID4096"/>
-          </a:p>
-        </p:txBody>
-      </p:sp>
-      <p:sp>
-        <p:nvSpPr>
-          <p:cNvPr id="18" name="Shape 16"/>
-          <p:cNvSpPr/>
-          <p:nvPr/>
-        </p:nvSpPr>
-        <p:spPr>
-          <a:xfrm>
-            <a:off x="4663440" y="1261872"/>
-            <a:ext cx="54864" cy="868680"/>
-          </a:xfrm>
-          <a:prstGeom prst="rect">
-            <a:avLst/>
-          </a:prstGeom>
-          <a:solidFill>
-            <a:srgbClr val="2ECC8C"/>
-          </a:solidFill>
-          <a:ln w="12700">
-            <a:solidFill>
-              <a:srgbClr val="2ECC8C"/>
-            </a:solidFill>
-            <a:prstDash val="solid"/>
-          </a:ln>
-        </p:spPr>
-        <p:txBody>
-          <a:bodyPr/>
-          <a:lstStyle/>
-          <a:p>
-            <a:endParaRPr lang="LID4096"/>
-          </a:p>
-        </p:txBody>
-      </p:sp>
-      <p:sp>
-        <p:nvSpPr>
-          <p:cNvPr id="19" name="Text 17"/>
-          <p:cNvSpPr/>
-          <p:nvPr/>
-        </p:nvSpPr>
-        <p:spPr>
-          <a:xfrm>
-            <a:off x="4773168" y="1307592"/>
-            <a:ext cx="3886200" cy="256032"/>
-          </a:xfrm>
-          <a:prstGeom prst="rect">
-            <a:avLst/>
-          </a:prstGeom>
-          <a:noFill/>
-          <a:ln/>
-        </p:spPr>
-        <p:txBody>
-          <a:bodyPr wrap="square" lIns="0" tIns="0" rIns="0" bIns="0" rtlCol="0" anchor="ctr"/>
-          <a:lstStyle/>
-          <a:p>
-            <a:pPr marL="0" indent="0">
-              <a:buNone/>
-            </a:pPr>
-            <a:r>
-              <a:rPr lang="en-US" sz="1150" b="1" dirty="0">
-                <a:solidFill>
-                  <a:srgbClr val="1E2761"/>
-                </a:solidFill>
-              </a:rPr>
-              <a:t>200 OK — IP Allocated</a:t>
-            </a:r>
-            <a:endParaRPr lang="en-US" sz="1150" dirty="0"/>
-          </a:p>
-        </p:txBody>
-      </p:sp>
-      <p:sp>
-        <p:nvSpPr>
-          <p:cNvPr id="20" name="Text 18"/>
-          <p:cNvSpPr/>
-          <p:nvPr/>
-        </p:nvSpPr>
-        <p:spPr>
-          <a:xfrm>
-            <a:off x="4773168" y="1563624"/>
-            <a:ext cx="3886200" cy="512064"/>
-          </a:xfrm>
-          <a:prstGeom prst="rect">
-            <a:avLst/>
-          </a:prstGeom>
-          <a:noFill/>
-          <a:ln/>
-        </p:spPr>
-        <p:txBody>
-          <a:bodyPr wrap="square" lIns="0" tIns="0" rIns="0" bIns="0" rtlCol="0" anchor="ctr"/>
-          <a:lstStyle/>
-          <a:p>
-            <a:pPr marL="0" indent="0">
-              <a:buNone/>
-            </a:pPr>
-            <a:r>
-              <a:rPr lang="en-US" sz="1000" dirty="0">
-                <a:solidFill>
-                  <a:srgbClr val="3C4D6B"/>
-                </a:solidFill>
-              </a:rPr>
-              <a:t>subscriber-profile-api creates sim_id</a:t>
-            </a:r>
-            <a:endParaRPr lang="en-US" sz="1000" dirty="0"/>
-          </a:p>
-          <a:p>
-            <a:pPr marL="0" indent="0">
-              <a:buNone/>
-            </a:pPr>
-            <a:r>
-              <a:rPr lang="en-US" sz="1000" dirty="0">
-                <a:solidFill>
-                  <a:srgbClr val="3C4D6B"/>
-                </a:solidFill>
-              </a:rPr>
-              <a:t>(gen_random_uuid). static_ip returned.</a:t>
-            </a:r>
-            <a:endParaRPr lang="en-US" sz="1000" dirty="0"/>
-          </a:p>
-          <a:p>
-            <a:pPr marL="0" indent="0">
-              <a:buNone/>
-            </a:pPr>
-            <a:r>
-              <a:rPr lang="en-US" sz="1000" dirty="0">
-                <a:solidFill>
-                  <a:srgbClr val="3C4D6B"/>
-                </a:solidFill>
-              </a:rPr>
-              <a:t>aaa-lookup-service returns 200 to aaa-radius-server. Access-Accept issued.</a:t>
-            </a:r>
-            <a:endParaRPr lang="en-US" sz="1000" dirty="0"/>
-          </a:p>
-        </p:txBody>
-      </p:sp>
-      <p:sp>
-        <p:nvSpPr>
-          <p:cNvPr id="21" name="Shape 19"/>
-          <p:cNvSpPr/>
-          <p:nvPr/>
-        </p:nvSpPr>
-        <p:spPr>
-          <a:xfrm>
-            <a:off x="4663440" y="2221992"/>
-            <a:ext cx="4114800" cy="868680"/>
-          </a:xfrm>
-          <a:prstGeom prst="rect">
-            <a:avLst/>
-          </a:prstGeom>
-          <a:solidFill>
-            <a:srgbClr val="E3F2FD"/>
-          </a:solidFill>
-          <a:ln w="12700">
-            <a:solidFill>
-              <a:srgbClr val="2E75B6"/>
-            </a:solidFill>
-            <a:prstDash val="solid"/>
-          </a:ln>
-        </p:spPr>
-        <p:txBody>
-          <a:bodyPr/>
-          <a:lstStyle/>
-          <a:p>
-            <a:endParaRPr lang="LID4096"/>
-          </a:p>
-        </p:txBody>
-      </p:sp>
-      <p:sp>
-        <p:nvSpPr>
-          <p:cNvPr id="22" name="Shape 20"/>
-          <p:cNvSpPr/>
-          <p:nvPr/>
-        </p:nvSpPr>
-        <p:spPr>
-          <a:xfrm>
-            <a:off x="4663440" y="2221992"/>
-            <a:ext cx="54864" cy="868680"/>
-          </a:xfrm>
-          <a:prstGeom prst="rect">
-            <a:avLst/>
-          </a:prstGeom>
-          <a:solidFill>
-            <a:srgbClr val="2E75B6"/>
-          </a:solidFill>
-          <a:ln w="12700">
-            <a:solidFill>
-              <a:srgbClr val="2E75B6"/>
-            </a:solidFill>
-            <a:prstDash val="solid"/>
-          </a:ln>
-        </p:spPr>
-        <p:txBody>
-          <a:bodyPr/>
-          <a:lstStyle/>
-          <a:p>
-            <a:endParaRPr lang="LID4096"/>
-          </a:p>
-        </p:txBody>
-      </p:sp>
-      <p:sp>
-        <p:nvSpPr>
-          <p:cNvPr id="23" name="Text 21"/>
-          <p:cNvSpPr/>
-          <p:nvPr/>
-        </p:nvSpPr>
-        <p:spPr>
-          <a:xfrm>
-            <a:off x="4773168" y="2267712"/>
-            <a:ext cx="3886200" cy="256032"/>
-          </a:xfrm>
-          <a:prstGeom prst="rect">
-            <a:avLst/>
-          </a:prstGeom>
-          <a:noFill/>
-          <a:ln/>
-        </p:spPr>
-        <p:txBody>
-          <a:bodyPr wrap="square" lIns="0" tIns="0" rIns="0" bIns="0" rtlCol="0" anchor="ctr"/>
-          <a:lstStyle/>
-          <a:p>
-            <a:pPr marL="0" indent="0">
-              <a:buNone/>
-            </a:pPr>
-            <a:r>
-              <a:rPr lang="en-US" sz="1150" b="1" dirty="0">
-                <a:solidFill>
-                  <a:srgbClr val="1E2761"/>
-                </a:solidFill>
-              </a:rPr>
-              <a:t>200 OK — Idempotent Return</a:t>
-            </a:r>
-            <a:endParaRPr lang="en-US" sz="1150" dirty="0"/>
-          </a:p>
-        </p:txBody>
-      </p:sp>
-      <p:sp>
-        <p:nvSpPr>
-          <p:cNvPr id="24" name="Text 22"/>
-          <p:cNvSpPr/>
-          <p:nvPr/>
-        </p:nvSpPr>
-        <p:spPr>
-          <a:xfrm>
-            <a:off x="4773168" y="2523744"/>
-            <a:ext cx="3886200" cy="512064"/>
-          </a:xfrm>
-          <a:prstGeom prst="rect">
-            <a:avLst/>
-          </a:prstGeom>
-          <a:noFill/>
-          <a:ln/>
-        </p:spPr>
-        <p:txBody>
-          <a:bodyPr wrap="square" lIns="0" tIns="0" rIns="0" bIns="0" rtlCol="0" anchor="ctr"/>
-          <a:lstStyle/>
-          <a:p>
-            <a:pPr marL="0" indent="0">
-              <a:buNone/>
-            </a:pPr>
-            <a:r>
-              <a:rPr lang="en-US" sz="1000" dirty="0">
-                <a:solidFill>
-                  <a:srgbClr val="3C4D6B"/>
-                </a:solidFill>
-              </a:rPr>
-              <a:t>IMSI already existed in DB.</a:t>
-            </a:r>
-            <a:endParaRPr lang="en-US" sz="1000" dirty="0"/>
-          </a:p>
-          <a:p>
-            <a:pPr marL="0" indent="0">
-              <a:buNone/>
-            </a:pPr>
-            <a:r>
-              <a:rPr lang="en-US" sz="1000" dirty="0">
-                <a:solidFill>
-                  <a:srgbClr val="3C4D6B"/>
-                </a:solidFill>
-              </a:rPr>
-              <a:t>Same sim_id &amp; IP returned.</a:t>
-            </a:r>
-            <a:endParaRPr lang="en-US" sz="1000" dirty="0"/>
-          </a:p>
-          <a:p>
-            <a:pPr marL="0" indent="0">
-              <a:buNone/>
-            </a:pPr>
-            <a:r>
-              <a:rPr lang="en-US" sz="1000" dirty="0">
-                <a:solidFill>
-                  <a:srgbClr val="3C4D6B"/>
-                </a:solidFill>
-              </a:rPr>
-              <a:t>Safe to retry — no duplicates.</a:t>
-            </a:r>
-            <a:endParaRPr lang="en-US" sz="1000" dirty="0"/>
-          </a:p>
-        </p:txBody>
-      </p:sp>
-      <p:sp>
-        <p:nvSpPr>
-          <p:cNvPr id="25" name="Shape 23"/>
-          <p:cNvSpPr/>
-          <p:nvPr/>
-        </p:nvSpPr>
-        <p:spPr>
-          <a:xfrm>
-            <a:off x="4663440" y="3182112"/>
-            <a:ext cx="4114800" cy="868680"/>
-          </a:xfrm>
-          <a:prstGeom prst="rect">
-            <a:avLst/>
-          </a:prstGeom>
-          <a:solidFill>
-            <a:srgbClr val="FFF3E0"/>
-          </a:solidFill>
-          <a:ln w="12700">
-            <a:solidFill>
-              <a:srgbClr val="F5A623"/>
-            </a:solidFill>
-            <a:prstDash val="solid"/>
-          </a:ln>
-        </p:spPr>
-        <p:txBody>
-          <a:bodyPr/>
-          <a:lstStyle/>
-          <a:p>
-            <a:endParaRPr lang="LID4096"/>
-          </a:p>
-        </p:txBody>
-      </p:sp>
-      <p:sp>
-        <p:nvSpPr>
-          <p:cNvPr id="26" name="Shape 24"/>
-          <p:cNvSpPr/>
-          <p:nvPr/>
-        </p:nvSpPr>
-        <p:spPr>
-          <a:xfrm>
-            <a:off x="4663440" y="3182112"/>
-            <a:ext cx="54864" cy="868680"/>
-          </a:xfrm>
-          <a:prstGeom prst="rect">
-            <a:avLst/>
-          </a:prstGeom>
-          <a:solidFill>
-            <a:srgbClr val="F5A623"/>
-          </a:solidFill>
-          <a:ln w="12700">
-            <a:solidFill>
-              <a:srgbClr val="F5A623"/>
-            </a:solidFill>
-            <a:prstDash val="solid"/>
-          </a:ln>
-        </p:spPr>
-        <p:txBody>
-          <a:bodyPr/>
-          <a:lstStyle/>
-          <a:p>
-            <a:endParaRPr lang="LID4096"/>
-          </a:p>
-        </p:txBody>
-      </p:sp>
-      <p:sp>
-        <p:nvSpPr>
-          <p:cNvPr id="27" name="Text 25"/>
-          <p:cNvSpPr/>
-          <p:nvPr/>
-        </p:nvSpPr>
-        <p:spPr>
-          <a:xfrm>
-            <a:off x="4773168" y="3227832"/>
-            <a:ext cx="3886200" cy="256032"/>
-          </a:xfrm>
-          <a:prstGeom prst="rect">
-            <a:avLst/>
-          </a:prstGeom>
-          <a:noFill/>
-          <a:ln/>
-        </p:spPr>
-        <p:txBody>
-          <a:bodyPr wrap="square" lIns="0" tIns="0" rIns="0" bIns="0" rtlCol="0" anchor="ctr"/>
-          <a:lstStyle/>
-          <a:p>
-            <a:pPr marL="0" indent="0">
-              <a:buNone/>
-            </a:pPr>
-            <a:r>
-              <a:rPr lang="en-US" sz="1150" b="1" dirty="0">
-                <a:solidFill>
-                  <a:srgbClr val="1E2761"/>
-                </a:solidFill>
-              </a:rPr>
-              <a:t>404 — No Range Config</a:t>
-            </a:r>
-            <a:endParaRPr lang="en-US" sz="1150" dirty="0"/>
-          </a:p>
-        </p:txBody>
-      </p:sp>
-      <p:sp>
-        <p:nvSpPr>
-          <p:cNvPr id="28" name="Text 26"/>
-          <p:cNvSpPr/>
-          <p:nvPr/>
-        </p:nvSpPr>
-        <p:spPr>
-          <a:xfrm>
-            <a:off x="4773168" y="3483864"/>
-            <a:ext cx="3886200" cy="512064"/>
-          </a:xfrm>
-          <a:prstGeom prst="rect">
-            <a:avLst/>
-          </a:prstGeom>
-          <a:noFill/>
-          <a:ln/>
-        </p:spPr>
-        <p:txBody>
-          <a:bodyPr wrap="square" lIns="0" tIns="0" rIns="0" bIns="0" rtlCol="0" anchor="ctr"/>
-          <a:lstStyle/>
-          <a:p>
-            <a:pPr marL="0" indent="0">
-              <a:buNone/>
-            </a:pPr>
-            <a:r>
-              <a:rPr lang="en-US" sz="1000" dirty="0">
-                <a:solidFill>
-                  <a:srgbClr val="3C4D6B"/>
-                </a:solidFill>
-              </a:rPr>
-              <a:t>IMSI not in any active range config.</a:t>
-            </a:r>
-            <a:endParaRPr lang="en-US" sz="1000" dirty="0"/>
-          </a:p>
-          <a:p>
-            <a:pPr marL="0" indent="0">
-              <a:buNone/>
-            </a:pPr>
-            <a:r>
-              <a:rPr lang="en-US" sz="1000" dirty="0">
-                <a:solidFill>
-                  <a:srgbClr val="3C4D6B"/>
-                </a:solidFill>
-              </a:rPr>
-              <a:t>aaa-radius-server issues Access-Reject.</a:t>
-            </a:r>
-            <a:endParaRPr lang="en-US" sz="1000" dirty="0"/>
-          </a:p>
-        </p:txBody>
-      </p:sp>
-      <p:sp>
-        <p:nvSpPr>
-          <p:cNvPr id="29" name="Shape 27"/>
-          <p:cNvSpPr/>
-          <p:nvPr/>
-        </p:nvSpPr>
-        <p:spPr>
-          <a:xfrm>
-            <a:off x="4663440" y="4142232"/>
-            <a:ext cx="4114800" cy="868680"/>
-          </a:xfrm>
-          <a:prstGeom prst="rect">
-            <a:avLst/>
-          </a:prstGeom>
-          <a:solidFill>
-            <a:srgbClr val="FFEBEE"/>
-          </a:solidFill>
-          <a:ln w="12700">
-            <a:solidFill>
-              <a:srgbClr val="E05C5C"/>
-            </a:solidFill>
-            <a:prstDash val="solid"/>
-          </a:ln>
-        </p:spPr>
-        <p:txBody>
-          <a:bodyPr/>
-          <a:lstStyle/>
-          <a:p>
-            <a:endParaRPr lang="LID4096"/>
-          </a:p>
-        </p:txBody>
-      </p:sp>
-      <p:sp>
-        <p:nvSpPr>
-          <p:cNvPr id="30" name="Shape 28"/>
-          <p:cNvSpPr/>
-          <p:nvPr/>
-        </p:nvSpPr>
-        <p:spPr>
-          <a:xfrm>
-            <a:off x="4663440" y="4142232"/>
-            <a:ext cx="54864" cy="868680"/>
-          </a:xfrm>
-          <a:prstGeom prst="rect">
-            <a:avLst/>
-          </a:prstGeom>
-          <a:solidFill>
-            <a:srgbClr val="E05C5C"/>
-          </a:solidFill>
-          <a:ln w="12700">
-            <a:solidFill>
-              <a:srgbClr val="E05C5C"/>
-            </a:solidFill>
-            <a:prstDash val="solid"/>
-          </a:ln>
-        </p:spPr>
-        <p:txBody>
-          <a:bodyPr/>
-          <a:lstStyle/>
-          <a:p>
-            <a:endParaRPr lang="LID4096"/>
-          </a:p>
-        </p:txBody>
-      </p:sp>
-      <p:sp>
-        <p:nvSpPr>
-          <p:cNvPr id="31" name="Text 29"/>
-          <p:cNvSpPr/>
-          <p:nvPr/>
-        </p:nvSpPr>
-        <p:spPr>
-          <a:xfrm>
-            <a:off x="4773168" y="4187952"/>
-            <a:ext cx="3886200" cy="256032"/>
-          </a:xfrm>
-          <a:prstGeom prst="rect">
-            <a:avLst/>
-          </a:prstGeom>
-          <a:noFill/>
-          <a:ln/>
-        </p:spPr>
-        <p:txBody>
-          <a:bodyPr wrap="square" lIns="0" tIns="0" rIns="0" bIns="0" rtlCol="0" anchor="ctr"/>
-          <a:lstStyle/>
-          <a:p>
-            <a:pPr marL="0" indent="0">
-              <a:buNone/>
-            </a:pPr>
-            <a:r>
-              <a:rPr lang="en-US" sz="1150" b="1" dirty="0">
-                <a:solidFill>
-                  <a:srgbClr val="1E2761"/>
-                </a:solidFill>
-              </a:rPr>
-              <a:t>503 — Pool Exhausted</a:t>
-            </a:r>
-            <a:endParaRPr lang="en-US" sz="1150" dirty="0"/>
-          </a:p>
-        </p:txBody>
-      </p:sp>
-      <p:sp>
-        <p:nvSpPr>
-          <p:cNvPr id="32" name="Text 30"/>
-          <p:cNvSpPr/>
-          <p:nvPr/>
-        </p:nvSpPr>
-        <p:spPr>
-          <a:xfrm>
-            <a:off x="4773168" y="4443984"/>
-            <a:ext cx="3886200" cy="512064"/>
-          </a:xfrm>
-          <a:prstGeom prst="rect">
-            <a:avLst/>
-          </a:prstGeom>
-          <a:noFill/>
-          <a:ln/>
-        </p:spPr>
-        <p:txBody>
-          <a:bodyPr wrap="square" lIns="0" tIns="0" rIns="0" bIns="0" rtlCol="0" anchor="ctr"/>
-          <a:lstStyle/>
-          <a:p>
-            <a:pPr marL="0" indent="0">
-              <a:buNone/>
-            </a:pPr>
-            <a:r>
-              <a:rPr lang="en-US" sz="1000" dirty="0">
-                <a:solidFill>
-                  <a:srgbClr val="3C4D6B"/>
-                </a:solidFill>
-              </a:rPr>
-              <a:t>No available IPs remaining.</a:t>
-            </a:r>
-            <a:endParaRPr lang="en-US" sz="1000" dirty="0"/>
-          </a:p>
-          <a:p>
-            <a:pPr marL="0" indent="0">
-              <a:buNone/>
-            </a:pPr>
-            <a:r>
-              <a:rPr lang="en-US" sz="1000" dirty="0">
-                <a:solidFill>
-                  <a:srgbClr val="3C4D6B"/>
-                </a:solidFill>
-              </a:rPr>
-              <a:t>Create a new pool.</a:t>
-            </a:r>
-            <a:endParaRPr lang="en-US" sz="1000" dirty="0"/>
-          </a:p>
-          <a:p>
-            <a:pPr marL="0" indent="0">
-              <a:buNone/>
-            </a:pPr>
-            <a:r>
-              <a:rPr lang="en-US" sz="1000" dirty="0">
-                <a:solidFill>
-                  <a:srgbClr val="3C4D6B"/>
-                </a:solidFill>
-              </a:rPr>
-              <a:t>Alert fires automatically.</a:t>
-            </a:r>
-            <a:endParaRPr lang="en-US" sz="1000" dirty="0"/>
           </a:p>
         </p:txBody>
       </p:sp>

--- a/docs/aaa-platform-presentation-github.pptx
+++ b/docs/aaa-platform-presentation-github.pptx
@@ -283,6 +283,13 @@
           </p:nvPr>
         </p:nvSpPr>
         <p:spPr/>
+        <p:txBody>
+          <a:bodyPr/>
+          <a:lstStyle/>
+          <a:p>
+            <a:endParaRPr lang="LID4096"/>
+          </a:p>
+        </p:txBody>
       </p:sp>
       <p:sp>
         <p:nvSpPr>
@@ -367,6 +374,13 @@
           </p:nvPr>
         </p:nvSpPr>
         <p:spPr/>
+        <p:txBody>
+          <a:bodyPr/>
+          <a:lstStyle/>
+          <a:p>
+            <a:endParaRPr lang="LID4096"/>
+          </a:p>
+        </p:txBody>
       </p:sp>
       <p:sp>
         <p:nvSpPr>
@@ -451,6 +465,13 @@
           </p:nvPr>
         </p:nvSpPr>
         <p:spPr/>
+        <p:txBody>
+          <a:bodyPr/>
+          <a:lstStyle/>
+          <a:p>
+            <a:endParaRPr lang="LID4096"/>
+          </a:p>
+        </p:txBody>
       </p:sp>
       <p:sp>
         <p:nvSpPr>
@@ -535,6 +556,13 @@
           </p:nvPr>
         </p:nvSpPr>
         <p:spPr/>
+        <p:txBody>
+          <a:bodyPr/>
+          <a:lstStyle/>
+          <a:p>
+            <a:endParaRPr lang="LID4096"/>
+          </a:p>
+        </p:txBody>
       </p:sp>
       <p:sp>
         <p:nvSpPr>
@@ -619,6 +647,13 @@
           </p:nvPr>
         </p:nvSpPr>
         <p:spPr/>
+        <p:txBody>
+          <a:bodyPr/>
+          <a:lstStyle/>
+          <a:p>
+            <a:endParaRPr lang="LID4096"/>
+          </a:p>
+        </p:txBody>
       </p:sp>
       <p:sp>
         <p:nvSpPr>
@@ -703,6 +738,13 @@
           </p:nvPr>
         </p:nvSpPr>
         <p:spPr/>
+        <p:txBody>
+          <a:bodyPr/>
+          <a:lstStyle/>
+          <a:p>
+            <a:endParaRPr lang="LID4096"/>
+          </a:p>
+        </p:txBody>
       </p:sp>
       <p:sp>
         <p:nvSpPr>
@@ -787,6 +829,13 @@
           </p:nvPr>
         </p:nvSpPr>
         <p:spPr/>
+        <p:txBody>
+          <a:bodyPr/>
+          <a:lstStyle/>
+          <a:p>
+            <a:endParaRPr lang="LID4096"/>
+          </a:p>
+        </p:txBody>
       </p:sp>
       <p:sp>
         <p:nvSpPr>
@@ -871,6 +920,13 @@
           </p:nvPr>
         </p:nvSpPr>
         <p:spPr/>
+        <p:txBody>
+          <a:bodyPr/>
+          <a:lstStyle/>
+          <a:p>
+            <a:endParaRPr lang="LID4096"/>
+          </a:p>
+        </p:txBody>
       </p:sp>
       <p:sp>
         <p:nvSpPr>
@@ -969,6 +1025,13 @@
             </a:solidFill>
           </a:ln>
         </p:spPr>
+        <p:txBody>
+          <a:bodyPr/>
+          <a:lstStyle/>
+          <a:p>
+            <a:endParaRPr lang="LID4096"/>
+          </a:p>
+        </p:txBody>
       </p:sp>
       <p:sp>
         <p:nvSpPr>
@@ -1089,6 +1152,13 @@
           </p:nvPr>
         </p:nvSpPr>
         <p:spPr/>
+        <p:txBody>
+          <a:bodyPr/>
+          <a:lstStyle/>
+          <a:p>
+            <a:endParaRPr lang="LID4096"/>
+          </a:p>
+        </p:txBody>
       </p:sp>
       <p:sp>
         <p:nvSpPr>
@@ -1173,6 +1243,13 @@
           </p:nvPr>
         </p:nvSpPr>
         <p:spPr/>
+        <p:txBody>
+          <a:bodyPr/>
+          <a:lstStyle/>
+          <a:p>
+            <a:endParaRPr lang="LID4096"/>
+          </a:p>
+        </p:txBody>
       </p:sp>
       <p:sp>
         <p:nvSpPr>
@@ -1257,6 +1334,13 @@
           </p:nvPr>
         </p:nvSpPr>
         <p:spPr/>
+        <p:txBody>
+          <a:bodyPr/>
+          <a:lstStyle/>
+          <a:p>
+            <a:endParaRPr lang="LID4096"/>
+          </a:p>
+        </p:txBody>
       </p:sp>
       <p:sp>
         <p:nvSpPr>
@@ -1341,6 +1425,13 @@
           </p:nvPr>
         </p:nvSpPr>
         <p:spPr/>
+        <p:txBody>
+          <a:bodyPr/>
+          <a:lstStyle/>
+          <a:p>
+            <a:endParaRPr lang="LID4096"/>
+          </a:p>
+        </p:txBody>
       </p:sp>
       <p:sp>
         <p:nvSpPr>
@@ -1425,6 +1516,13 @@
           </p:nvPr>
         </p:nvSpPr>
         <p:spPr/>
+        <p:txBody>
+          <a:bodyPr/>
+          <a:lstStyle/>
+          <a:p>
+            <a:endParaRPr lang="LID4096"/>
+          </a:p>
+        </p:txBody>
       </p:sp>
       <p:sp>
         <p:nvSpPr>
@@ -1509,6 +1607,13 @@
           </p:nvPr>
         </p:nvSpPr>
         <p:spPr/>
+        <p:txBody>
+          <a:bodyPr/>
+          <a:lstStyle/>
+          <a:p>
+            <a:endParaRPr lang="LID4096"/>
+          </a:p>
+        </p:txBody>
       </p:sp>
       <p:sp>
         <p:nvSpPr>
@@ -1593,6 +1698,13 @@
           </p:nvPr>
         </p:nvSpPr>
         <p:spPr/>
+        <p:txBody>
+          <a:bodyPr/>
+          <a:lstStyle/>
+          <a:p>
+            <a:endParaRPr lang="LID4096"/>
+          </a:p>
+        </p:txBody>
       </p:sp>
       <p:sp>
         <p:nvSpPr>
@@ -23006,7 +23118,7 @@
                   <a:srgbClr val="1E2761"/>
                 </a:solidFill>
               </a:rPr>
-              <a:t>~500 Regression Tests on K8s</a:t>
+              <a:t>500+ Regression Tests on K8s</a:t>
             </a:r>
           </a:p>
           <a:p>
@@ -23075,7 +23187,7 @@
                   <a:srgbClr val="1E2761"/>
                 </a:solidFill>
               </a:rPr>
-              <a:t>Dedicated Load-Test Pod</a:t>
+              <a:t>Dedicated Load-Test</a:t>
             </a:r>
           </a:p>
           <a:p>
@@ -23131,7 +23243,7 @@
                   <a:srgbClr val="1E2761"/>
                 </a:solidFill>
               </a:rPr>
-              <a:t>Routing Domain support</a:t>
+              <a:t>Routing Domain and IP management tool support </a:t>
             </a:r>
           </a:p>
           <a:p>
@@ -23144,23 +23256,7 @@
                   <a:srgbClr val="3C4D6B"/>
                 </a:solidFill>
               </a:rPr>
-              <a:t>Per </a:t>
-            </a:r>
-            <a:r>
-              <a:rPr lang="en-US" sz="950" dirty="0" err="1">
-                <a:solidFill>
-                  <a:srgbClr val="3C4D6B"/>
-                </a:solidFill>
-              </a:rPr>
-              <a:t>vDOM</a:t>
-            </a:r>
-            <a:r>
-              <a:rPr lang="en-US" sz="950" dirty="0">
-                <a:solidFill>
-                  <a:srgbClr val="3C4D6B"/>
-                </a:solidFill>
-              </a:rPr>
-              <a:t>, Per Gi interface routing-domain</a:t>
+              <a:t>Per vDOM, Per Gi interface routing-domain</a:t>
             </a:r>
           </a:p>
         </p:txBody>
@@ -23259,7 +23355,7 @@
                   <a:srgbClr val="1E2761"/>
                 </a:solidFill>
               </a:rPr>
-              <a:t>Out-of-the-Box Prometheus Alerting</a:t>
+              <a:t>Out-of-the-Box Prometheus Alerting with Zabbix</a:t>
             </a:r>
           </a:p>
           <a:p>
@@ -23371,7 +23467,7 @@
                   <a:srgbClr val="1E2761"/>
                 </a:solidFill>
               </a:rPr>
-              <a:t>Auto Static-IP for All SIM Types</a:t>
+              <a:t>Static-IP for All 4 SIM Types (automatic provisioning)</a:t>
             </a:r>
           </a:p>
           <a:p>
